--- a/notebooks/decks/panel_volatility_pipeline_results.pptx
+++ b/notebooks/decks/panel_volatility_pipeline_results.pptx
@@ -2,20 +2,28 @@
 <file path=ppt/presentation.xml><?xml version="1.0" encoding="utf-8"?>
 <p:presentation xmlns:p="http://schemas.openxmlformats.org/presentationml/2006/main">
   <p:sldMasterIdLst>
-    <p:sldMasterId xmlns:r="http://schemas.openxmlformats.org/officeDocument/2006/relationships" id="2147483648" r:id="R7ced27d5c6b147c1"/>
+    <p:sldMasterId xmlns:r="http://schemas.openxmlformats.org/officeDocument/2006/relationships" id="2147483648" r:id="Rca2594893b6b41d3"/>
   </p:sldMasterIdLst>
   <p:notesMasterIdLst>
-    <p:notesMasterId xmlns:r="http://schemas.openxmlformats.org/officeDocument/2006/relationships" r:id="Ra9c85e99f0a74673"/>
+    <p:notesMasterId xmlns:r="http://schemas.openxmlformats.org/officeDocument/2006/relationships" r:id="R5171a73f1f844cdb"/>
   </p:notesMasterIdLst>
   <p:sldIdLst>
-    <p:sldId xmlns:r="http://schemas.openxmlformats.org/officeDocument/2006/relationships" id="256" r:id="Re866a2ed8ccf4939"/>
-    <p:sldId xmlns:r="http://schemas.openxmlformats.org/officeDocument/2006/relationships" id="257" r:id="R2924d74779aa4855"/>
-    <p:sldId xmlns:r="http://schemas.openxmlformats.org/officeDocument/2006/relationships" id="258" r:id="Rc087e12ea4c6459f"/>
-    <p:sldId xmlns:r="http://schemas.openxmlformats.org/officeDocument/2006/relationships" id="259" r:id="Rba4215ecf7104dbc"/>
-    <p:sldId xmlns:r="http://schemas.openxmlformats.org/officeDocument/2006/relationships" id="260" r:id="R1f3e41e19ae742d0"/>
-    <p:sldId xmlns:r="http://schemas.openxmlformats.org/officeDocument/2006/relationships" id="261" r:id="Ra7617904d2c5494d"/>
-    <p:sldId xmlns:r="http://schemas.openxmlformats.org/officeDocument/2006/relationships" id="262" r:id="R7e23a7d0390f4b6d"/>
-    <p:sldId xmlns:r="http://schemas.openxmlformats.org/officeDocument/2006/relationships" id="263" r:id="Rb9e5cdece8304346"/>
+    <p:sldId xmlns:r="http://schemas.openxmlformats.org/officeDocument/2006/relationships" id="256" r:id="Rfb0d49a734b34ba3"/>
+    <p:sldId xmlns:r="http://schemas.openxmlformats.org/officeDocument/2006/relationships" id="257" r:id="Ra66e372b81c64b19"/>
+    <p:sldId xmlns:r="http://schemas.openxmlformats.org/officeDocument/2006/relationships" id="258" r:id="R7d14e487838b43ac"/>
+    <p:sldId xmlns:r="http://schemas.openxmlformats.org/officeDocument/2006/relationships" id="259" r:id="Rd8653fd0af344444"/>
+    <p:sldId xmlns:r="http://schemas.openxmlformats.org/officeDocument/2006/relationships" id="260" r:id="Re28e6163819646cd"/>
+    <p:sldId xmlns:r="http://schemas.openxmlformats.org/officeDocument/2006/relationships" id="261" r:id="R8b9658c1f3ef4de3"/>
+    <p:sldId xmlns:r="http://schemas.openxmlformats.org/officeDocument/2006/relationships" id="262" r:id="R183506d6d2d540c6"/>
+    <p:sldId xmlns:r="http://schemas.openxmlformats.org/officeDocument/2006/relationships" id="263" r:id="Rf59e3de3ea98487c"/>
+    <p:sldId xmlns:r="http://schemas.openxmlformats.org/officeDocument/2006/relationships" id="264" r:id="R276a5ff4fa594dd1"/>
+    <p:sldId xmlns:r="http://schemas.openxmlformats.org/officeDocument/2006/relationships" id="265" r:id="Ra74fd8efeaaa4a76"/>
+    <p:sldId xmlns:r="http://schemas.openxmlformats.org/officeDocument/2006/relationships" id="266" r:id="R3c8e085b209b42a0"/>
+    <p:sldId xmlns:r="http://schemas.openxmlformats.org/officeDocument/2006/relationships" id="267" r:id="R5a1016a618cd4bb1"/>
+    <p:sldId xmlns:r="http://schemas.openxmlformats.org/officeDocument/2006/relationships" id="268" r:id="Rb30be09b34464804"/>
+    <p:sldId xmlns:r="http://schemas.openxmlformats.org/officeDocument/2006/relationships" id="269" r:id="R1af484b7c0b441e5"/>
+    <p:sldId xmlns:r="http://schemas.openxmlformats.org/officeDocument/2006/relationships" id="270" r:id="Rce099bbb406442e9"/>
+    <p:sldId xmlns:r="http://schemas.openxmlformats.org/officeDocument/2006/relationships" id="271" r:id="Rd1d0a334e08a45f5"/>
   </p:sldIdLst>
   <p:sldSz cx="12192000" cy="6858000"/>
   <p:notesSz cx="6858000" cy="9144000"/>
@@ -479,6 +487,496 @@
 </p:notes>
 </file>
 
+<file path=ppt/notesSlides/notesSlide10.xml><?xml version="1.0" encoding="utf-8"?>
+<p:notes xmlns:p="http://schemas.openxmlformats.org/presentationml/2006/main">
+  <p:cSld>
+    <p:spTree>
+      <p:nvGrpSpPr>
+        <p:cNvPr id="1" name=""/>
+        <p:cNvGrpSpPr/>
+        <p:nvPr/>
+      </p:nvGrpSpPr>
+      <p:grpSpPr>
+        <a:xfrm xmlns:a="http://schemas.openxmlformats.org/drawingml/2006/main"/>
+      </p:grpSpPr>
+      <p:sp>
+        <p:nvSpPr>
+          <p:cNvPr id="2" name="Slide Image Placeholder 1"/>
+          <p:cNvSpPr>
+            <a:spLocks xmlns:a="http://schemas.openxmlformats.org/drawingml/2006/main" noGrp="1"/>
+          </p:cNvSpPr>
+          <p:nvPr>
+            <p:ph type="sldImg" idx="0"/>
+          </p:nvPr>
+        </p:nvSpPr>
+        <p:spPr/>
+      </p:sp>
+      <p:sp>
+        <p:nvSpPr>
+          <p:cNvPr id="3" name="Notes Placeholder 2"/>
+          <p:cNvSpPr>
+            <a:spLocks xmlns:a="http://schemas.openxmlformats.org/drawingml/2006/main" noGrp="1"/>
+          </p:cNvSpPr>
+          <p:nvPr>
+            <p:ph type="body" idx="1"/>
+          </p:nvPr>
+        </p:nvSpPr>
+        <p:spPr/>
+        <p:txBody>
+          <a:bodyPr xmlns:a="http://schemas.openxmlformats.org/drawingml/2006/main"/>
+          <a:lstStyle xmlns:a="http://schemas.openxmlformats.org/drawingml/2006/main"/>
+          <a:p xmlns:a="http://schemas.openxmlformats.org/drawingml/2006/main">
+            <a:r>
+              <a:t>Template layout: title, subtitle, three KPI placeholders, and a wide executive-summary placeholder.</a:t>
+            </a:r>
+          </a:p>
+        </p:txBody>
+      </p:sp>
+      <p:sp>
+        <p:nvSpPr>
+          <p:cNvPr id="4" name="Slide Number Placeholder 3"/>
+          <p:cNvSpPr>
+            <a:spLocks xmlns:a="http://schemas.openxmlformats.org/drawingml/2006/main" noGrp="1"/>
+          </p:cNvSpPr>
+          <p:nvPr>
+            <p:ph type="sldNum" idx="5"/>
+          </p:nvPr>
+        </p:nvSpPr>
+        <p:spPr/>
+        <p:txBody>
+          <a:bodyPr xmlns:a="http://schemas.openxmlformats.org/drawingml/2006/main"/>
+          <a:lstStyle xmlns:a="http://schemas.openxmlformats.org/drawingml/2006/main"/>
+          <a:p xmlns:a="http://schemas.openxmlformats.org/drawingml/2006/main"/>
+        </p:txBody>
+      </p:sp>
+    </p:spTree>
+  </p:cSld>
+  <p:clrMapOvr>
+    <a:masterClrMapping xmlns:a="http://schemas.openxmlformats.org/drawingml/2006/main"/>
+  </p:clrMapOvr>
+</p:notes>
+</file>
+
+<file path=ppt/notesSlides/notesSlide11.xml><?xml version="1.0" encoding="utf-8"?>
+<p:notes xmlns:p="http://schemas.openxmlformats.org/presentationml/2006/main">
+  <p:cSld>
+    <p:spTree>
+      <p:nvGrpSpPr>
+        <p:cNvPr id="1" name=""/>
+        <p:cNvGrpSpPr/>
+        <p:nvPr/>
+      </p:nvGrpSpPr>
+      <p:grpSpPr>
+        <a:xfrm xmlns:a="http://schemas.openxmlformats.org/drawingml/2006/main"/>
+      </p:grpSpPr>
+      <p:sp>
+        <p:nvSpPr>
+          <p:cNvPr id="2" name="Slide Image Placeholder 1"/>
+          <p:cNvSpPr>
+            <a:spLocks xmlns:a="http://schemas.openxmlformats.org/drawingml/2006/main" noGrp="1"/>
+          </p:cNvSpPr>
+          <p:nvPr>
+            <p:ph type="sldImg" idx="0"/>
+          </p:nvPr>
+        </p:nvSpPr>
+        <p:spPr/>
+      </p:sp>
+      <p:sp>
+        <p:nvSpPr>
+          <p:cNvPr id="3" name="Notes Placeholder 2"/>
+          <p:cNvSpPr>
+            <a:spLocks xmlns:a="http://schemas.openxmlformats.org/drawingml/2006/main" noGrp="1"/>
+          </p:cNvSpPr>
+          <p:nvPr>
+            <p:ph type="body" idx="1"/>
+          </p:nvPr>
+        </p:nvSpPr>
+        <p:spPr/>
+        <p:txBody>
+          <a:bodyPr xmlns:a="http://schemas.openxmlformats.org/drawingml/2006/main"/>
+          <a:lstStyle xmlns:a="http://schemas.openxmlformats.org/drawingml/2006/main"/>
+          <a:p xmlns:a="http://schemas.openxmlformats.org/drawingml/2006/main">
+            <a:r>
+              <a:t>Template layout: two-column comparison with editable column labels, picture, and evidence placeholders.</a:t>
+            </a:r>
+          </a:p>
+        </p:txBody>
+      </p:sp>
+      <p:sp>
+        <p:nvSpPr>
+          <p:cNvPr id="4" name="Slide Number Placeholder 3"/>
+          <p:cNvSpPr>
+            <a:spLocks xmlns:a="http://schemas.openxmlformats.org/drawingml/2006/main" noGrp="1"/>
+          </p:cNvSpPr>
+          <p:nvPr>
+            <p:ph type="sldNum" idx="5"/>
+          </p:nvPr>
+        </p:nvSpPr>
+        <p:spPr/>
+        <p:txBody>
+          <a:bodyPr xmlns:a="http://schemas.openxmlformats.org/drawingml/2006/main"/>
+          <a:lstStyle xmlns:a="http://schemas.openxmlformats.org/drawingml/2006/main"/>
+          <a:p xmlns:a="http://schemas.openxmlformats.org/drawingml/2006/main"/>
+        </p:txBody>
+      </p:sp>
+    </p:spTree>
+  </p:cSld>
+  <p:clrMapOvr>
+    <a:masterClrMapping xmlns:a="http://schemas.openxmlformats.org/drawingml/2006/main"/>
+  </p:clrMapOvr>
+</p:notes>
+</file>
+
+<file path=ppt/notesSlides/notesSlide12.xml><?xml version="1.0" encoding="utf-8"?>
+<p:notes xmlns:p="http://schemas.openxmlformats.org/presentationml/2006/main">
+  <p:cSld>
+    <p:spTree>
+      <p:nvGrpSpPr>
+        <p:cNvPr id="1" name=""/>
+        <p:cNvGrpSpPr/>
+        <p:nvPr/>
+      </p:nvGrpSpPr>
+      <p:grpSpPr>
+        <a:xfrm xmlns:a="http://schemas.openxmlformats.org/drawingml/2006/main"/>
+      </p:grpSpPr>
+      <p:sp>
+        <p:nvSpPr>
+          <p:cNvPr id="2" name="Slide Image Placeholder 1"/>
+          <p:cNvSpPr>
+            <a:spLocks xmlns:a="http://schemas.openxmlformats.org/drawingml/2006/main" noGrp="1"/>
+          </p:cNvSpPr>
+          <p:nvPr>
+            <p:ph type="sldImg" idx="0"/>
+          </p:nvPr>
+        </p:nvSpPr>
+        <p:spPr/>
+      </p:sp>
+      <p:sp>
+        <p:nvSpPr>
+          <p:cNvPr id="3" name="Notes Placeholder 2"/>
+          <p:cNvSpPr>
+            <a:spLocks xmlns:a="http://schemas.openxmlformats.org/drawingml/2006/main" noGrp="1"/>
+          </p:cNvSpPr>
+          <p:nvPr>
+            <p:ph type="body" idx="1"/>
+          </p:nvPr>
+        </p:nvSpPr>
+        <p:spPr/>
+        <p:txBody>
+          <a:bodyPr xmlns:a="http://schemas.openxmlformats.org/drawingml/2006/main"/>
+          <a:lstStyle xmlns:a="http://schemas.openxmlformats.org/drawingml/2006/main"/>
+          <a:p xmlns:a="http://schemas.openxmlformats.org/drawingml/2006/main">
+            <a:r>
+              <a:t>Template layout: primary chart placeholder with a dedicated insight or annotation sidebar.</a:t>
+            </a:r>
+          </a:p>
+        </p:txBody>
+      </p:sp>
+      <p:sp>
+        <p:nvSpPr>
+          <p:cNvPr id="4" name="Slide Number Placeholder 3"/>
+          <p:cNvSpPr>
+            <a:spLocks xmlns:a="http://schemas.openxmlformats.org/drawingml/2006/main" noGrp="1"/>
+          </p:cNvSpPr>
+          <p:nvPr>
+            <p:ph type="sldNum" idx="5"/>
+          </p:nvPr>
+        </p:nvSpPr>
+        <p:spPr/>
+        <p:txBody>
+          <a:bodyPr xmlns:a="http://schemas.openxmlformats.org/drawingml/2006/main"/>
+          <a:lstStyle xmlns:a="http://schemas.openxmlformats.org/drawingml/2006/main"/>
+          <a:p xmlns:a="http://schemas.openxmlformats.org/drawingml/2006/main"/>
+        </p:txBody>
+      </p:sp>
+    </p:spTree>
+  </p:cSld>
+  <p:clrMapOvr>
+    <a:masterClrMapping xmlns:a="http://schemas.openxmlformats.org/drawingml/2006/main"/>
+  </p:clrMapOvr>
+</p:notes>
+</file>
+
+<file path=ppt/notesSlides/notesSlide13.xml><?xml version="1.0" encoding="utf-8"?>
+<p:notes xmlns:p="http://schemas.openxmlformats.org/presentationml/2006/main">
+  <p:cSld>
+    <p:spTree>
+      <p:nvGrpSpPr>
+        <p:cNvPr id="1" name=""/>
+        <p:cNvGrpSpPr/>
+        <p:nvPr/>
+      </p:nvGrpSpPr>
+      <p:grpSpPr>
+        <a:xfrm xmlns:a="http://schemas.openxmlformats.org/drawingml/2006/main"/>
+      </p:grpSpPr>
+      <p:sp>
+        <p:nvSpPr>
+          <p:cNvPr id="2" name="Slide Image Placeholder 1"/>
+          <p:cNvSpPr>
+            <a:spLocks xmlns:a="http://schemas.openxmlformats.org/drawingml/2006/main" noGrp="1"/>
+          </p:cNvSpPr>
+          <p:nvPr>
+            <p:ph type="sldImg" idx="0"/>
+          </p:nvPr>
+        </p:nvSpPr>
+        <p:spPr/>
+      </p:sp>
+      <p:sp>
+        <p:nvSpPr>
+          <p:cNvPr id="3" name="Notes Placeholder 2"/>
+          <p:cNvSpPr>
+            <a:spLocks xmlns:a="http://schemas.openxmlformats.org/drawingml/2006/main" noGrp="1"/>
+          </p:cNvSpPr>
+          <p:nvPr>
+            <p:ph type="body" idx="1"/>
+          </p:nvPr>
+        </p:nvSpPr>
+        <p:spPr/>
+        <p:txBody>
+          <a:bodyPr xmlns:a="http://schemas.openxmlformats.org/drawingml/2006/main"/>
+          <a:lstStyle xmlns:a="http://schemas.openxmlformats.org/drawingml/2006/main"/>
+          <a:p xmlns:a="http://schemas.openxmlformats.org/drawingml/2006/main">
+            <a:r>
+              <a:t>Template layout: wide chart placeholder followed by three editable annotation blocks.</a:t>
+            </a:r>
+          </a:p>
+        </p:txBody>
+      </p:sp>
+      <p:sp>
+        <p:nvSpPr>
+          <p:cNvPr id="4" name="Slide Number Placeholder 3"/>
+          <p:cNvSpPr>
+            <a:spLocks xmlns:a="http://schemas.openxmlformats.org/drawingml/2006/main" noGrp="1"/>
+          </p:cNvSpPr>
+          <p:nvPr>
+            <p:ph type="sldNum" idx="5"/>
+          </p:nvPr>
+        </p:nvSpPr>
+        <p:spPr/>
+        <p:txBody>
+          <a:bodyPr xmlns:a="http://schemas.openxmlformats.org/drawingml/2006/main"/>
+          <a:lstStyle xmlns:a="http://schemas.openxmlformats.org/drawingml/2006/main"/>
+          <a:p xmlns:a="http://schemas.openxmlformats.org/drawingml/2006/main"/>
+        </p:txBody>
+      </p:sp>
+    </p:spTree>
+  </p:cSld>
+  <p:clrMapOvr>
+    <a:masterClrMapping xmlns:a="http://schemas.openxmlformats.org/drawingml/2006/main"/>
+  </p:clrMapOvr>
+</p:notes>
+</file>
+
+<file path=ppt/notesSlides/notesSlide14.xml><?xml version="1.0" encoding="utf-8"?>
+<p:notes xmlns:p="http://schemas.openxmlformats.org/presentationml/2006/main">
+  <p:cSld>
+    <p:spTree>
+      <p:nvGrpSpPr>
+        <p:cNvPr id="1" name=""/>
+        <p:cNvGrpSpPr/>
+        <p:nvPr/>
+      </p:nvGrpSpPr>
+      <p:grpSpPr>
+        <a:xfrm xmlns:a="http://schemas.openxmlformats.org/drawingml/2006/main"/>
+      </p:grpSpPr>
+      <p:sp>
+        <p:nvSpPr>
+          <p:cNvPr id="2" name="Slide Image Placeholder 1"/>
+          <p:cNvSpPr>
+            <a:spLocks xmlns:a="http://schemas.openxmlformats.org/drawingml/2006/main" noGrp="1"/>
+          </p:cNvSpPr>
+          <p:nvPr>
+            <p:ph type="sldImg" idx="0"/>
+          </p:nvPr>
+        </p:nvSpPr>
+        <p:spPr/>
+      </p:sp>
+      <p:sp>
+        <p:nvSpPr>
+          <p:cNvPr id="3" name="Notes Placeholder 2"/>
+          <p:cNvSpPr>
+            <a:spLocks xmlns:a="http://schemas.openxmlformats.org/drawingml/2006/main" noGrp="1"/>
+          </p:cNvSpPr>
+          <p:nvPr>
+            <p:ph type="body" idx="1"/>
+          </p:nvPr>
+        </p:nvSpPr>
+        <p:spPr/>
+        <p:txBody>
+          <a:bodyPr xmlns:a="http://schemas.openxmlformats.org/drawingml/2006/main"/>
+          <a:lstStyle xmlns:a="http://schemas.openxmlformats.org/drawingml/2006/main"/>
+          <a:p xmlns:a="http://schemas.openxmlformats.org/drawingml/2006/main">
+            <a:r>
+              <a:t>Template layout: four-quadrant dashboard with picture, chart, table, and commentary placeholders.</a:t>
+            </a:r>
+          </a:p>
+        </p:txBody>
+      </p:sp>
+      <p:sp>
+        <p:nvSpPr>
+          <p:cNvPr id="4" name="Slide Number Placeholder 3"/>
+          <p:cNvSpPr>
+            <a:spLocks xmlns:a="http://schemas.openxmlformats.org/drawingml/2006/main" noGrp="1"/>
+          </p:cNvSpPr>
+          <p:nvPr>
+            <p:ph type="sldNum" idx="5"/>
+          </p:nvPr>
+        </p:nvSpPr>
+        <p:spPr/>
+        <p:txBody>
+          <a:bodyPr xmlns:a="http://schemas.openxmlformats.org/drawingml/2006/main"/>
+          <a:lstStyle xmlns:a="http://schemas.openxmlformats.org/drawingml/2006/main"/>
+          <a:p xmlns:a="http://schemas.openxmlformats.org/drawingml/2006/main"/>
+        </p:txBody>
+      </p:sp>
+    </p:spTree>
+  </p:cSld>
+  <p:clrMapOvr>
+    <a:masterClrMapping xmlns:a="http://schemas.openxmlformats.org/drawingml/2006/main"/>
+  </p:clrMapOvr>
+</p:notes>
+</file>
+
+<file path=ppt/notesSlides/notesSlide15.xml><?xml version="1.0" encoding="utf-8"?>
+<p:notes xmlns:p="http://schemas.openxmlformats.org/presentationml/2006/main">
+  <p:cSld>
+    <p:spTree>
+      <p:nvGrpSpPr>
+        <p:cNvPr id="1" name=""/>
+        <p:cNvGrpSpPr/>
+        <p:nvPr/>
+      </p:nvGrpSpPr>
+      <p:grpSpPr>
+        <a:xfrm xmlns:a="http://schemas.openxmlformats.org/drawingml/2006/main"/>
+      </p:grpSpPr>
+      <p:sp>
+        <p:nvSpPr>
+          <p:cNvPr id="2" name="Slide Image Placeholder 1"/>
+          <p:cNvSpPr>
+            <a:spLocks xmlns:a="http://schemas.openxmlformats.org/drawingml/2006/main" noGrp="1"/>
+          </p:cNvSpPr>
+          <p:nvPr>
+            <p:ph type="sldImg" idx="0"/>
+          </p:nvPr>
+        </p:nvSpPr>
+        <p:spPr/>
+      </p:sp>
+      <p:sp>
+        <p:nvSpPr>
+          <p:cNvPr id="3" name="Notes Placeholder 2"/>
+          <p:cNvSpPr>
+            <a:spLocks xmlns:a="http://schemas.openxmlformats.org/drawingml/2006/main" noGrp="1"/>
+          </p:cNvSpPr>
+          <p:nvPr>
+            <p:ph type="body" idx="1"/>
+          </p:nvPr>
+        </p:nvSpPr>
+        <p:spPr/>
+        <p:txBody>
+          <a:bodyPr xmlns:a="http://schemas.openxmlformats.org/drawingml/2006/main"/>
+          <a:lstStyle xmlns:a="http://schemas.openxmlformats.org/drawingml/2006/main"/>
+          <a:p xmlns:a="http://schemas.openxmlformats.org/drawingml/2006/main">
+            <a:r>
+              <a:t>Template layout: dominant editable table placeholder with a supporting commentary or decision panel.</a:t>
+            </a:r>
+          </a:p>
+        </p:txBody>
+      </p:sp>
+      <p:sp>
+        <p:nvSpPr>
+          <p:cNvPr id="4" name="Slide Number Placeholder 3"/>
+          <p:cNvSpPr>
+            <a:spLocks xmlns:a="http://schemas.openxmlformats.org/drawingml/2006/main" noGrp="1"/>
+          </p:cNvSpPr>
+          <p:nvPr>
+            <p:ph type="sldNum" idx="5"/>
+          </p:nvPr>
+        </p:nvSpPr>
+        <p:spPr/>
+        <p:txBody>
+          <a:bodyPr xmlns:a="http://schemas.openxmlformats.org/drawingml/2006/main"/>
+          <a:lstStyle xmlns:a="http://schemas.openxmlformats.org/drawingml/2006/main"/>
+          <a:p xmlns:a="http://schemas.openxmlformats.org/drawingml/2006/main"/>
+        </p:txBody>
+      </p:sp>
+    </p:spTree>
+  </p:cSld>
+  <p:clrMapOvr>
+    <a:masterClrMapping xmlns:a="http://schemas.openxmlformats.org/drawingml/2006/main"/>
+  </p:clrMapOvr>
+</p:notes>
+</file>
+
+<file path=ppt/notesSlides/notesSlide16.xml><?xml version="1.0" encoding="utf-8"?>
+<p:notes xmlns:p="http://schemas.openxmlformats.org/presentationml/2006/main">
+  <p:cSld>
+    <p:spTree>
+      <p:nvGrpSpPr>
+        <p:cNvPr id="1" name=""/>
+        <p:cNvGrpSpPr/>
+        <p:nvPr/>
+      </p:nvGrpSpPr>
+      <p:grpSpPr>
+        <a:xfrm xmlns:a="http://schemas.openxmlformats.org/drawingml/2006/main"/>
+      </p:grpSpPr>
+      <p:sp>
+        <p:nvSpPr>
+          <p:cNvPr id="2" name="Slide Image Placeholder 1"/>
+          <p:cNvSpPr>
+            <a:spLocks xmlns:a="http://schemas.openxmlformats.org/drawingml/2006/main" noGrp="1"/>
+          </p:cNvSpPr>
+          <p:nvPr>
+            <p:ph type="sldImg" idx="0"/>
+          </p:nvPr>
+        </p:nvSpPr>
+        <p:spPr/>
+      </p:sp>
+      <p:sp>
+        <p:nvSpPr>
+          <p:cNvPr id="3" name="Notes Placeholder 2"/>
+          <p:cNvSpPr>
+            <a:spLocks xmlns:a="http://schemas.openxmlformats.org/drawingml/2006/main" noGrp="1"/>
+          </p:cNvSpPr>
+          <p:nvPr>
+            <p:ph type="body" idx="1"/>
+          </p:nvPr>
+        </p:nvSpPr>
+        <p:spPr/>
+        <p:txBody>
+          <a:bodyPr xmlns:a="http://schemas.openxmlformats.org/drawingml/2006/main"/>
+          <a:lstStyle xmlns:a="http://schemas.openxmlformats.org/drawingml/2006/main"/>
+          <a:p xmlns:a="http://schemas.openxmlformats.org/drawingml/2006/main">
+            <a:r>
+              <a:t>Template layout: closing title, logo, key takeaway, three next-step placeholders, and owner/contact placeholder.</a:t>
+            </a:r>
+          </a:p>
+        </p:txBody>
+      </p:sp>
+      <p:sp>
+        <p:nvSpPr>
+          <p:cNvPr id="4" name="Slide Number Placeholder 3"/>
+          <p:cNvSpPr>
+            <a:spLocks xmlns:a="http://schemas.openxmlformats.org/drawingml/2006/main" noGrp="1"/>
+          </p:cNvSpPr>
+          <p:nvPr>
+            <p:ph type="sldNum" idx="5"/>
+          </p:nvPr>
+        </p:nvSpPr>
+        <p:spPr/>
+        <p:txBody>
+          <a:bodyPr xmlns:a="http://schemas.openxmlformats.org/drawingml/2006/main"/>
+          <a:lstStyle xmlns:a="http://schemas.openxmlformats.org/drawingml/2006/main"/>
+          <a:p xmlns:a="http://schemas.openxmlformats.org/drawingml/2006/main"/>
+        </p:txBody>
+      </p:sp>
+    </p:spTree>
+  </p:cSld>
+  <p:clrMapOvr>
+    <a:masterClrMapping xmlns:a="http://schemas.openxmlformats.org/drawingml/2006/main"/>
+  </p:clrMapOvr>
+</p:notes>
+</file>
+
 <file path=ppt/notesSlides/notesSlide2.xml><?xml version="1.0" encoding="utf-8"?>
 <p:notes xmlns:p="http://schemas.openxmlformats.org/presentationml/2006/main">
   <p:cSld>
@@ -969,6 +1467,76 @@
 </p:notes>
 </file>
 
+<file path=ppt/notesSlides/notesSlide9.xml><?xml version="1.0" encoding="utf-8"?>
+<p:notes xmlns:p="http://schemas.openxmlformats.org/presentationml/2006/main">
+  <p:cSld>
+    <p:spTree>
+      <p:nvGrpSpPr>
+        <p:cNvPr id="1" name=""/>
+        <p:cNvGrpSpPr/>
+        <p:nvPr/>
+      </p:nvGrpSpPr>
+      <p:grpSpPr>
+        <a:xfrm xmlns:a="http://schemas.openxmlformats.org/drawingml/2006/main"/>
+      </p:grpSpPr>
+      <p:sp>
+        <p:nvSpPr>
+          <p:cNvPr id="2" name="Slide Image Placeholder 1"/>
+          <p:cNvSpPr>
+            <a:spLocks xmlns:a="http://schemas.openxmlformats.org/drawingml/2006/main" noGrp="1"/>
+          </p:cNvSpPr>
+          <p:nvPr>
+            <p:ph type="sldImg" idx="0"/>
+          </p:nvPr>
+        </p:nvSpPr>
+        <p:spPr/>
+      </p:sp>
+      <p:sp>
+        <p:nvSpPr>
+          <p:cNvPr id="3" name="Notes Placeholder 2"/>
+          <p:cNvSpPr>
+            <a:spLocks xmlns:a="http://schemas.openxmlformats.org/drawingml/2006/main" noGrp="1"/>
+          </p:cNvSpPr>
+          <p:nvPr>
+            <p:ph type="body" idx="1"/>
+          </p:nvPr>
+        </p:nvSpPr>
+        <p:spPr/>
+        <p:txBody>
+          <a:bodyPr xmlns:a="http://schemas.openxmlformats.org/drawingml/2006/main"/>
+          <a:lstStyle xmlns:a="http://schemas.openxmlformats.org/drawingml/2006/main"/>
+          <a:p xmlns:a="http://schemas.openxmlformats.org/drawingml/2006/main">
+            <a:r>
+              <a:t>Template layout: section divider with title, context, and optional supporting-object placeholders.</a:t>
+            </a:r>
+          </a:p>
+        </p:txBody>
+      </p:sp>
+      <p:sp>
+        <p:nvSpPr>
+          <p:cNvPr id="4" name="Slide Number Placeholder 3"/>
+          <p:cNvSpPr>
+            <a:spLocks xmlns:a="http://schemas.openxmlformats.org/drawingml/2006/main" noGrp="1"/>
+          </p:cNvSpPr>
+          <p:nvPr>
+            <p:ph type="sldNum" idx="5"/>
+          </p:nvPr>
+        </p:nvSpPr>
+        <p:spPr/>
+        <p:txBody>
+          <a:bodyPr xmlns:a="http://schemas.openxmlformats.org/drawingml/2006/main"/>
+          <a:lstStyle xmlns:a="http://schemas.openxmlformats.org/drawingml/2006/main"/>
+          <a:p xmlns:a="http://schemas.openxmlformats.org/drawingml/2006/main"/>
+        </p:txBody>
+      </p:sp>
+    </p:spTree>
+  </p:cSld>
+  <p:clrMapOvr>
+    <a:masterClrMapping xmlns:a="http://schemas.openxmlformats.org/drawingml/2006/main"/>
+  </p:clrMapOvr>
+</p:notes>
+</file>
+
 <file path=ppt/slideLayouts/slideLayout1.xml><?xml version="1.0" encoding="utf-8"?>
 <p:sldLayout xmlns:p="http://schemas.openxmlformats.org/presentationml/2006/main" type="title">
   <p:cSld name="Title Slide">
@@ -981,6 +1549,1742 @@
       <p:grpSpPr>
         <a:xfrm xmlns:a="http://schemas.openxmlformats.org/drawingml/2006/main"/>
       </p:grpSpPr>
+    </p:spTree>
+  </p:cSld>
+</p:sldLayout>
+</file>
+
+<file path=ppt/slideLayouts/slideLayout2.xml><?xml version="1.0" encoding="utf-8"?>
+<p:sldLayout xmlns:p="http://schemas.openxmlformats.org/presentationml/2006/main">
+  <p:cSld name="VR 01 Section Divider">
+    <p:spTree>
+      <p:nvGrpSpPr>
+        <p:cNvPr id="1" name=""/>
+        <p:cNvGrpSpPr/>
+        <p:nvPr/>
+      </p:nvGrpSpPr>
+      <p:grpSpPr>
+        <a:xfrm xmlns:a="http://schemas.openxmlformats.org/drawingml/2006/main"/>
+      </p:grpSpPr>
+      <p:sp>
+        <p:nvSpPr>
+          <p:cNvPr id="2" name="VR 01 Section Divider title 0">
+            <a:extLst xmlns:a="http://schemas.openxmlformats.org/drawingml/2006/main">
+              <a:ext uri="{FF2B5EF4-FFF2-40B4-BE49-F238E27FC236}">
+                <a16:creationId xmlns:a16="http://schemas.microsoft.com/office/drawing/2014/main" id="{E5F99D63-CCDF-4E0A-ACE9-C85B1999499B}"/>
+              </a:ext>
+            </a:extLst>
+          </p:cNvPr>
+          <p:cNvSpPr>
+            <a:spLocks xmlns:a="http://schemas.openxmlformats.org/drawingml/2006/main" noGrp="1"/>
+          </p:cNvSpPr>
+          <p:nvPr>
+            <p:ph type="title" idx="0"/>
+          </p:nvPr>
+        </p:nvSpPr>
+        <p:spPr>
+          <a:xfrm xmlns:a="http://schemas.openxmlformats.org/drawingml/2006/main">
+            <a:off x="723900" y="1571625"/>
+            <a:ext cx="9620250" cy="1257300"/>
+          </a:xfrm>
+        </p:spPr>
+        <p:txBody>
+          <a:bodyPr xmlns:a="http://schemas.openxmlformats.org/drawingml/2006/main"/>
+          <a:lstStyle xmlns:a="http://schemas.openxmlformats.org/drawingml/2006/main"/>
+          <a:p xmlns:a="http://schemas.openxmlformats.org/drawingml/2006/main">
+            <a:r>
+              <a:t/>
+            </a:r>
+          </a:p>
+        </p:txBody>
+      </p:sp>
+      <p:sp>
+        <p:nvSpPr>
+          <p:cNvPr id="3" name="VR 01 Section Divider subtitle 1">
+            <a:extLst xmlns:a="http://schemas.openxmlformats.org/drawingml/2006/main">
+              <a:ext uri="{FF2B5EF4-FFF2-40B4-BE49-F238E27FC236}">
+                <a16:creationId xmlns:a16="http://schemas.microsoft.com/office/drawing/2014/main" id="{E3A10209-507B-403D-A290-861BCD058F09}"/>
+              </a:ext>
+            </a:extLst>
+          </p:cNvPr>
+          <p:cNvSpPr>
+            <a:spLocks xmlns:a="http://schemas.openxmlformats.org/drawingml/2006/main" noGrp="1"/>
+          </p:cNvSpPr>
+          <p:nvPr>
+            <p:ph type="subTitle" idx="1"/>
+          </p:nvPr>
+        </p:nvSpPr>
+        <p:spPr>
+          <a:xfrm xmlns:a="http://schemas.openxmlformats.org/drawingml/2006/main">
+            <a:off x="723900" y="685800"/>
+            <a:ext cx="4953000" cy="266700"/>
+          </a:xfrm>
+        </p:spPr>
+        <p:txBody>
+          <a:bodyPr xmlns:a="http://schemas.openxmlformats.org/drawingml/2006/main"/>
+          <a:lstStyle xmlns:a="http://schemas.openxmlformats.org/drawingml/2006/main"/>
+          <a:p xmlns:a="http://schemas.openxmlformats.org/drawingml/2006/main">
+            <a:r>
+              <a:t/>
+            </a:r>
+          </a:p>
+        </p:txBody>
+      </p:sp>
+      <p:sp>
+        <p:nvSpPr>
+          <p:cNvPr id="4" name="VR 01 Section Divider body 2">
+            <a:extLst xmlns:a="http://schemas.openxmlformats.org/drawingml/2006/main">
+              <a:ext uri="{FF2B5EF4-FFF2-40B4-BE49-F238E27FC236}">
+                <a16:creationId xmlns:a16="http://schemas.microsoft.com/office/drawing/2014/main" id="{B85FED93-7557-41F5-85F9-72FBB333E1DB}"/>
+              </a:ext>
+            </a:extLst>
+          </p:cNvPr>
+          <p:cNvSpPr>
+            <a:spLocks xmlns:a="http://schemas.openxmlformats.org/drawingml/2006/main" noGrp="1"/>
+          </p:cNvSpPr>
+          <p:nvPr>
+            <p:ph type="body" idx="2"/>
+          </p:nvPr>
+        </p:nvSpPr>
+        <p:spPr>
+          <a:xfrm xmlns:a="http://schemas.openxmlformats.org/drawingml/2006/main">
+            <a:off x="723900" y="3105150"/>
+            <a:ext cx="8191500" cy="590550"/>
+          </a:xfrm>
+        </p:spPr>
+        <p:txBody>
+          <a:bodyPr xmlns:a="http://schemas.openxmlformats.org/drawingml/2006/main"/>
+          <a:lstStyle xmlns:a="http://schemas.openxmlformats.org/drawingml/2006/main"/>
+          <a:p xmlns:a="http://schemas.openxmlformats.org/drawingml/2006/main">
+            <a:r>
+              <a:t/>
+            </a:r>
+          </a:p>
+        </p:txBody>
+      </p:sp>
+      <p:sp>
+        <p:nvSpPr>
+          <p:cNvPr id="5" name="VR 01 Section Divider content 3">
+            <a:extLst xmlns:a="http://schemas.openxmlformats.org/drawingml/2006/main">
+              <a:ext uri="{FF2B5EF4-FFF2-40B4-BE49-F238E27FC236}">
+                <a16:creationId xmlns:a16="http://schemas.microsoft.com/office/drawing/2014/main" id="{FA43F72B-A021-4919-87FD-D1FBA8635529}"/>
+              </a:ext>
+            </a:extLst>
+          </p:cNvPr>
+          <p:cNvSpPr>
+            <a:spLocks xmlns:a="http://schemas.openxmlformats.org/drawingml/2006/main" noGrp="1"/>
+          </p:cNvSpPr>
+          <p:nvPr>
+            <p:ph idx="3"/>
+          </p:nvPr>
+        </p:nvSpPr>
+        <p:spPr>
+          <a:xfrm xmlns:a="http://schemas.openxmlformats.org/drawingml/2006/main">
+            <a:off x="723900" y="4933950"/>
+            <a:ext cx="5905500" cy="781050"/>
+          </a:xfrm>
+        </p:spPr>
+        <p:txBody>
+          <a:bodyPr xmlns:a="http://schemas.openxmlformats.org/drawingml/2006/main"/>
+          <a:lstStyle xmlns:a="http://schemas.openxmlformats.org/drawingml/2006/main"/>
+          <a:p xmlns:a="http://schemas.openxmlformats.org/drawingml/2006/main">
+            <a:r>
+              <a:t/>
+            </a:r>
+          </a:p>
+        </p:txBody>
+      </p:sp>
+    </p:spTree>
+  </p:cSld>
+</p:sldLayout>
+</file>
+
+<file path=ppt/slideLayouts/slideLayout3.xml><?xml version="1.0" encoding="utf-8"?>
+<p:sldLayout xmlns:p="http://schemas.openxmlformats.org/presentationml/2006/main">
+  <p:cSld name="VR 02 Executive Summary">
+    <p:spTree>
+      <p:nvGrpSpPr>
+        <p:cNvPr id="1" name=""/>
+        <p:cNvGrpSpPr/>
+        <p:nvPr/>
+      </p:nvGrpSpPr>
+      <p:grpSpPr>
+        <a:xfrm xmlns:a="http://schemas.openxmlformats.org/drawingml/2006/main"/>
+      </p:grpSpPr>
+      <p:sp>
+        <p:nvSpPr>
+          <p:cNvPr id="2" name="VR 02 Executive Summary title 0">
+            <a:extLst xmlns:a="http://schemas.openxmlformats.org/drawingml/2006/main">
+              <a:ext uri="{FF2B5EF4-FFF2-40B4-BE49-F238E27FC236}">
+                <a16:creationId xmlns:a16="http://schemas.microsoft.com/office/drawing/2014/main" id="{DA78BBA7-FD33-480C-B4A4-7D8D05CD107F}"/>
+              </a:ext>
+            </a:extLst>
+          </p:cNvPr>
+          <p:cNvSpPr>
+            <a:spLocks xmlns:a="http://schemas.openxmlformats.org/drawingml/2006/main" noGrp="1"/>
+          </p:cNvSpPr>
+          <p:nvPr>
+            <p:ph type="title" idx="0"/>
+          </p:nvPr>
+        </p:nvSpPr>
+        <p:spPr>
+          <a:xfrm xmlns:a="http://schemas.openxmlformats.org/drawingml/2006/main">
+            <a:off x="609600" y="561975"/>
+            <a:ext cx="10972800" cy="514350"/>
+          </a:xfrm>
+        </p:spPr>
+        <p:txBody>
+          <a:bodyPr xmlns:a="http://schemas.openxmlformats.org/drawingml/2006/main"/>
+          <a:lstStyle xmlns:a="http://schemas.openxmlformats.org/drawingml/2006/main"/>
+          <a:p xmlns:a="http://schemas.openxmlformats.org/drawingml/2006/main">
+            <a:r>
+              <a:t/>
+            </a:r>
+          </a:p>
+        </p:txBody>
+      </p:sp>
+      <p:sp>
+        <p:nvSpPr>
+          <p:cNvPr id="3" name="VR 02 Executive Summary subtitle 1">
+            <a:extLst xmlns:a="http://schemas.openxmlformats.org/drawingml/2006/main">
+              <a:ext uri="{FF2B5EF4-FFF2-40B4-BE49-F238E27FC236}">
+                <a16:creationId xmlns:a16="http://schemas.microsoft.com/office/drawing/2014/main" id="{FCAF9F5F-29CE-4CA8-BC7E-CED936F7E97F}"/>
+              </a:ext>
+            </a:extLst>
+          </p:cNvPr>
+          <p:cNvSpPr>
+            <a:spLocks xmlns:a="http://schemas.openxmlformats.org/drawingml/2006/main" noGrp="1"/>
+          </p:cNvSpPr>
+          <p:nvPr>
+            <p:ph type="subTitle" idx="1"/>
+          </p:nvPr>
+        </p:nvSpPr>
+        <p:spPr>
+          <a:xfrm xmlns:a="http://schemas.openxmlformats.org/drawingml/2006/main">
+            <a:off x="609600" y="285750"/>
+            <a:ext cx="6858000" cy="209550"/>
+          </a:xfrm>
+        </p:spPr>
+        <p:txBody>
+          <a:bodyPr xmlns:a="http://schemas.openxmlformats.org/drawingml/2006/main"/>
+          <a:lstStyle xmlns:a="http://schemas.openxmlformats.org/drawingml/2006/main"/>
+          <a:p xmlns:a="http://schemas.openxmlformats.org/drawingml/2006/main">
+            <a:r>
+              <a:t/>
+            </a:r>
+          </a:p>
+        </p:txBody>
+      </p:sp>
+      <p:sp>
+        <p:nvSpPr>
+          <p:cNvPr id="4" name="VR 02 Executive Summary body 2">
+            <a:extLst xmlns:a="http://schemas.openxmlformats.org/drawingml/2006/main">
+              <a:ext uri="{FF2B5EF4-FFF2-40B4-BE49-F238E27FC236}">
+                <a16:creationId xmlns:a16="http://schemas.microsoft.com/office/drawing/2014/main" id="{AA7BEA77-B51A-4E1D-8D68-FA1A759F0AB3}"/>
+              </a:ext>
+            </a:extLst>
+          </p:cNvPr>
+          <p:cNvSpPr>
+            <a:spLocks xmlns:a="http://schemas.openxmlformats.org/drawingml/2006/main" noGrp="1"/>
+          </p:cNvSpPr>
+          <p:nvPr>
+            <p:ph type="body" idx="2"/>
+          </p:nvPr>
+        </p:nvSpPr>
+        <p:spPr>
+          <a:xfrm xmlns:a="http://schemas.openxmlformats.org/drawingml/2006/main">
+            <a:off x="609600" y="1085850"/>
+            <a:ext cx="10668000" cy="304800"/>
+          </a:xfrm>
+        </p:spPr>
+        <p:txBody>
+          <a:bodyPr xmlns:a="http://schemas.openxmlformats.org/drawingml/2006/main"/>
+          <a:lstStyle xmlns:a="http://schemas.openxmlformats.org/drawingml/2006/main"/>
+          <a:p xmlns:a="http://schemas.openxmlformats.org/drawingml/2006/main">
+            <a:r>
+              <a:t/>
+            </a:r>
+          </a:p>
+        </p:txBody>
+      </p:sp>
+      <p:sp>
+        <p:nvSpPr>
+          <p:cNvPr id="5" name="VR 02 Executive Summary content 3">
+            <a:extLst xmlns:a="http://schemas.openxmlformats.org/drawingml/2006/main">
+              <a:ext uri="{FF2B5EF4-FFF2-40B4-BE49-F238E27FC236}">
+                <a16:creationId xmlns:a16="http://schemas.microsoft.com/office/drawing/2014/main" id="{98761AFC-8667-40CC-A6EC-7D8A33E4A815}"/>
+              </a:ext>
+            </a:extLst>
+          </p:cNvPr>
+          <p:cNvSpPr>
+            <a:spLocks xmlns:a="http://schemas.openxmlformats.org/drawingml/2006/main" noGrp="1"/>
+          </p:cNvSpPr>
+          <p:nvPr>
+            <p:ph idx="3"/>
+          </p:nvPr>
+        </p:nvSpPr>
+        <p:spPr>
+          <a:xfrm xmlns:a="http://schemas.openxmlformats.org/drawingml/2006/main">
+            <a:off x="609600" y="1752600"/>
+            <a:ext cx="3333750" cy="1143000"/>
+          </a:xfrm>
+        </p:spPr>
+        <p:txBody>
+          <a:bodyPr xmlns:a="http://schemas.openxmlformats.org/drawingml/2006/main"/>
+          <a:lstStyle xmlns:a="http://schemas.openxmlformats.org/drawingml/2006/main"/>
+          <a:p xmlns:a="http://schemas.openxmlformats.org/drawingml/2006/main">
+            <a:r>
+              <a:t/>
+            </a:r>
+          </a:p>
+        </p:txBody>
+      </p:sp>
+      <p:sp>
+        <p:nvSpPr>
+          <p:cNvPr id="6" name="VR 02 Executive Summary content 4">
+            <a:extLst xmlns:a="http://schemas.openxmlformats.org/drawingml/2006/main">
+              <a:ext uri="{FF2B5EF4-FFF2-40B4-BE49-F238E27FC236}">
+                <a16:creationId xmlns:a16="http://schemas.microsoft.com/office/drawing/2014/main" id="{ED0FDA33-7FDA-4F0C-AB24-077FB9BA5FCD}"/>
+              </a:ext>
+            </a:extLst>
+          </p:cNvPr>
+          <p:cNvSpPr>
+            <a:spLocks xmlns:a="http://schemas.openxmlformats.org/drawingml/2006/main" noGrp="1"/>
+          </p:cNvSpPr>
+          <p:nvPr>
+            <p:ph idx="4"/>
+          </p:nvPr>
+        </p:nvSpPr>
+        <p:spPr>
+          <a:xfrm xmlns:a="http://schemas.openxmlformats.org/drawingml/2006/main">
+            <a:off x="4295775" y="1752600"/>
+            <a:ext cx="3333750" cy="1143000"/>
+          </a:xfrm>
+        </p:spPr>
+        <p:txBody>
+          <a:bodyPr xmlns:a="http://schemas.openxmlformats.org/drawingml/2006/main"/>
+          <a:lstStyle xmlns:a="http://schemas.openxmlformats.org/drawingml/2006/main"/>
+          <a:p xmlns:a="http://schemas.openxmlformats.org/drawingml/2006/main">
+            <a:r>
+              <a:t/>
+            </a:r>
+          </a:p>
+        </p:txBody>
+      </p:sp>
+      <p:sp>
+        <p:nvSpPr>
+          <p:cNvPr id="7" name="VR 02 Executive Summary content 5">
+            <a:extLst xmlns:a="http://schemas.openxmlformats.org/drawingml/2006/main">
+              <a:ext uri="{FF2B5EF4-FFF2-40B4-BE49-F238E27FC236}">
+                <a16:creationId xmlns:a16="http://schemas.microsoft.com/office/drawing/2014/main" id="{AB389998-455F-45A3-8A2F-6F9375252BD8}"/>
+              </a:ext>
+            </a:extLst>
+          </p:cNvPr>
+          <p:cNvSpPr>
+            <a:spLocks xmlns:a="http://schemas.openxmlformats.org/drawingml/2006/main" noGrp="1"/>
+          </p:cNvSpPr>
+          <p:nvPr>
+            <p:ph idx="5"/>
+          </p:nvPr>
+        </p:nvSpPr>
+        <p:spPr>
+          <a:xfrm xmlns:a="http://schemas.openxmlformats.org/drawingml/2006/main">
+            <a:off x="7981950" y="1752600"/>
+            <a:ext cx="3333750" cy="1143000"/>
+          </a:xfrm>
+        </p:spPr>
+        <p:txBody>
+          <a:bodyPr xmlns:a="http://schemas.openxmlformats.org/drawingml/2006/main"/>
+          <a:lstStyle xmlns:a="http://schemas.openxmlformats.org/drawingml/2006/main"/>
+          <a:p xmlns:a="http://schemas.openxmlformats.org/drawingml/2006/main">
+            <a:r>
+              <a:t/>
+            </a:r>
+          </a:p>
+        </p:txBody>
+      </p:sp>
+      <p:sp>
+        <p:nvSpPr>
+          <p:cNvPr id="8" name="VR 02 Executive Summary body 6">
+            <a:extLst xmlns:a="http://schemas.openxmlformats.org/drawingml/2006/main">
+              <a:ext uri="{FF2B5EF4-FFF2-40B4-BE49-F238E27FC236}">
+                <a16:creationId xmlns:a16="http://schemas.microsoft.com/office/drawing/2014/main" id="{01A8978F-B4EA-4EC9-BB39-7298836454EB}"/>
+              </a:ext>
+            </a:extLst>
+          </p:cNvPr>
+          <p:cNvSpPr>
+            <a:spLocks xmlns:a="http://schemas.openxmlformats.org/drawingml/2006/main" noGrp="1"/>
+          </p:cNvSpPr>
+          <p:nvPr>
+            <p:ph type="body" idx="6"/>
+          </p:nvPr>
+        </p:nvSpPr>
+        <p:spPr>
+          <a:xfrm xmlns:a="http://schemas.openxmlformats.org/drawingml/2006/main">
+            <a:off x="609600" y="3257550"/>
+            <a:ext cx="10706100" cy="2667000"/>
+          </a:xfrm>
+        </p:spPr>
+        <p:txBody>
+          <a:bodyPr xmlns:a="http://schemas.openxmlformats.org/drawingml/2006/main"/>
+          <a:lstStyle xmlns:a="http://schemas.openxmlformats.org/drawingml/2006/main"/>
+          <a:p xmlns:a="http://schemas.openxmlformats.org/drawingml/2006/main">
+            <a:r>
+              <a:t/>
+            </a:r>
+          </a:p>
+        </p:txBody>
+      </p:sp>
+    </p:spTree>
+  </p:cSld>
+</p:sldLayout>
+</file>
+
+<file path=ppt/slideLayouts/slideLayout4.xml><?xml version="1.0" encoding="utf-8"?>
+<p:sldLayout xmlns:p="http://schemas.openxmlformats.org/presentationml/2006/main">
+  <p:cSld name="VR 03 Two-Column Comparison">
+    <p:spTree>
+      <p:nvGrpSpPr>
+        <p:cNvPr id="1" name=""/>
+        <p:cNvGrpSpPr/>
+        <p:nvPr/>
+      </p:nvGrpSpPr>
+      <p:grpSpPr>
+        <a:xfrm xmlns:a="http://schemas.openxmlformats.org/drawingml/2006/main"/>
+      </p:grpSpPr>
+      <p:sp>
+        <p:nvSpPr>
+          <p:cNvPr id="2" name="VR 03 Two-Column Comparison title 0">
+            <a:extLst xmlns:a="http://schemas.openxmlformats.org/drawingml/2006/main">
+              <a:ext uri="{FF2B5EF4-FFF2-40B4-BE49-F238E27FC236}">
+                <a16:creationId xmlns:a16="http://schemas.microsoft.com/office/drawing/2014/main" id="{C99AB4A8-053A-458D-98C4-0C5876865B7A}"/>
+              </a:ext>
+            </a:extLst>
+          </p:cNvPr>
+          <p:cNvSpPr>
+            <a:spLocks xmlns:a="http://schemas.openxmlformats.org/drawingml/2006/main" noGrp="1"/>
+          </p:cNvSpPr>
+          <p:nvPr>
+            <p:ph type="title" idx="0"/>
+          </p:nvPr>
+        </p:nvSpPr>
+        <p:spPr>
+          <a:xfrm xmlns:a="http://schemas.openxmlformats.org/drawingml/2006/main">
+            <a:off x="609600" y="561975"/>
+            <a:ext cx="10972800" cy="514350"/>
+          </a:xfrm>
+        </p:spPr>
+        <p:txBody>
+          <a:bodyPr xmlns:a="http://schemas.openxmlformats.org/drawingml/2006/main"/>
+          <a:lstStyle xmlns:a="http://schemas.openxmlformats.org/drawingml/2006/main"/>
+          <a:p xmlns:a="http://schemas.openxmlformats.org/drawingml/2006/main">
+            <a:r>
+              <a:t/>
+            </a:r>
+          </a:p>
+        </p:txBody>
+      </p:sp>
+      <p:sp>
+        <p:nvSpPr>
+          <p:cNvPr id="3" name="VR 03 Two-Column Comparison subtitle 1">
+            <a:extLst xmlns:a="http://schemas.openxmlformats.org/drawingml/2006/main">
+              <a:ext uri="{FF2B5EF4-FFF2-40B4-BE49-F238E27FC236}">
+                <a16:creationId xmlns:a16="http://schemas.microsoft.com/office/drawing/2014/main" id="{C241AC65-2066-4AC7-AEF5-161031561931}"/>
+              </a:ext>
+            </a:extLst>
+          </p:cNvPr>
+          <p:cNvSpPr>
+            <a:spLocks xmlns:a="http://schemas.openxmlformats.org/drawingml/2006/main" noGrp="1"/>
+          </p:cNvSpPr>
+          <p:nvPr>
+            <p:ph type="subTitle" idx="1"/>
+          </p:nvPr>
+        </p:nvSpPr>
+        <p:spPr>
+          <a:xfrm xmlns:a="http://schemas.openxmlformats.org/drawingml/2006/main">
+            <a:off x="609600" y="285750"/>
+            <a:ext cx="6858000" cy="209550"/>
+          </a:xfrm>
+        </p:spPr>
+        <p:txBody>
+          <a:bodyPr xmlns:a="http://schemas.openxmlformats.org/drawingml/2006/main"/>
+          <a:lstStyle xmlns:a="http://schemas.openxmlformats.org/drawingml/2006/main"/>
+          <a:p xmlns:a="http://schemas.openxmlformats.org/drawingml/2006/main">
+            <a:r>
+              <a:t/>
+            </a:r>
+          </a:p>
+        </p:txBody>
+      </p:sp>
+      <p:sp>
+        <p:nvSpPr>
+          <p:cNvPr id="4" name="VR 03 Two-Column Comparison body 2">
+            <a:extLst xmlns:a="http://schemas.openxmlformats.org/drawingml/2006/main">
+              <a:ext uri="{FF2B5EF4-FFF2-40B4-BE49-F238E27FC236}">
+                <a16:creationId xmlns:a16="http://schemas.microsoft.com/office/drawing/2014/main" id="{BA4CDB8D-FA26-4E70-9B7D-28445326B662}"/>
+              </a:ext>
+            </a:extLst>
+          </p:cNvPr>
+          <p:cNvSpPr>
+            <a:spLocks xmlns:a="http://schemas.openxmlformats.org/drawingml/2006/main" noGrp="1"/>
+          </p:cNvSpPr>
+          <p:nvPr>
+            <p:ph type="body" idx="2"/>
+          </p:nvPr>
+        </p:nvSpPr>
+        <p:spPr>
+          <a:xfrm xmlns:a="http://schemas.openxmlformats.org/drawingml/2006/main">
+            <a:off x="609600" y="1085850"/>
+            <a:ext cx="10668000" cy="304800"/>
+          </a:xfrm>
+        </p:spPr>
+        <p:txBody>
+          <a:bodyPr xmlns:a="http://schemas.openxmlformats.org/drawingml/2006/main"/>
+          <a:lstStyle xmlns:a="http://schemas.openxmlformats.org/drawingml/2006/main"/>
+          <a:p xmlns:a="http://schemas.openxmlformats.org/drawingml/2006/main">
+            <a:r>
+              <a:t/>
+            </a:r>
+          </a:p>
+        </p:txBody>
+      </p:sp>
+      <p:sp>
+        <p:nvSpPr>
+          <p:cNvPr id="5" name="VR 03 Two-Column Comparison subtitle 3">
+            <a:extLst xmlns:a="http://schemas.openxmlformats.org/drawingml/2006/main">
+              <a:ext uri="{FF2B5EF4-FFF2-40B4-BE49-F238E27FC236}">
+                <a16:creationId xmlns:a16="http://schemas.microsoft.com/office/drawing/2014/main" id="{F588857B-FFEC-4404-9ECF-717DD5F9ACA8}"/>
+              </a:ext>
+            </a:extLst>
+          </p:cNvPr>
+          <p:cNvSpPr>
+            <a:spLocks xmlns:a="http://schemas.openxmlformats.org/drawingml/2006/main" noGrp="1"/>
+          </p:cNvSpPr>
+          <p:nvPr>
+            <p:ph type="subTitle" idx="3"/>
+          </p:nvPr>
+        </p:nvSpPr>
+        <p:spPr>
+          <a:xfrm xmlns:a="http://schemas.openxmlformats.org/drawingml/2006/main">
+            <a:off x="609600" y="1657350"/>
+            <a:ext cx="5143500" cy="247650"/>
+          </a:xfrm>
+        </p:spPr>
+        <p:txBody>
+          <a:bodyPr xmlns:a="http://schemas.openxmlformats.org/drawingml/2006/main"/>
+          <a:lstStyle xmlns:a="http://schemas.openxmlformats.org/drawingml/2006/main"/>
+          <a:p xmlns:a="http://schemas.openxmlformats.org/drawingml/2006/main">
+            <a:r>
+              <a:t/>
+            </a:r>
+          </a:p>
+        </p:txBody>
+      </p:sp>
+      <p:sp>
+        <p:nvSpPr>
+          <p:cNvPr id="6" name="VR 03 Two-Column Comparison subtitle 4">
+            <a:extLst xmlns:a="http://schemas.openxmlformats.org/drawingml/2006/main">
+              <a:ext uri="{FF2B5EF4-FFF2-40B4-BE49-F238E27FC236}">
+                <a16:creationId xmlns:a16="http://schemas.microsoft.com/office/drawing/2014/main" id="{CBD8C22F-C566-4339-91E8-612C73FC1DD4}"/>
+              </a:ext>
+            </a:extLst>
+          </p:cNvPr>
+          <p:cNvSpPr>
+            <a:spLocks xmlns:a="http://schemas.openxmlformats.org/drawingml/2006/main" noGrp="1"/>
+          </p:cNvSpPr>
+          <p:nvPr>
+            <p:ph type="subTitle" idx="4"/>
+          </p:nvPr>
+        </p:nvSpPr>
+        <p:spPr>
+          <a:xfrm xmlns:a="http://schemas.openxmlformats.org/drawingml/2006/main">
+            <a:off x="6438900" y="1657350"/>
+            <a:ext cx="5143500" cy="247650"/>
+          </a:xfrm>
+        </p:spPr>
+        <p:txBody>
+          <a:bodyPr xmlns:a="http://schemas.openxmlformats.org/drawingml/2006/main"/>
+          <a:lstStyle xmlns:a="http://schemas.openxmlformats.org/drawingml/2006/main"/>
+          <a:p xmlns:a="http://schemas.openxmlformats.org/drawingml/2006/main">
+            <a:r>
+              <a:t/>
+            </a:r>
+          </a:p>
+        </p:txBody>
+      </p:sp>
+      <p:sp>
+        <p:nvSpPr>
+          <p:cNvPr id="7" name="VR 03 Two-Column Comparison picture 5">
+            <a:extLst xmlns:a="http://schemas.openxmlformats.org/drawingml/2006/main">
+              <a:ext uri="{FF2B5EF4-FFF2-40B4-BE49-F238E27FC236}">
+                <a16:creationId xmlns:a16="http://schemas.microsoft.com/office/drawing/2014/main" id="{E5B507C8-ED3C-4F65-B5E4-FF7379DA593F}"/>
+              </a:ext>
+            </a:extLst>
+          </p:cNvPr>
+          <p:cNvSpPr>
+            <a:spLocks xmlns:a="http://schemas.openxmlformats.org/drawingml/2006/main" noGrp="1"/>
+          </p:cNvSpPr>
+          <p:nvPr>
+            <p:ph type="pic" idx="5"/>
+          </p:nvPr>
+        </p:nvSpPr>
+        <p:spPr>
+          <a:xfrm xmlns:a="http://schemas.openxmlformats.org/drawingml/2006/main">
+            <a:off x="609600" y="2009775"/>
+            <a:ext cx="5143500" cy="3829050"/>
+          </a:xfrm>
+        </p:spPr>
+        <p:txBody>
+          <a:bodyPr xmlns:a="http://schemas.openxmlformats.org/drawingml/2006/main"/>
+          <a:lstStyle xmlns:a="http://schemas.openxmlformats.org/drawingml/2006/main"/>
+          <a:p xmlns:a="http://schemas.openxmlformats.org/drawingml/2006/main">
+            <a:r>
+              <a:t/>
+            </a:r>
+          </a:p>
+        </p:txBody>
+      </p:sp>
+      <p:sp>
+        <p:nvSpPr>
+          <p:cNvPr id="8" name="VR 03 Two-Column Comparison body 6">
+            <a:extLst xmlns:a="http://schemas.openxmlformats.org/drawingml/2006/main">
+              <a:ext uri="{FF2B5EF4-FFF2-40B4-BE49-F238E27FC236}">
+                <a16:creationId xmlns:a16="http://schemas.microsoft.com/office/drawing/2014/main" id="{63433A17-993D-482D-B7F9-484179A3A42E}"/>
+              </a:ext>
+            </a:extLst>
+          </p:cNvPr>
+          <p:cNvSpPr>
+            <a:spLocks xmlns:a="http://schemas.openxmlformats.org/drawingml/2006/main" noGrp="1"/>
+          </p:cNvSpPr>
+          <p:nvPr>
+            <p:ph type="body" idx="6"/>
+          </p:nvPr>
+        </p:nvSpPr>
+        <p:spPr>
+          <a:xfrm xmlns:a="http://schemas.openxmlformats.org/drawingml/2006/main">
+            <a:off x="6438900" y="2009775"/>
+            <a:ext cx="5143500" cy="3829050"/>
+          </a:xfrm>
+        </p:spPr>
+        <p:txBody>
+          <a:bodyPr xmlns:a="http://schemas.openxmlformats.org/drawingml/2006/main"/>
+          <a:lstStyle xmlns:a="http://schemas.openxmlformats.org/drawingml/2006/main"/>
+          <a:p xmlns:a="http://schemas.openxmlformats.org/drawingml/2006/main">
+            <a:r>
+              <a:t/>
+            </a:r>
+          </a:p>
+        </p:txBody>
+      </p:sp>
+    </p:spTree>
+  </p:cSld>
+</p:sldLayout>
+</file>
+
+<file path=ppt/slideLayouts/slideLayout5.xml><?xml version="1.0" encoding="utf-8"?>
+<p:sldLayout xmlns:p="http://schemas.openxmlformats.org/presentationml/2006/main">
+  <p:cSld name="VR 04 Chart and Insight">
+    <p:spTree>
+      <p:nvGrpSpPr>
+        <p:cNvPr id="1" name=""/>
+        <p:cNvGrpSpPr/>
+        <p:nvPr/>
+      </p:nvGrpSpPr>
+      <p:grpSpPr>
+        <a:xfrm xmlns:a="http://schemas.openxmlformats.org/drawingml/2006/main"/>
+      </p:grpSpPr>
+      <p:sp>
+        <p:nvSpPr>
+          <p:cNvPr id="2" name="VR 04 Chart and Insight title 0">
+            <a:extLst xmlns:a="http://schemas.openxmlformats.org/drawingml/2006/main">
+              <a:ext uri="{FF2B5EF4-FFF2-40B4-BE49-F238E27FC236}">
+                <a16:creationId xmlns:a16="http://schemas.microsoft.com/office/drawing/2014/main" id="{1981B9EA-44AA-417D-A8D7-4846B41293F9}"/>
+              </a:ext>
+            </a:extLst>
+          </p:cNvPr>
+          <p:cNvSpPr>
+            <a:spLocks xmlns:a="http://schemas.openxmlformats.org/drawingml/2006/main" noGrp="1"/>
+          </p:cNvSpPr>
+          <p:nvPr>
+            <p:ph type="title" idx="0"/>
+          </p:nvPr>
+        </p:nvSpPr>
+        <p:spPr>
+          <a:xfrm xmlns:a="http://schemas.openxmlformats.org/drawingml/2006/main">
+            <a:off x="609600" y="561975"/>
+            <a:ext cx="10972800" cy="514350"/>
+          </a:xfrm>
+        </p:spPr>
+        <p:txBody>
+          <a:bodyPr xmlns:a="http://schemas.openxmlformats.org/drawingml/2006/main"/>
+          <a:lstStyle xmlns:a="http://schemas.openxmlformats.org/drawingml/2006/main"/>
+          <a:p xmlns:a="http://schemas.openxmlformats.org/drawingml/2006/main">
+            <a:r>
+              <a:t/>
+            </a:r>
+          </a:p>
+        </p:txBody>
+      </p:sp>
+      <p:sp>
+        <p:nvSpPr>
+          <p:cNvPr id="3" name="VR 04 Chart and Insight subtitle 1">
+            <a:extLst xmlns:a="http://schemas.openxmlformats.org/drawingml/2006/main">
+              <a:ext uri="{FF2B5EF4-FFF2-40B4-BE49-F238E27FC236}">
+                <a16:creationId xmlns:a16="http://schemas.microsoft.com/office/drawing/2014/main" id="{203F0373-DBFF-4B39-B78F-D5F1C0E05C2F}"/>
+              </a:ext>
+            </a:extLst>
+          </p:cNvPr>
+          <p:cNvSpPr>
+            <a:spLocks xmlns:a="http://schemas.openxmlformats.org/drawingml/2006/main" noGrp="1"/>
+          </p:cNvSpPr>
+          <p:nvPr>
+            <p:ph type="subTitle" idx="1"/>
+          </p:nvPr>
+        </p:nvSpPr>
+        <p:spPr>
+          <a:xfrm xmlns:a="http://schemas.openxmlformats.org/drawingml/2006/main">
+            <a:off x="609600" y="285750"/>
+            <a:ext cx="6858000" cy="209550"/>
+          </a:xfrm>
+        </p:spPr>
+        <p:txBody>
+          <a:bodyPr xmlns:a="http://schemas.openxmlformats.org/drawingml/2006/main"/>
+          <a:lstStyle xmlns:a="http://schemas.openxmlformats.org/drawingml/2006/main"/>
+          <a:p xmlns:a="http://schemas.openxmlformats.org/drawingml/2006/main">
+            <a:r>
+              <a:t/>
+            </a:r>
+          </a:p>
+        </p:txBody>
+      </p:sp>
+      <p:sp>
+        <p:nvSpPr>
+          <p:cNvPr id="4" name="VR 04 Chart and Insight body 2">
+            <a:extLst xmlns:a="http://schemas.openxmlformats.org/drawingml/2006/main">
+              <a:ext uri="{FF2B5EF4-FFF2-40B4-BE49-F238E27FC236}">
+                <a16:creationId xmlns:a16="http://schemas.microsoft.com/office/drawing/2014/main" id="{CE421EF1-25AF-4C5D-B9D0-21C2A96A3300}"/>
+              </a:ext>
+            </a:extLst>
+          </p:cNvPr>
+          <p:cNvSpPr>
+            <a:spLocks xmlns:a="http://schemas.openxmlformats.org/drawingml/2006/main" noGrp="1"/>
+          </p:cNvSpPr>
+          <p:nvPr>
+            <p:ph type="body" idx="2"/>
+          </p:nvPr>
+        </p:nvSpPr>
+        <p:spPr>
+          <a:xfrm xmlns:a="http://schemas.openxmlformats.org/drawingml/2006/main">
+            <a:off x="609600" y="1085850"/>
+            <a:ext cx="10668000" cy="304800"/>
+          </a:xfrm>
+        </p:spPr>
+        <p:txBody>
+          <a:bodyPr xmlns:a="http://schemas.openxmlformats.org/drawingml/2006/main"/>
+          <a:lstStyle xmlns:a="http://schemas.openxmlformats.org/drawingml/2006/main"/>
+          <a:p xmlns:a="http://schemas.openxmlformats.org/drawingml/2006/main">
+            <a:r>
+              <a:t/>
+            </a:r>
+          </a:p>
+        </p:txBody>
+      </p:sp>
+      <p:sp>
+        <p:nvSpPr>
+          <p:cNvPr id="5" name="VR 04 Chart and Insight chart 3">
+            <a:extLst xmlns:a="http://schemas.openxmlformats.org/drawingml/2006/main">
+              <a:ext uri="{FF2B5EF4-FFF2-40B4-BE49-F238E27FC236}">
+                <a16:creationId xmlns:a16="http://schemas.microsoft.com/office/drawing/2014/main" id="{D8074325-AA63-4099-8C3D-72FE0BA94BB2}"/>
+              </a:ext>
+            </a:extLst>
+          </p:cNvPr>
+          <p:cNvSpPr>
+            <a:spLocks xmlns:a="http://schemas.openxmlformats.org/drawingml/2006/main" noGrp="1"/>
+          </p:cNvSpPr>
+          <p:nvPr>
+            <p:ph type="chart" idx="3"/>
+          </p:nvPr>
+        </p:nvSpPr>
+        <p:spPr>
+          <a:xfrm xmlns:a="http://schemas.openxmlformats.org/drawingml/2006/main">
+            <a:off x="609600" y="1714500"/>
+            <a:ext cx="7810500" cy="4114800"/>
+          </a:xfrm>
+        </p:spPr>
+        <p:txBody>
+          <a:bodyPr xmlns:a="http://schemas.openxmlformats.org/drawingml/2006/main"/>
+          <a:lstStyle xmlns:a="http://schemas.openxmlformats.org/drawingml/2006/main"/>
+          <a:p xmlns:a="http://schemas.openxmlformats.org/drawingml/2006/main">
+            <a:r>
+              <a:t/>
+            </a:r>
+          </a:p>
+        </p:txBody>
+      </p:sp>
+      <p:sp>
+        <p:nvSpPr>
+          <p:cNvPr id="6" name="VR 04 Chart and Insight body 4">
+            <a:extLst xmlns:a="http://schemas.openxmlformats.org/drawingml/2006/main">
+              <a:ext uri="{FF2B5EF4-FFF2-40B4-BE49-F238E27FC236}">
+                <a16:creationId xmlns:a16="http://schemas.microsoft.com/office/drawing/2014/main" id="{A40D8D98-227A-4A38-B687-7B6CCD6088F7}"/>
+              </a:ext>
+            </a:extLst>
+          </p:cNvPr>
+          <p:cNvSpPr>
+            <a:spLocks xmlns:a="http://schemas.openxmlformats.org/drawingml/2006/main" noGrp="1"/>
+          </p:cNvSpPr>
+          <p:nvPr>
+            <p:ph type="body" idx="4"/>
+          </p:nvPr>
+        </p:nvSpPr>
+        <p:spPr>
+          <a:xfrm xmlns:a="http://schemas.openxmlformats.org/drawingml/2006/main">
+            <a:off x="8763000" y="1714500"/>
+            <a:ext cx="2819400" cy="4114800"/>
+          </a:xfrm>
+        </p:spPr>
+        <p:txBody>
+          <a:bodyPr xmlns:a="http://schemas.openxmlformats.org/drawingml/2006/main"/>
+          <a:lstStyle xmlns:a="http://schemas.openxmlformats.org/drawingml/2006/main"/>
+          <a:p xmlns:a="http://schemas.openxmlformats.org/drawingml/2006/main">
+            <a:r>
+              <a:t/>
+            </a:r>
+          </a:p>
+        </p:txBody>
+      </p:sp>
+    </p:spTree>
+  </p:cSld>
+</p:sldLayout>
+</file>
+
+<file path=ppt/slideLayouts/slideLayout6.xml><?xml version="1.0" encoding="utf-8"?>
+<p:sldLayout xmlns:p="http://schemas.openxmlformats.org/presentationml/2006/main">
+  <p:cSld name="VR 05 Wide Chart and Annotations">
+    <p:spTree>
+      <p:nvGrpSpPr>
+        <p:cNvPr id="1" name=""/>
+        <p:cNvGrpSpPr/>
+        <p:nvPr/>
+      </p:nvGrpSpPr>
+      <p:grpSpPr>
+        <a:xfrm xmlns:a="http://schemas.openxmlformats.org/drawingml/2006/main"/>
+      </p:grpSpPr>
+      <p:sp>
+        <p:nvSpPr>
+          <p:cNvPr id="2" name="VR 05 Wide Chart and Annotations title 0">
+            <a:extLst xmlns:a="http://schemas.openxmlformats.org/drawingml/2006/main">
+              <a:ext uri="{FF2B5EF4-FFF2-40B4-BE49-F238E27FC236}">
+                <a16:creationId xmlns:a16="http://schemas.microsoft.com/office/drawing/2014/main" id="{3375E299-6235-41B7-B538-FB4ADA7FE20A}"/>
+              </a:ext>
+            </a:extLst>
+          </p:cNvPr>
+          <p:cNvSpPr>
+            <a:spLocks xmlns:a="http://schemas.openxmlformats.org/drawingml/2006/main" noGrp="1"/>
+          </p:cNvSpPr>
+          <p:nvPr>
+            <p:ph type="title" idx="0"/>
+          </p:nvPr>
+        </p:nvSpPr>
+        <p:spPr>
+          <a:xfrm xmlns:a="http://schemas.openxmlformats.org/drawingml/2006/main">
+            <a:off x="609600" y="561975"/>
+            <a:ext cx="10972800" cy="514350"/>
+          </a:xfrm>
+        </p:spPr>
+        <p:txBody>
+          <a:bodyPr xmlns:a="http://schemas.openxmlformats.org/drawingml/2006/main"/>
+          <a:lstStyle xmlns:a="http://schemas.openxmlformats.org/drawingml/2006/main"/>
+          <a:p xmlns:a="http://schemas.openxmlformats.org/drawingml/2006/main">
+            <a:r>
+              <a:t/>
+            </a:r>
+          </a:p>
+        </p:txBody>
+      </p:sp>
+      <p:sp>
+        <p:nvSpPr>
+          <p:cNvPr id="3" name="VR 05 Wide Chart and Annotations subtitle 1">
+            <a:extLst xmlns:a="http://schemas.openxmlformats.org/drawingml/2006/main">
+              <a:ext uri="{FF2B5EF4-FFF2-40B4-BE49-F238E27FC236}">
+                <a16:creationId xmlns:a16="http://schemas.microsoft.com/office/drawing/2014/main" id="{9E0BAAC4-A077-4609-846C-A051C5F89EAC}"/>
+              </a:ext>
+            </a:extLst>
+          </p:cNvPr>
+          <p:cNvSpPr>
+            <a:spLocks xmlns:a="http://schemas.openxmlformats.org/drawingml/2006/main" noGrp="1"/>
+          </p:cNvSpPr>
+          <p:nvPr>
+            <p:ph type="subTitle" idx="1"/>
+          </p:nvPr>
+        </p:nvSpPr>
+        <p:spPr>
+          <a:xfrm xmlns:a="http://schemas.openxmlformats.org/drawingml/2006/main">
+            <a:off x="609600" y="285750"/>
+            <a:ext cx="6858000" cy="209550"/>
+          </a:xfrm>
+        </p:spPr>
+        <p:txBody>
+          <a:bodyPr xmlns:a="http://schemas.openxmlformats.org/drawingml/2006/main"/>
+          <a:lstStyle xmlns:a="http://schemas.openxmlformats.org/drawingml/2006/main"/>
+          <a:p xmlns:a="http://schemas.openxmlformats.org/drawingml/2006/main">
+            <a:r>
+              <a:t/>
+            </a:r>
+          </a:p>
+        </p:txBody>
+      </p:sp>
+      <p:sp>
+        <p:nvSpPr>
+          <p:cNvPr id="4" name="VR 05 Wide Chart and Annotations body 2">
+            <a:extLst xmlns:a="http://schemas.openxmlformats.org/drawingml/2006/main">
+              <a:ext uri="{FF2B5EF4-FFF2-40B4-BE49-F238E27FC236}">
+                <a16:creationId xmlns:a16="http://schemas.microsoft.com/office/drawing/2014/main" id="{30588D8B-BBF2-4F00-AEE1-D9FFFBCC985D}"/>
+              </a:ext>
+            </a:extLst>
+          </p:cNvPr>
+          <p:cNvSpPr>
+            <a:spLocks xmlns:a="http://schemas.openxmlformats.org/drawingml/2006/main" noGrp="1"/>
+          </p:cNvSpPr>
+          <p:nvPr>
+            <p:ph type="body" idx="2"/>
+          </p:nvPr>
+        </p:nvSpPr>
+        <p:spPr>
+          <a:xfrm xmlns:a="http://schemas.openxmlformats.org/drawingml/2006/main">
+            <a:off x="609600" y="1085850"/>
+            <a:ext cx="10668000" cy="304800"/>
+          </a:xfrm>
+        </p:spPr>
+        <p:txBody>
+          <a:bodyPr xmlns:a="http://schemas.openxmlformats.org/drawingml/2006/main"/>
+          <a:lstStyle xmlns:a="http://schemas.openxmlformats.org/drawingml/2006/main"/>
+          <a:p xmlns:a="http://schemas.openxmlformats.org/drawingml/2006/main">
+            <a:r>
+              <a:t/>
+            </a:r>
+          </a:p>
+        </p:txBody>
+      </p:sp>
+      <p:sp>
+        <p:nvSpPr>
+          <p:cNvPr id="5" name="VR 05 Wide Chart and Annotations chart 3">
+            <a:extLst xmlns:a="http://schemas.openxmlformats.org/drawingml/2006/main">
+              <a:ext uri="{FF2B5EF4-FFF2-40B4-BE49-F238E27FC236}">
+                <a16:creationId xmlns:a16="http://schemas.microsoft.com/office/drawing/2014/main" id="{05E83B7B-8081-4A28-9C8B-D203C82410B3}"/>
+              </a:ext>
+            </a:extLst>
+          </p:cNvPr>
+          <p:cNvSpPr>
+            <a:spLocks xmlns:a="http://schemas.openxmlformats.org/drawingml/2006/main" noGrp="1"/>
+          </p:cNvSpPr>
+          <p:nvPr>
+            <p:ph type="chart" idx="3"/>
+          </p:nvPr>
+        </p:nvSpPr>
+        <p:spPr>
+          <a:xfrm xmlns:a="http://schemas.openxmlformats.org/drawingml/2006/main">
+            <a:off x="609600" y="1657350"/>
+            <a:ext cx="10972800" cy="3143250"/>
+          </a:xfrm>
+        </p:spPr>
+        <p:txBody>
+          <a:bodyPr xmlns:a="http://schemas.openxmlformats.org/drawingml/2006/main"/>
+          <a:lstStyle xmlns:a="http://schemas.openxmlformats.org/drawingml/2006/main"/>
+          <a:p xmlns:a="http://schemas.openxmlformats.org/drawingml/2006/main">
+            <a:r>
+              <a:t/>
+            </a:r>
+          </a:p>
+        </p:txBody>
+      </p:sp>
+      <p:sp>
+        <p:nvSpPr>
+          <p:cNvPr id="6" name="VR 05 Wide Chart and Annotations content 4">
+            <a:extLst xmlns:a="http://schemas.openxmlformats.org/drawingml/2006/main">
+              <a:ext uri="{FF2B5EF4-FFF2-40B4-BE49-F238E27FC236}">
+                <a16:creationId xmlns:a16="http://schemas.microsoft.com/office/drawing/2014/main" id="{75FC8137-401A-4A2D-AEA3-84A3B5DF201F}"/>
+              </a:ext>
+            </a:extLst>
+          </p:cNvPr>
+          <p:cNvSpPr>
+            <a:spLocks xmlns:a="http://schemas.openxmlformats.org/drawingml/2006/main" noGrp="1"/>
+          </p:cNvSpPr>
+          <p:nvPr>
+            <p:ph idx="4"/>
+          </p:nvPr>
+        </p:nvSpPr>
+        <p:spPr>
+          <a:xfrm xmlns:a="http://schemas.openxmlformats.org/drawingml/2006/main">
+            <a:off x="609600" y="5105400"/>
+            <a:ext cx="3448050" cy="933450"/>
+          </a:xfrm>
+        </p:spPr>
+        <p:txBody>
+          <a:bodyPr xmlns:a="http://schemas.openxmlformats.org/drawingml/2006/main"/>
+          <a:lstStyle xmlns:a="http://schemas.openxmlformats.org/drawingml/2006/main"/>
+          <a:p xmlns:a="http://schemas.openxmlformats.org/drawingml/2006/main">
+            <a:r>
+              <a:t/>
+            </a:r>
+          </a:p>
+        </p:txBody>
+      </p:sp>
+      <p:sp>
+        <p:nvSpPr>
+          <p:cNvPr id="7" name="VR 05 Wide Chart and Annotations content 5">
+            <a:extLst xmlns:a="http://schemas.openxmlformats.org/drawingml/2006/main">
+              <a:ext uri="{FF2B5EF4-FFF2-40B4-BE49-F238E27FC236}">
+                <a16:creationId xmlns:a16="http://schemas.microsoft.com/office/drawing/2014/main" id="{87ECDF46-ECDE-4F64-A483-5623E05156B5}"/>
+              </a:ext>
+            </a:extLst>
+          </p:cNvPr>
+          <p:cNvSpPr>
+            <a:spLocks xmlns:a="http://schemas.openxmlformats.org/drawingml/2006/main" noGrp="1"/>
+          </p:cNvSpPr>
+          <p:nvPr>
+            <p:ph idx="5"/>
+          </p:nvPr>
+        </p:nvSpPr>
+        <p:spPr>
+          <a:xfrm xmlns:a="http://schemas.openxmlformats.org/drawingml/2006/main">
+            <a:off x="4371975" y="5105400"/>
+            <a:ext cx="3448050" cy="933450"/>
+          </a:xfrm>
+        </p:spPr>
+        <p:txBody>
+          <a:bodyPr xmlns:a="http://schemas.openxmlformats.org/drawingml/2006/main"/>
+          <a:lstStyle xmlns:a="http://schemas.openxmlformats.org/drawingml/2006/main"/>
+          <a:p xmlns:a="http://schemas.openxmlformats.org/drawingml/2006/main">
+            <a:r>
+              <a:t/>
+            </a:r>
+          </a:p>
+        </p:txBody>
+      </p:sp>
+      <p:sp>
+        <p:nvSpPr>
+          <p:cNvPr id="8" name="VR 05 Wide Chart and Annotations content 6">
+            <a:extLst xmlns:a="http://schemas.openxmlformats.org/drawingml/2006/main">
+              <a:ext uri="{FF2B5EF4-FFF2-40B4-BE49-F238E27FC236}">
+                <a16:creationId xmlns:a16="http://schemas.microsoft.com/office/drawing/2014/main" id="{4F58D7D9-9E79-4166-9DD1-8585DE10BB31}"/>
+              </a:ext>
+            </a:extLst>
+          </p:cNvPr>
+          <p:cNvSpPr>
+            <a:spLocks xmlns:a="http://schemas.openxmlformats.org/drawingml/2006/main" noGrp="1"/>
+          </p:cNvSpPr>
+          <p:nvPr>
+            <p:ph idx="6"/>
+          </p:nvPr>
+        </p:nvSpPr>
+        <p:spPr>
+          <a:xfrm xmlns:a="http://schemas.openxmlformats.org/drawingml/2006/main">
+            <a:off x="8134350" y="5105400"/>
+            <a:ext cx="3448050" cy="933450"/>
+          </a:xfrm>
+        </p:spPr>
+        <p:txBody>
+          <a:bodyPr xmlns:a="http://schemas.openxmlformats.org/drawingml/2006/main"/>
+          <a:lstStyle xmlns:a="http://schemas.openxmlformats.org/drawingml/2006/main"/>
+          <a:p xmlns:a="http://schemas.openxmlformats.org/drawingml/2006/main">
+            <a:r>
+              <a:t/>
+            </a:r>
+          </a:p>
+        </p:txBody>
+      </p:sp>
+    </p:spTree>
+  </p:cSld>
+</p:sldLayout>
+</file>
+
+<file path=ppt/slideLayouts/slideLayout7.xml><?xml version="1.0" encoding="utf-8"?>
+<p:sldLayout xmlns:p="http://schemas.openxmlformats.org/presentationml/2006/main">
+  <p:cSld name="VR 06 Mixed-Object Grid">
+    <p:spTree>
+      <p:nvGrpSpPr>
+        <p:cNvPr id="1" name=""/>
+        <p:cNvGrpSpPr/>
+        <p:nvPr/>
+      </p:nvGrpSpPr>
+      <p:grpSpPr>
+        <a:xfrm xmlns:a="http://schemas.openxmlformats.org/drawingml/2006/main"/>
+      </p:grpSpPr>
+      <p:sp>
+        <p:nvSpPr>
+          <p:cNvPr id="2" name="VR 06 Mixed-Object Grid title 0">
+            <a:extLst xmlns:a="http://schemas.openxmlformats.org/drawingml/2006/main">
+              <a:ext uri="{FF2B5EF4-FFF2-40B4-BE49-F238E27FC236}">
+                <a16:creationId xmlns:a16="http://schemas.microsoft.com/office/drawing/2014/main" id="{ACCB76F2-EB07-4EC7-A653-05D4016205EE}"/>
+              </a:ext>
+            </a:extLst>
+          </p:cNvPr>
+          <p:cNvSpPr>
+            <a:spLocks xmlns:a="http://schemas.openxmlformats.org/drawingml/2006/main" noGrp="1"/>
+          </p:cNvSpPr>
+          <p:nvPr>
+            <p:ph type="title" idx="0"/>
+          </p:nvPr>
+        </p:nvSpPr>
+        <p:spPr>
+          <a:xfrm xmlns:a="http://schemas.openxmlformats.org/drawingml/2006/main">
+            <a:off x="609600" y="561975"/>
+            <a:ext cx="10972800" cy="514350"/>
+          </a:xfrm>
+        </p:spPr>
+        <p:txBody>
+          <a:bodyPr xmlns:a="http://schemas.openxmlformats.org/drawingml/2006/main"/>
+          <a:lstStyle xmlns:a="http://schemas.openxmlformats.org/drawingml/2006/main"/>
+          <a:p xmlns:a="http://schemas.openxmlformats.org/drawingml/2006/main">
+            <a:r>
+              <a:t/>
+            </a:r>
+          </a:p>
+        </p:txBody>
+      </p:sp>
+      <p:sp>
+        <p:nvSpPr>
+          <p:cNvPr id="3" name="VR 06 Mixed-Object Grid subtitle 1">
+            <a:extLst xmlns:a="http://schemas.openxmlformats.org/drawingml/2006/main">
+              <a:ext uri="{FF2B5EF4-FFF2-40B4-BE49-F238E27FC236}">
+                <a16:creationId xmlns:a16="http://schemas.microsoft.com/office/drawing/2014/main" id="{C4FCA649-64B8-4C1B-986D-E2A9A0DEBC25}"/>
+              </a:ext>
+            </a:extLst>
+          </p:cNvPr>
+          <p:cNvSpPr>
+            <a:spLocks xmlns:a="http://schemas.openxmlformats.org/drawingml/2006/main" noGrp="1"/>
+          </p:cNvSpPr>
+          <p:nvPr>
+            <p:ph type="subTitle" idx="1"/>
+          </p:nvPr>
+        </p:nvSpPr>
+        <p:spPr>
+          <a:xfrm xmlns:a="http://schemas.openxmlformats.org/drawingml/2006/main">
+            <a:off x="609600" y="285750"/>
+            <a:ext cx="6858000" cy="209550"/>
+          </a:xfrm>
+        </p:spPr>
+        <p:txBody>
+          <a:bodyPr xmlns:a="http://schemas.openxmlformats.org/drawingml/2006/main"/>
+          <a:lstStyle xmlns:a="http://schemas.openxmlformats.org/drawingml/2006/main"/>
+          <a:p xmlns:a="http://schemas.openxmlformats.org/drawingml/2006/main">
+            <a:r>
+              <a:t/>
+            </a:r>
+          </a:p>
+        </p:txBody>
+      </p:sp>
+      <p:sp>
+        <p:nvSpPr>
+          <p:cNvPr id="4" name="VR 06 Mixed-Object Grid body 2">
+            <a:extLst xmlns:a="http://schemas.openxmlformats.org/drawingml/2006/main">
+              <a:ext uri="{FF2B5EF4-FFF2-40B4-BE49-F238E27FC236}">
+                <a16:creationId xmlns:a16="http://schemas.microsoft.com/office/drawing/2014/main" id="{416D4297-EB26-4A93-BD57-5A2518898E78}"/>
+              </a:ext>
+            </a:extLst>
+          </p:cNvPr>
+          <p:cNvSpPr>
+            <a:spLocks xmlns:a="http://schemas.openxmlformats.org/drawingml/2006/main" noGrp="1"/>
+          </p:cNvSpPr>
+          <p:nvPr>
+            <p:ph type="body" idx="2"/>
+          </p:nvPr>
+        </p:nvSpPr>
+        <p:spPr>
+          <a:xfrm xmlns:a="http://schemas.openxmlformats.org/drawingml/2006/main">
+            <a:off x="609600" y="1085850"/>
+            <a:ext cx="10668000" cy="304800"/>
+          </a:xfrm>
+        </p:spPr>
+        <p:txBody>
+          <a:bodyPr xmlns:a="http://schemas.openxmlformats.org/drawingml/2006/main"/>
+          <a:lstStyle xmlns:a="http://schemas.openxmlformats.org/drawingml/2006/main"/>
+          <a:p xmlns:a="http://schemas.openxmlformats.org/drawingml/2006/main">
+            <a:r>
+              <a:t/>
+            </a:r>
+          </a:p>
+        </p:txBody>
+      </p:sp>
+      <p:sp>
+        <p:nvSpPr>
+          <p:cNvPr id="5" name="VR 06 Mixed-Object Grid picture 3">
+            <a:extLst xmlns:a="http://schemas.openxmlformats.org/drawingml/2006/main">
+              <a:ext uri="{FF2B5EF4-FFF2-40B4-BE49-F238E27FC236}">
+                <a16:creationId xmlns:a16="http://schemas.microsoft.com/office/drawing/2014/main" id="{0704F842-5A24-42E8-88E0-6B9C89918837}"/>
+              </a:ext>
+            </a:extLst>
+          </p:cNvPr>
+          <p:cNvSpPr>
+            <a:spLocks xmlns:a="http://schemas.openxmlformats.org/drawingml/2006/main" noGrp="1"/>
+          </p:cNvSpPr>
+          <p:nvPr>
+            <p:ph type="pic" idx="3"/>
+          </p:nvPr>
+        </p:nvSpPr>
+        <p:spPr>
+          <a:xfrm xmlns:a="http://schemas.openxmlformats.org/drawingml/2006/main">
+            <a:off x="609600" y="1657350"/>
+            <a:ext cx="5219700" cy="1924050"/>
+          </a:xfrm>
+        </p:spPr>
+        <p:txBody>
+          <a:bodyPr xmlns:a="http://schemas.openxmlformats.org/drawingml/2006/main"/>
+          <a:lstStyle xmlns:a="http://schemas.openxmlformats.org/drawingml/2006/main"/>
+          <a:p xmlns:a="http://schemas.openxmlformats.org/drawingml/2006/main">
+            <a:r>
+              <a:t/>
+            </a:r>
+          </a:p>
+        </p:txBody>
+      </p:sp>
+      <p:sp>
+        <p:nvSpPr>
+          <p:cNvPr id="6" name="VR 06 Mixed-Object Grid chart 4">
+            <a:extLst xmlns:a="http://schemas.openxmlformats.org/drawingml/2006/main">
+              <a:ext uri="{FF2B5EF4-FFF2-40B4-BE49-F238E27FC236}">
+                <a16:creationId xmlns:a16="http://schemas.microsoft.com/office/drawing/2014/main" id="{CE35A80C-E779-46D4-AAFC-DC0DFCB0AFEC}"/>
+              </a:ext>
+            </a:extLst>
+          </p:cNvPr>
+          <p:cNvSpPr>
+            <a:spLocks xmlns:a="http://schemas.openxmlformats.org/drawingml/2006/main" noGrp="1"/>
+          </p:cNvSpPr>
+          <p:nvPr>
+            <p:ph type="chart" idx="4"/>
+          </p:nvPr>
+        </p:nvSpPr>
+        <p:spPr>
+          <a:xfrm xmlns:a="http://schemas.openxmlformats.org/drawingml/2006/main">
+            <a:off x="6362700" y="1657350"/>
+            <a:ext cx="5219700" cy="1924050"/>
+          </a:xfrm>
+        </p:spPr>
+        <p:txBody>
+          <a:bodyPr xmlns:a="http://schemas.openxmlformats.org/drawingml/2006/main"/>
+          <a:lstStyle xmlns:a="http://schemas.openxmlformats.org/drawingml/2006/main"/>
+          <a:p xmlns:a="http://schemas.openxmlformats.org/drawingml/2006/main">
+            <a:r>
+              <a:t/>
+            </a:r>
+          </a:p>
+        </p:txBody>
+      </p:sp>
+      <p:sp>
+        <p:nvSpPr>
+          <p:cNvPr id="7" name="VR 06 Mixed-Object Grid table 5">
+            <a:extLst xmlns:a="http://schemas.openxmlformats.org/drawingml/2006/main">
+              <a:ext uri="{FF2B5EF4-FFF2-40B4-BE49-F238E27FC236}">
+                <a16:creationId xmlns:a16="http://schemas.microsoft.com/office/drawing/2014/main" id="{BE40CA8F-85B3-4FAF-BA00-5D8E9D5F5489}"/>
+              </a:ext>
+            </a:extLst>
+          </p:cNvPr>
+          <p:cNvSpPr>
+            <a:spLocks xmlns:a="http://schemas.openxmlformats.org/drawingml/2006/main" noGrp="1"/>
+          </p:cNvSpPr>
+          <p:nvPr>
+            <p:ph type="tbl" idx="5"/>
+          </p:nvPr>
+        </p:nvSpPr>
+        <p:spPr>
+          <a:xfrm xmlns:a="http://schemas.openxmlformats.org/drawingml/2006/main">
+            <a:off x="609600" y="3886200"/>
+            <a:ext cx="5219700" cy="1924050"/>
+          </a:xfrm>
+        </p:spPr>
+        <p:txBody>
+          <a:bodyPr xmlns:a="http://schemas.openxmlformats.org/drawingml/2006/main"/>
+          <a:lstStyle xmlns:a="http://schemas.openxmlformats.org/drawingml/2006/main"/>
+          <a:p xmlns:a="http://schemas.openxmlformats.org/drawingml/2006/main">
+            <a:r>
+              <a:t/>
+            </a:r>
+          </a:p>
+        </p:txBody>
+      </p:sp>
+      <p:sp>
+        <p:nvSpPr>
+          <p:cNvPr id="8" name="VR 06 Mixed-Object Grid body 6">
+            <a:extLst xmlns:a="http://schemas.openxmlformats.org/drawingml/2006/main">
+              <a:ext uri="{FF2B5EF4-FFF2-40B4-BE49-F238E27FC236}">
+                <a16:creationId xmlns:a16="http://schemas.microsoft.com/office/drawing/2014/main" id="{2019996C-6EC2-420C-ABD4-503A00787371}"/>
+              </a:ext>
+            </a:extLst>
+          </p:cNvPr>
+          <p:cNvSpPr>
+            <a:spLocks xmlns:a="http://schemas.openxmlformats.org/drawingml/2006/main" noGrp="1"/>
+          </p:cNvSpPr>
+          <p:nvPr>
+            <p:ph type="body" idx="6"/>
+          </p:nvPr>
+        </p:nvSpPr>
+        <p:spPr>
+          <a:xfrm xmlns:a="http://schemas.openxmlformats.org/drawingml/2006/main">
+            <a:off x="6362700" y="3886200"/>
+            <a:ext cx="5219700" cy="1924050"/>
+          </a:xfrm>
+        </p:spPr>
+        <p:txBody>
+          <a:bodyPr xmlns:a="http://schemas.openxmlformats.org/drawingml/2006/main"/>
+          <a:lstStyle xmlns:a="http://schemas.openxmlformats.org/drawingml/2006/main"/>
+          <a:p xmlns:a="http://schemas.openxmlformats.org/drawingml/2006/main">
+            <a:r>
+              <a:t/>
+            </a:r>
+          </a:p>
+        </p:txBody>
+      </p:sp>
+    </p:spTree>
+  </p:cSld>
+</p:sldLayout>
+</file>
+
+<file path=ppt/slideLayouts/slideLayout8.xml><?xml version="1.0" encoding="utf-8"?>
+<p:sldLayout xmlns:p="http://schemas.openxmlformats.org/presentationml/2006/main">
+  <p:cSld name="VR 07 Table and Commentary">
+    <p:spTree>
+      <p:nvGrpSpPr>
+        <p:cNvPr id="1" name=""/>
+        <p:cNvGrpSpPr/>
+        <p:nvPr/>
+      </p:nvGrpSpPr>
+      <p:grpSpPr>
+        <a:xfrm xmlns:a="http://schemas.openxmlformats.org/drawingml/2006/main"/>
+      </p:grpSpPr>
+      <p:sp>
+        <p:nvSpPr>
+          <p:cNvPr id="2" name="VR 07 Table and Commentary title 0">
+            <a:extLst xmlns:a="http://schemas.openxmlformats.org/drawingml/2006/main">
+              <a:ext uri="{FF2B5EF4-FFF2-40B4-BE49-F238E27FC236}">
+                <a16:creationId xmlns:a16="http://schemas.microsoft.com/office/drawing/2014/main" id="{4BF0BFDE-7254-4F30-81B5-0319928C2642}"/>
+              </a:ext>
+            </a:extLst>
+          </p:cNvPr>
+          <p:cNvSpPr>
+            <a:spLocks xmlns:a="http://schemas.openxmlformats.org/drawingml/2006/main" noGrp="1"/>
+          </p:cNvSpPr>
+          <p:nvPr>
+            <p:ph type="title" idx="0"/>
+          </p:nvPr>
+        </p:nvSpPr>
+        <p:spPr>
+          <a:xfrm xmlns:a="http://schemas.openxmlformats.org/drawingml/2006/main">
+            <a:off x="609600" y="561975"/>
+            <a:ext cx="10972800" cy="514350"/>
+          </a:xfrm>
+        </p:spPr>
+        <p:txBody>
+          <a:bodyPr xmlns:a="http://schemas.openxmlformats.org/drawingml/2006/main"/>
+          <a:lstStyle xmlns:a="http://schemas.openxmlformats.org/drawingml/2006/main"/>
+          <a:p xmlns:a="http://schemas.openxmlformats.org/drawingml/2006/main">
+            <a:r>
+              <a:t/>
+            </a:r>
+          </a:p>
+        </p:txBody>
+      </p:sp>
+      <p:sp>
+        <p:nvSpPr>
+          <p:cNvPr id="3" name="VR 07 Table and Commentary subtitle 1">
+            <a:extLst xmlns:a="http://schemas.openxmlformats.org/drawingml/2006/main">
+              <a:ext uri="{FF2B5EF4-FFF2-40B4-BE49-F238E27FC236}">
+                <a16:creationId xmlns:a16="http://schemas.microsoft.com/office/drawing/2014/main" id="{82ADB206-BEA1-44E6-9E9A-9181DB3F59D0}"/>
+              </a:ext>
+            </a:extLst>
+          </p:cNvPr>
+          <p:cNvSpPr>
+            <a:spLocks xmlns:a="http://schemas.openxmlformats.org/drawingml/2006/main" noGrp="1"/>
+          </p:cNvSpPr>
+          <p:nvPr>
+            <p:ph type="subTitle" idx="1"/>
+          </p:nvPr>
+        </p:nvSpPr>
+        <p:spPr>
+          <a:xfrm xmlns:a="http://schemas.openxmlformats.org/drawingml/2006/main">
+            <a:off x="609600" y="285750"/>
+            <a:ext cx="6858000" cy="209550"/>
+          </a:xfrm>
+        </p:spPr>
+        <p:txBody>
+          <a:bodyPr xmlns:a="http://schemas.openxmlformats.org/drawingml/2006/main"/>
+          <a:lstStyle xmlns:a="http://schemas.openxmlformats.org/drawingml/2006/main"/>
+          <a:p xmlns:a="http://schemas.openxmlformats.org/drawingml/2006/main">
+            <a:r>
+              <a:t/>
+            </a:r>
+          </a:p>
+        </p:txBody>
+      </p:sp>
+      <p:sp>
+        <p:nvSpPr>
+          <p:cNvPr id="4" name="VR 07 Table and Commentary body 2">
+            <a:extLst xmlns:a="http://schemas.openxmlformats.org/drawingml/2006/main">
+              <a:ext uri="{FF2B5EF4-FFF2-40B4-BE49-F238E27FC236}">
+                <a16:creationId xmlns:a16="http://schemas.microsoft.com/office/drawing/2014/main" id="{9E645E9C-EE1E-416E-B3CB-02C75E0F8510}"/>
+              </a:ext>
+            </a:extLst>
+          </p:cNvPr>
+          <p:cNvSpPr>
+            <a:spLocks xmlns:a="http://schemas.openxmlformats.org/drawingml/2006/main" noGrp="1"/>
+          </p:cNvSpPr>
+          <p:nvPr>
+            <p:ph type="body" idx="2"/>
+          </p:nvPr>
+        </p:nvSpPr>
+        <p:spPr>
+          <a:xfrm xmlns:a="http://schemas.openxmlformats.org/drawingml/2006/main">
+            <a:off x="609600" y="1085850"/>
+            <a:ext cx="10668000" cy="304800"/>
+          </a:xfrm>
+        </p:spPr>
+        <p:txBody>
+          <a:bodyPr xmlns:a="http://schemas.openxmlformats.org/drawingml/2006/main"/>
+          <a:lstStyle xmlns:a="http://schemas.openxmlformats.org/drawingml/2006/main"/>
+          <a:p xmlns:a="http://schemas.openxmlformats.org/drawingml/2006/main">
+            <a:r>
+              <a:t/>
+            </a:r>
+          </a:p>
+        </p:txBody>
+      </p:sp>
+      <p:sp>
+        <p:nvSpPr>
+          <p:cNvPr id="5" name="VR 07 Table and Commentary table 3">
+            <a:extLst xmlns:a="http://schemas.openxmlformats.org/drawingml/2006/main">
+              <a:ext uri="{FF2B5EF4-FFF2-40B4-BE49-F238E27FC236}">
+                <a16:creationId xmlns:a16="http://schemas.microsoft.com/office/drawing/2014/main" id="{628AB144-E0A5-44B3-8E68-7D799E7A5AFA}"/>
+              </a:ext>
+            </a:extLst>
+          </p:cNvPr>
+          <p:cNvSpPr>
+            <a:spLocks xmlns:a="http://schemas.openxmlformats.org/drawingml/2006/main" noGrp="1"/>
+          </p:cNvSpPr>
+          <p:nvPr>
+            <p:ph type="tbl" idx="3"/>
+          </p:nvPr>
+        </p:nvSpPr>
+        <p:spPr>
+          <a:xfrm xmlns:a="http://schemas.openxmlformats.org/drawingml/2006/main">
+            <a:off x="609600" y="1733550"/>
+            <a:ext cx="7524750" cy="4095750"/>
+          </a:xfrm>
+        </p:spPr>
+        <p:txBody>
+          <a:bodyPr xmlns:a="http://schemas.openxmlformats.org/drawingml/2006/main"/>
+          <a:lstStyle xmlns:a="http://schemas.openxmlformats.org/drawingml/2006/main"/>
+          <a:p xmlns:a="http://schemas.openxmlformats.org/drawingml/2006/main">
+            <a:r>
+              <a:t/>
+            </a:r>
+          </a:p>
+        </p:txBody>
+      </p:sp>
+      <p:sp>
+        <p:nvSpPr>
+          <p:cNvPr id="6" name="VR 07 Table and Commentary body 4">
+            <a:extLst xmlns:a="http://schemas.openxmlformats.org/drawingml/2006/main">
+              <a:ext uri="{FF2B5EF4-FFF2-40B4-BE49-F238E27FC236}">
+                <a16:creationId xmlns:a16="http://schemas.microsoft.com/office/drawing/2014/main" id="{E65992B5-64A2-40B3-A35C-D67F86429652}"/>
+              </a:ext>
+            </a:extLst>
+          </p:cNvPr>
+          <p:cNvSpPr>
+            <a:spLocks xmlns:a="http://schemas.openxmlformats.org/drawingml/2006/main" noGrp="1"/>
+          </p:cNvSpPr>
+          <p:nvPr>
+            <p:ph type="body" idx="4"/>
+          </p:nvPr>
+        </p:nvSpPr>
+        <p:spPr>
+          <a:xfrm xmlns:a="http://schemas.openxmlformats.org/drawingml/2006/main">
+            <a:off x="8477250" y="1733550"/>
+            <a:ext cx="3105150" cy="4095750"/>
+          </a:xfrm>
+        </p:spPr>
+        <p:txBody>
+          <a:bodyPr xmlns:a="http://schemas.openxmlformats.org/drawingml/2006/main"/>
+          <a:lstStyle xmlns:a="http://schemas.openxmlformats.org/drawingml/2006/main"/>
+          <a:p xmlns:a="http://schemas.openxmlformats.org/drawingml/2006/main">
+            <a:r>
+              <a:t/>
+            </a:r>
+          </a:p>
+        </p:txBody>
+      </p:sp>
+    </p:spTree>
+  </p:cSld>
+</p:sldLayout>
+</file>
+
+<file path=ppt/slideLayouts/slideLayout9.xml><?xml version="1.0" encoding="utf-8"?>
+<p:sldLayout xmlns:p="http://schemas.openxmlformats.org/presentationml/2006/main">
+  <p:cSld name="VR 08 Closing and Next Steps">
+    <p:spTree>
+      <p:nvGrpSpPr>
+        <p:cNvPr id="1" name=""/>
+        <p:cNvGrpSpPr/>
+        <p:nvPr/>
+      </p:nvGrpSpPr>
+      <p:grpSpPr>
+        <a:xfrm xmlns:a="http://schemas.openxmlformats.org/drawingml/2006/main"/>
+      </p:grpSpPr>
+      <p:sp>
+        <p:nvSpPr>
+          <p:cNvPr id="2" name="VR 08 Closing and Next Steps title 0">
+            <a:extLst xmlns:a="http://schemas.openxmlformats.org/drawingml/2006/main">
+              <a:ext uri="{FF2B5EF4-FFF2-40B4-BE49-F238E27FC236}">
+                <a16:creationId xmlns:a16="http://schemas.microsoft.com/office/drawing/2014/main" id="{0428AEC3-0437-44C1-9D56-F7715A1D630A}"/>
+              </a:ext>
+            </a:extLst>
+          </p:cNvPr>
+          <p:cNvSpPr>
+            <a:spLocks xmlns:a="http://schemas.openxmlformats.org/drawingml/2006/main" noGrp="1"/>
+          </p:cNvSpPr>
+          <p:nvPr>
+            <p:ph type="title" idx="0"/>
+          </p:nvPr>
+        </p:nvSpPr>
+        <p:spPr>
+          <a:xfrm xmlns:a="http://schemas.openxmlformats.org/drawingml/2006/main">
+            <a:off x="723900" y="1000125"/>
+            <a:ext cx="7810500" cy="685800"/>
+          </a:xfrm>
+        </p:spPr>
+        <p:txBody>
+          <a:bodyPr xmlns:a="http://schemas.openxmlformats.org/drawingml/2006/main"/>
+          <a:lstStyle xmlns:a="http://schemas.openxmlformats.org/drawingml/2006/main"/>
+          <a:p xmlns:a="http://schemas.openxmlformats.org/drawingml/2006/main">
+            <a:r>
+              <a:t/>
+            </a:r>
+          </a:p>
+        </p:txBody>
+      </p:sp>
+      <p:sp>
+        <p:nvSpPr>
+          <p:cNvPr id="3" name="VR 08 Closing and Next Steps subtitle 1">
+            <a:extLst xmlns:a="http://schemas.openxmlformats.org/drawingml/2006/main">
+              <a:ext uri="{FF2B5EF4-FFF2-40B4-BE49-F238E27FC236}">
+                <a16:creationId xmlns:a16="http://schemas.microsoft.com/office/drawing/2014/main" id="{95CF60E8-0AC3-47B3-9C88-C6F8DD6C2447}"/>
+              </a:ext>
+            </a:extLst>
+          </p:cNvPr>
+          <p:cNvSpPr>
+            <a:spLocks xmlns:a="http://schemas.openxmlformats.org/drawingml/2006/main" noGrp="1"/>
+          </p:cNvSpPr>
+          <p:nvPr>
+            <p:ph type="subTitle" idx="1"/>
+          </p:nvPr>
+        </p:nvSpPr>
+        <p:spPr>
+          <a:xfrm xmlns:a="http://schemas.openxmlformats.org/drawingml/2006/main">
+            <a:off x="723900" y="609600"/>
+            <a:ext cx="5143500" cy="247650"/>
+          </a:xfrm>
+        </p:spPr>
+        <p:txBody>
+          <a:bodyPr xmlns:a="http://schemas.openxmlformats.org/drawingml/2006/main"/>
+          <a:lstStyle xmlns:a="http://schemas.openxmlformats.org/drawingml/2006/main"/>
+          <a:p xmlns:a="http://schemas.openxmlformats.org/drawingml/2006/main">
+            <a:r>
+              <a:t/>
+            </a:r>
+          </a:p>
+        </p:txBody>
+      </p:sp>
+      <p:sp>
+        <p:nvSpPr>
+          <p:cNvPr id="4" name="VR 08 Closing and Next Steps picture 2">
+            <a:extLst xmlns:a="http://schemas.openxmlformats.org/drawingml/2006/main">
+              <a:ext uri="{FF2B5EF4-FFF2-40B4-BE49-F238E27FC236}">
+                <a16:creationId xmlns:a16="http://schemas.microsoft.com/office/drawing/2014/main" id="{CBC1E398-CC24-4A99-B674-AF05FA138B4A}"/>
+              </a:ext>
+            </a:extLst>
+          </p:cNvPr>
+          <p:cNvSpPr>
+            <a:spLocks xmlns:a="http://schemas.openxmlformats.org/drawingml/2006/main" noGrp="1"/>
+          </p:cNvSpPr>
+          <p:nvPr>
+            <p:ph type="pic" idx="2"/>
+          </p:nvPr>
+        </p:nvSpPr>
+        <p:spPr>
+          <a:xfrm xmlns:a="http://schemas.openxmlformats.org/drawingml/2006/main">
+            <a:off x="9982200" y="723900"/>
+            <a:ext cx="1409700" cy="876300"/>
+          </a:xfrm>
+        </p:spPr>
+        <p:txBody>
+          <a:bodyPr xmlns:a="http://schemas.openxmlformats.org/drawingml/2006/main"/>
+          <a:lstStyle xmlns:a="http://schemas.openxmlformats.org/drawingml/2006/main"/>
+          <a:p xmlns:a="http://schemas.openxmlformats.org/drawingml/2006/main">
+            <a:r>
+              <a:t/>
+            </a:r>
+          </a:p>
+        </p:txBody>
+      </p:sp>
+      <p:sp>
+        <p:nvSpPr>
+          <p:cNvPr id="5" name="VR 08 Closing and Next Steps body 3">
+            <a:extLst xmlns:a="http://schemas.openxmlformats.org/drawingml/2006/main">
+              <a:ext uri="{FF2B5EF4-FFF2-40B4-BE49-F238E27FC236}">
+                <a16:creationId xmlns:a16="http://schemas.microsoft.com/office/drawing/2014/main" id="{0EE69EA1-65C2-4E3A-A674-E14B33150A80}"/>
+              </a:ext>
+            </a:extLst>
+          </p:cNvPr>
+          <p:cNvSpPr>
+            <a:spLocks xmlns:a="http://schemas.openxmlformats.org/drawingml/2006/main" noGrp="1"/>
+          </p:cNvSpPr>
+          <p:nvPr>
+            <p:ph type="body" idx="3"/>
+          </p:nvPr>
+        </p:nvSpPr>
+        <p:spPr>
+          <a:xfrm xmlns:a="http://schemas.openxmlformats.org/drawingml/2006/main">
+            <a:off x="723900" y="1981200"/>
+            <a:ext cx="10668000" cy="1066800"/>
+          </a:xfrm>
+        </p:spPr>
+        <p:txBody>
+          <a:bodyPr xmlns:a="http://schemas.openxmlformats.org/drawingml/2006/main"/>
+          <a:lstStyle xmlns:a="http://schemas.openxmlformats.org/drawingml/2006/main"/>
+          <a:p xmlns:a="http://schemas.openxmlformats.org/drawingml/2006/main">
+            <a:r>
+              <a:t/>
+            </a:r>
+          </a:p>
+        </p:txBody>
+      </p:sp>
+      <p:sp>
+        <p:nvSpPr>
+          <p:cNvPr id="6" name="VR 08 Closing and Next Steps content 4">
+            <a:extLst xmlns:a="http://schemas.openxmlformats.org/drawingml/2006/main">
+              <a:ext uri="{FF2B5EF4-FFF2-40B4-BE49-F238E27FC236}">
+                <a16:creationId xmlns:a16="http://schemas.microsoft.com/office/drawing/2014/main" id="{50E14AEE-2177-4D4E-999E-90D2E9779B19}"/>
+              </a:ext>
+            </a:extLst>
+          </p:cNvPr>
+          <p:cNvSpPr>
+            <a:spLocks xmlns:a="http://schemas.openxmlformats.org/drawingml/2006/main" noGrp="1"/>
+          </p:cNvSpPr>
+          <p:nvPr>
+            <p:ph idx="4"/>
+          </p:nvPr>
+        </p:nvSpPr>
+        <p:spPr>
+          <a:xfrm xmlns:a="http://schemas.openxmlformats.org/drawingml/2006/main">
+            <a:off x="723900" y="3486150"/>
+            <a:ext cx="3352800" cy="1352550"/>
+          </a:xfrm>
+        </p:spPr>
+        <p:txBody>
+          <a:bodyPr xmlns:a="http://schemas.openxmlformats.org/drawingml/2006/main"/>
+          <a:lstStyle xmlns:a="http://schemas.openxmlformats.org/drawingml/2006/main"/>
+          <a:p xmlns:a="http://schemas.openxmlformats.org/drawingml/2006/main">
+            <a:r>
+              <a:t/>
+            </a:r>
+          </a:p>
+        </p:txBody>
+      </p:sp>
+      <p:sp>
+        <p:nvSpPr>
+          <p:cNvPr id="7" name="VR 08 Closing and Next Steps content 5">
+            <a:extLst xmlns:a="http://schemas.openxmlformats.org/drawingml/2006/main">
+              <a:ext uri="{FF2B5EF4-FFF2-40B4-BE49-F238E27FC236}">
+                <a16:creationId xmlns:a16="http://schemas.microsoft.com/office/drawing/2014/main" id="{124C258F-90A9-403D-BE3E-88C6262650F3}"/>
+              </a:ext>
+            </a:extLst>
+          </p:cNvPr>
+          <p:cNvSpPr>
+            <a:spLocks xmlns:a="http://schemas.openxmlformats.org/drawingml/2006/main" noGrp="1"/>
+          </p:cNvSpPr>
+          <p:nvPr>
+            <p:ph idx="5"/>
+          </p:nvPr>
+        </p:nvSpPr>
+        <p:spPr>
+          <a:xfrm xmlns:a="http://schemas.openxmlformats.org/drawingml/2006/main">
+            <a:off x="4381500" y="3486150"/>
+            <a:ext cx="3352800" cy="1352550"/>
+          </a:xfrm>
+        </p:spPr>
+        <p:txBody>
+          <a:bodyPr xmlns:a="http://schemas.openxmlformats.org/drawingml/2006/main"/>
+          <a:lstStyle xmlns:a="http://schemas.openxmlformats.org/drawingml/2006/main"/>
+          <a:p xmlns:a="http://schemas.openxmlformats.org/drawingml/2006/main">
+            <a:r>
+              <a:t/>
+            </a:r>
+          </a:p>
+        </p:txBody>
+      </p:sp>
+      <p:sp>
+        <p:nvSpPr>
+          <p:cNvPr id="8" name="VR 08 Closing and Next Steps content 6">
+            <a:extLst xmlns:a="http://schemas.openxmlformats.org/drawingml/2006/main">
+              <a:ext uri="{FF2B5EF4-FFF2-40B4-BE49-F238E27FC236}">
+                <a16:creationId xmlns:a16="http://schemas.microsoft.com/office/drawing/2014/main" id="{4053B299-731B-453F-9400-BE416F054F8F}"/>
+              </a:ext>
+            </a:extLst>
+          </p:cNvPr>
+          <p:cNvSpPr>
+            <a:spLocks xmlns:a="http://schemas.openxmlformats.org/drawingml/2006/main" noGrp="1"/>
+          </p:cNvSpPr>
+          <p:nvPr>
+            <p:ph idx="6"/>
+          </p:nvPr>
+        </p:nvSpPr>
+        <p:spPr>
+          <a:xfrm xmlns:a="http://schemas.openxmlformats.org/drawingml/2006/main">
+            <a:off x="8039100" y="3486150"/>
+            <a:ext cx="3352800" cy="1352550"/>
+          </a:xfrm>
+        </p:spPr>
+        <p:txBody>
+          <a:bodyPr xmlns:a="http://schemas.openxmlformats.org/drawingml/2006/main"/>
+          <a:lstStyle xmlns:a="http://schemas.openxmlformats.org/drawingml/2006/main"/>
+          <a:p xmlns:a="http://schemas.openxmlformats.org/drawingml/2006/main">
+            <a:r>
+              <a:t/>
+            </a:r>
+          </a:p>
+        </p:txBody>
+      </p:sp>
+      <p:sp>
+        <p:nvSpPr>
+          <p:cNvPr id="9" name="VR 08 Closing and Next Steps subtitle 7">
+            <a:extLst xmlns:a="http://schemas.openxmlformats.org/drawingml/2006/main">
+              <a:ext uri="{FF2B5EF4-FFF2-40B4-BE49-F238E27FC236}">
+                <a16:creationId xmlns:a16="http://schemas.microsoft.com/office/drawing/2014/main" id="{6523D8B8-3534-4D0E-B6C0-A2545E47C115}"/>
+              </a:ext>
+            </a:extLst>
+          </p:cNvPr>
+          <p:cNvSpPr>
+            <a:spLocks xmlns:a="http://schemas.openxmlformats.org/drawingml/2006/main" noGrp="1"/>
+          </p:cNvSpPr>
+          <p:nvPr>
+            <p:ph type="subTitle" idx="7"/>
+          </p:nvPr>
+        </p:nvSpPr>
+        <p:spPr>
+          <a:xfrm xmlns:a="http://schemas.openxmlformats.org/drawingml/2006/main">
+            <a:off x="723900" y="5505450"/>
+            <a:ext cx="7239000" cy="285750"/>
+          </a:xfrm>
+        </p:spPr>
+        <p:txBody>
+          <a:bodyPr xmlns:a="http://schemas.openxmlformats.org/drawingml/2006/main"/>
+          <a:lstStyle xmlns:a="http://schemas.openxmlformats.org/drawingml/2006/main"/>
+          <a:p xmlns:a="http://schemas.openxmlformats.org/drawingml/2006/main">
+            <a:r>
+              <a:t/>
+            </a:r>
+          </a:p>
+        </p:txBody>
+      </p:sp>
     </p:spTree>
   </p:cSld>
 </p:sldLayout>
@@ -1007,7 +3311,15 @@
   </p:cSld>
   <p:clrMap bg1="lt1" tx1="dk1" bg2="lt2" tx2="dk2" accent1="accent1" accent2="accent2" accent3="accent3" accent4="accent4" accent5="accent5" accent6="accent6" hlink="hlink" folHlink="folHlink"/>
   <p:sldLayoutIdLst>
-    <p:sldLayoutId xmlns:r="http://schemas.openxmlformats.org/officeDocument/2006/relationships" id="2147483649" r:id="Rda4784b20fc2424b"/>
+    <p:sldLayoutId xmlns:r="http://schemas.openxmlformats.org/officeDocument/2006/relationships" id="2147483649" r:id="R0cdb8e9f862141ed"/>
+    <p:sldLayoutId xmlns:r="http://schemas.openxmlformats.org/officeDocument/2006/relationships" id="2147483650" r:id="R7b58b83bb2094b3c"/>
+    <p:sldLayoutId xmlns:r="http://schemas.openxmlformats.org/officeDocument/2006/relationships" id="2147483651" r:id="Rf9e82f5aa1094339"/>
+    <p:sldLayoutId xmlns:r="http://schemas.openxmlformats.org/officeDocument/2006/relationships" id="2147483652" r:id="Rf08bb9ce6b4b427a"/>
+    <p:sldLayoutId xmlns:r="http://schemas.openxmlformats.org/officeDocument/2006/relationships" id="2147483653" r:id="R95c486dc65cd4e07"/>
+    <p:sldLayoutId xmlns:r="http://schemas.openxmlformats.org/officeDocument/2006/relationships" id="2147483654" r:id="R012cb33d875540b0"/>
+    <p:sldLayoutId xmlns:r="http://schemas.openxmlformats.org/officeDocument/2006/relationships" id="2147483655" r:id="Rf7235c4462994dd9"/>
+    <p:sldLayoutId xmlns:r="http://schemas.openxmlformats.org/officeDocument/2006/relationships" id="2147483656" r:id="Rc1bc385d599443dd"/>
+    <p:sldLayoutId xmlns:r="http://schemas.openxmlformats.org/officeDocument/2006/relationships" id="2147483657" r:id="R7a218d9ed15942ec"/>
   </p:sldLayoutIdLst>
   <p:txStyles>
     <p:titleStyle>
@@ -4191,6 +6503,3795 @@
     <p:extLst>
       <p:ext uri="{BB962C8B-B14F-4D97-AF65-F5344CB8AC3E}">
         <p14:creationId xmlns:p14="http://schemas.microsoft.com/office/powerpoint/2010/main" val="843036341"/>
+      </p:ext>
+    </p:extLst>
+  </p:cSld>
+</p:sld>
+</file>
+
+<file path=ppt/slides/slide10.xml><?xml version="1.0" encoding="utf-8"?>
+<p:sld xmlns:p="http://schemas.openxmlformats.org/presentationml/2006/main">
+  <p:cSld>
+    <p:bg>
+      <p:bgPr>
+        <a:solidFill xmlns:a="http://schemas.openxmlformats.org/drawingml/2006/main">
+          <a:srgbClr val="F8F9F7"/>
+        </a:solidFill>
+      </p:bgPr>
+    </p:bg>
+    <p:spTree>
+      <p:nvGrpSpPr>
+        <p:cNvPr id="1" name=""/>
+        <p:cNvGrpSpPr/>
+        <p:nvPr/>
+      </p:nvGrpSpPr>
+      <p:grpSpPr>
+        <a:xfrm xmlns:a="http://schemas.openxmlformats.org/drawingml/2006/main"/>
+      </p:grpSpPr>
+      <p:sp>
+        <p:nvSpPr>
+          <p:cNvPr id="11" name="top-accent-10">
+            <a:extLst xmlns:a="http://schemas.openxmlformats.org/drawingml/2006/main">
+              <a:ext uri="{FF2B5EF4-FFF2-40B4-BE49-F238E27FC236}">
+                <a16:creationId xmlns:a16="http://schemas.microsoft.com/office/drawing/2014/main" id="{3721C90C-BADC-417C-A78F-6F53C1968979}"/>
+              </a:ext>
+            </a:extLst>
+          </p:cNvPr>
+          <p:cNvSpPr>
+            <a:spLocks xmlns:a="http://schemas.openxmlformats.org/drawingml/2006/main" noGrp="1"/>
+          </p:cNvSpPr>
+          <p:nvPr/>
+        </p:nvSpPr>
+        <p:spPr>
+          <a:xfrm xmlns:a="http://schemas.openxmlformats.org/drawingml/2006/main">
+            <a:off x="0" y="0"/>
+            <a:ext cx="12192000" cy="76200"/>
+          </a:xfrm>
+          <a:prstGeom xmlns:a="http://schemas.openxmlformats.org/drawingml/2006/main" prst="rect">
+            <a:avLst/>
+          </a:prstGeom>
+          <a:solidFill xmlns:a="http://schemas.openxmlformats.org/drawingml/2006/main">
+            <a:srgbClr val="00A7A0"/>
+          </a:solidFill>
+          <a:ln xmlns:a="http://schemas.openxmlformats.org/drawingml/2006/main" w="0">
+            <a:noFill/>
+          </a:ln>
+        </p:spPr>
+      </p:sp>
+      <p:sp>
+        <p:nvSpPr>
+          <p:cNvPr id="2" name="section-label-10">
+            <a:extLst xmlns:a="http://schemas.openxmlformats.org/drawingml/2006/main">
+              <a:ext uri="{FF2B5EF4-FFF2-40B4-BE49-F238E27FC236}">
+                <a16:creationId xmlns:a16="http://schemas.microsoft.com/office/drawing/2014/main" id="{96F362C1-10E3-40EC-B54D-AACA49D57B6A}"/>
+              </a:ext>
+            </a:extLst>
+          </p:cNvPr>
+          <p:cNvSpPr>
+            <a:spLocks xmlns:a="http://schemas.openxmlformats.org/drawingml/2006/main" noGrp="1"/>
+          </p:cNvSpPr>
+          <p:nvPr/>
+        </p:nvSpPr>
+        <p:spPr>
+          <a:xfrm xmlns:a="http://schemas.openxmlformats.org/drawingml/2006/main">
+            <a:off x="609600" y="285750"/>
+            <a:ext cx="6858000" cy="209550"/>
+          </a:xfrm>
+          <a:prstGeom xmlns:a="http://schemas.openxmlformats.org/drawingml/2006/main" prst="rect">
+            <a:avLst/>
+          </a:prstGeom>
+          <a:noFill xmlns:a="http://schemas.openxmlformats.org/drawingml/2006/main"/>
+          <a:ln xmlns:a="http://schemas.openxmlformats.org/drawingml/2006/main" w="0">
+            <a:noFill/>
+          </a:ln>
+        </p:spPr>
+        <p:txBody>
+          <a:bodyPr xmlns:a="http://schemas.openxmlformats.org/drawingml/2006/main" lIns="0" tIns="0" rIns="0" bIns="0" anchor="ctr">
+            <a:normAutofit fontScale="100000"/>
+          </a:bodyPr>
+          <a:lstStyle xmlns:a="http://schemas.openxmlformats.org/drawingml/2006/main"/>
+          <a:p xmlns:a="http://schemas.openxmlformats.org/drawingml/2006/main">
+            <a:pPr algn="l">
+              <a:defRPr sz="975" b="1">
+                <a:solidFill>
+                  <a:srgbClr val="087D79"/>
+                </a:solidFill>
+                <a:latin typeface="Avenir Next"/>
+                <a:ea typeface="Avenir Next"/>
+                <a:cs typeface="Avenir Next"/>
+              </a:defRPr>
+            </a:pPr>
+            <a:r>
+              <a:rPr sz="975" b="1">
+                <a:solidFill>
+                  <a:srgbClr val="087D79"/>
+                </a:solidFill>
+                <a:latin typeface="Avenir Next"/>
+                <a:ea typeface="Avenir Next"/>
+                <a:cs typeface="Avenir Next"/>
+              </a:rPr>
+              <a:t>[SECTION LABEL]</a:t>
+            </a:r>
+          </a:p>
+        </p:txBody>
+      </p:sp>
+      <p:sp>
+        <p:nvSpPr>
+          <p:cNvPr id="3" name="title-10">
+            <a:extLst xmlns:a="http://schemas.openxmlformats.org/drawingml/2006/main">
+              <a:ext uri="{FF2B5EF4-FFF2-40B4-BE49-F238E27FC236}">
+                <a16:creationId xmlns:a16="http://schemas.microsoft.com/office/drawing/2014/main" id="{FB3C9113-713D-44CB-BD2C-A3D4EEFD4DCC}"/>
+              </a:ext>
+            </a:extLst>
+          </p:cNvPr>
+          <p:cNvSpPr>
+            <a:spLocks xmlns:a="http://schemas.openxmlformats.org/drawingml/2006/main" noGrp="1"/>
+          </p:cNvSpPr>
+          <p:nvPr/>
+        </p:nvSpPr>
+        <p:spPr>
+          <a:xfrm xmlns:a="http://schemas.openxmlformats.org/drawingml/2006/main">
+            <a:off x="609600" y="561975"/>
+            <a:ext cx="10972800" cy="514350"/>
+          </a:xfrm>
+          <a:prstGeom xmlns:a="http://schemas.openxmlformats.org/drawingml/2006/main" prst="rect">
+            <a:avLst/>
+          </a:prstGeom>
+          <a:noFill xmlns:a="http://schemas.openxmlformats.org/drawingml/2006/main"/>
+          <a:ln xmlns:a="http://schemas.openxmlformats.org/drawingml/2006/main" w="0">
+            <a:noFill/>
+          </a:ln>
+        </p:spPr>
+        <p:txBody>
+          <a:bodyPr xmlns:a="http://schemas.openxmlformats.org/drawingml/2006/main" lIns="0" tIns="0" rIns="0" bIns="0" anchor="ctr">
+            <a:normAutofit fontScale="100000"/>
+          </a:bodyPr>
+          <a:lstStyle xmlns:a="http://schemas.openxmlformats.org/drawingml/2006/main"/>
+          <a:p xmlns:a="http://schemas.openxmlformats.org/drawingml/2006/main">
+            <a:pPr algn="l">
+              <a:defRPr sz="2625" b="1">
+                <a:solidFill>
+                  <a:srgbClr val="102638"/>
+                </a:solidFill>
+                <a:latin typeface="Avenir Next"/>
+                <a:ea typeface="Avenir Next"/>
+                <a:cs typeface="Avenir Next"/>
+              </a:defRPr>
+            </a:pPr>
+            <a:r>
+              <a:rPr sz="2625" b="1">
+                <a:solidFill>
+                  <a:srgbClr val="102638"/>
+                </a:solidFill>
+                <a:latin typeface="Avenir Next"/>
+                <a:ea typeface="Avenir Next"/>
+                <a:cs typeface="Avenir Next"/>
+              </a:rPr>
+              <a:t>[SLIDE TITLE]</a:t>
+            </a:r>
+          </a:p>
+        </p:txBody>
+      </p:sp>
+      <p:sp>
+        <p:nvSpPr>
+          <p:cNvPr id="4" name="subtitle-10">
+            <a:extLst xmlns:a="http://schemas.openxmlformats.org/drawingml/2006/main">
+              <a:ext uri="{FF2B5EF4-FFF2-40B4-BE49-F238E27FC236}">
+                <a16:creationId xmlns:a16="http://schemas.microsoft.com/office/drawing/2014/main" id="{6D04EEFE-2D4B-4F3C-B077-17575FCAC197}"/>
+              </a:ext>
+            </a:extLst>
+          </p:cNvPr>
+          <p:cNvSpPr>
+            <a:spLocks xmlns:a="http://schemas.openxmlformats.org/drawingml/2006/main" noGrp="1"/>
+          </p:cNvSpPr>
+          <p:nvPr/>
+        </p:nvSpPr>
+        <p:spPr>
+          <a:xfrm xmlns:a="http://schemas.openxmlformats.org/drawingml/2006/main">
+            <a:off x="609600" y="1085850"/>
+            <a:ext cx="10668000" cy="304800"/>
+          </a:xfrm>
+          <a:prstGeom xmlns:a="http://schemas.openxmlformats.org/drawingml/2006/main" prst="rect">
+            <a:avLst/>
+          </a:prstGeom>
+          <a:noFill xmlns:a="http://schemas.openxmlformats.org/drawingml/2006/main"/>
+          <a:ln xmlns:a="http://schemas.openxmlformats.org/drawingml/2006/main" w="0">
+            <a:noFill/>
+          </a:ln>
+        </p:spPr>
+        <p:txBody>
+          <a:bodyPr xmlns:a="http://schemas.openxmlformats.org/drawingml/2006/main" lIns="0" tIns="0" rIns="0" bIns="0" anchor="ctr">
+            <a:normAutofit fontScale="100000"/>
+          </a:bodyPr>
+          <a:lstStyle xmlns:a="http://schemas.openxmlformats.org/drawingml/2006/main"/>
+          <a:p xmlns:a="http://schemas.openxmlformats.org/drawingml/2006/main">
+            <a:pPr algn="l">
+              <a:defRPr sz="1350" b="0">
+                <a:solidFill>
+                  <a:srgbClr val="4E6170"/>
+                </a:solidFill>
+                <a:latin typeface="Avenir Next"/>
+                <a:ea typeface="Avenir Next"/>
+                <a:cs typeface="Avenir Next"/>
+              </a:defRPr>
+            </a:pPr>
+            <a:r>
+              <a:rPr sz="1350" b="0">
+                <a:solidFill>
+                  <a:srgbClr val="4E6170"/>
+                </a:solidFill>
+                <a:latin typeface="Avenir Next"/>
+                <a:ea typeface="Avenir Next"/>
+                <a:cs typeface="Avenir Next"/>
+              </a:rPr>
+              <a:t>[Subtitle or context]</a:t>
+            </a:r>
+          </a:p>
+        </p:txBody>
+      </p:sp>
+      <p:sp>
+        <p:nvSpPr>
+          <p:cNvPr id="5" name="footer-rule-10">
+            <a:extLst xmlns:a="http://schemas.openxmlformats.org/drawingml/2006/main">
+              <a:ext uri="{FF2B5EF4-FFF2-40B4-BE49-F238E27FC236}">
+                <a16:creationId xmlns:a16="http://schemas.microsoft.com/office/drawing/2014/main" id="{998C6AD4-2F27-4E19-8ADC-B9586DB60616}"/>
+              </a:ext>
+            </a:extLst>
+          </p:cNvPr>
+          <p:cNvSpPr>
+            <a:spLocks xmlns:a="http://schemas.openxmlformats.org/drawingml/2006/main" noGrp="1"/>
+          </p:cNvSpPr>
+          <p:nvPr/>
+        </p:nvSpPr>
+        <p:spPr>
+          <a:xfrm xmlns:a="http://schemas.openxmlformats.org/drawingml/2006/main">
+            <a:off x="609600" y="6457950"/>
+            <a:ext cx="10972800" cy="9525"/>
+          </a:xfrm>
+          <a:prstGeom xmlns:a="http://schemas.openxmlformats.org/drawingml/2006/main" prst="rect">
+            <a:avLst/>
+          </a:prstGeom>
+          <a:solidFill xmlns:a="http://schemas.openxmlformats.org/drawingml/2006/main">
+            <a:srgbClr val="E4EAED"/>
+          </a:solidFill>
+          <a:ln xmlns:a="http://schemas.openxmlformats.org/drawingml/2006/main" w="0">
+            <a:noFill/>
+          </a:ln>
+        </p:spPr>
+      </p:sp>
+      <p:sp>
+        <p:nvSpPr>
+          <p:cNvPr id="6" name="page-10">
+            <a:extLst xmlns:a="http://schemas.openxmlformats.org/drawingml/2006/main">
+              <a:ext uri="{FF2B5EF4-FFF2-40B4-BE49-F238E27FC236}">
+                <a16:creationId xmlns:a16="http://schemas.microsoft.com/office/drawing/2014/main" id="{D9B7D048-2834-4D42-BD8E-F948FD2EBE9E}"/>
+              </a:ext>
+            </a:extLst>
+          </p:cNvPr>
+          <p:cNvSpPr>
+            <a:spLocks xmlns:a="http://schemas.openxmlformats.org/drawingml/2006/main" noGrp="1"/>
+          </p:cNvSpPr>
+          <p:nvPr/>
+        </p:nvSpPr>
+        <p:spPr>
+          <a:xfrm xmlns:a="http://schemas.openxmlformats.org/drawingml/2006/main">
+            <a:off x="11144250" y="6515100"/>
+            <a:ext cx="438150" cy="171450"/>
+          </a:xfrm>
+          <a:prstGeom xmlns:a="http://schemas.openxmlformats.org/drawingml/2006/main" prst="rect">
+            <a:avLst/>
+          </a:prstGeom>
+          <a:noFill xmlns:a="http://schemas.openxmlformats.org/drawingml/2006/main"/>
+          <a:ln xmlns:a="http://schemas.openxmlformats.org/drawingml/2006/main" w="0">
+            <a:noFill/>
+          </a:ln>
+        </p:spPr>
+        <p:txBody>
+          <a:bodyPr xmlns:a="http://schemas.openxmlformats.org/drawingml/2006/main" lIns="0" tIns="0" rIns="0" bIns="0" anchor="ctr">
+            <a:normAutofit fontScale="100000"/>
+          </a:bodyPr>
+          <a:lstStyle xmlns:a="http://schemas.openxmlformats.org/drawingml/2006/main"/>
+          <a:p xmlns:a="http://schemas.openxmlformats.org/drawingml/2006/main">
+            <a:pPr algn="r">
+              <a:defRPr sz="825" b="1">
+                <a:solidFill>
+                  <a:srgbClr val="71818D"/>
+                </a:solidFill>
+                <a:latin typeface="Avenir Next"/>
+                <a:ea typeface="Avenir Next"/>
+                <a:cs typeface="Avenir Next"/>
+              </a:defRPr>
+            </a:pPr>
+            <a:r>
+              <a:rPr sz="825" b="1">
+                <a:solidFill>
+                  <a:srgbClr val="71818D"/>
+                </a:solidFill>
+                <a:latin typeface="Avenir Next"/>
+                <a:ea typeface="Avenir Next"/>
+                <a:cs typeface="Avenir Next"/>
+              </a:rPr>
+              <a:t>10</a:t>
+            </a:r>
+          </a:p>
+        </p:txBody>
+      </p:sp>
+      <p:sp>
+        <p:nvSpPr>
+          <p:cNvPr id="7" name="kpi-1-10">
+            <a:extLst xmlns:a="http://schemas.openxmlformats.org/drawingml/2006/main">
+              <a:ext uri="{FF2B5EF4-FFF2-40B4-BE49-F238E27FC236}">
+                <a16:creationId xmlns:a16="http://schemas.microsoft.com/office/drawing/2014/main" id="{769F1DC3-1221-4634-BA68-668A99AD35A6}"/>
+              </a:ext>
+            </a:extLst>
+          </p:cNvPr>
+          <p:cNvSpPr>
+            <a:spLocks xmlns:a="http://schemas.openxmlformats.org/drawingml/2006/main" noGrp="1"/>
+          </p:cNvSpPr>
+          <p:nvPr/>
+        </p:nvSpPr>
+        <p:spPr>
+          <a:xfrm xmlns:a="http://schemas.openxmlformats.org/drawingml/2006/main">
+            <a:off x="609600" y="1752600"/>
+            <a:ext cx="3333750" cy="1143000"/>
+          </a:xfrm>
+          <a:prstGeom xmlns:a="http://schemas.openxmlformats.org/drawingml/2006/main" prst="rect">
+            <a:avLst/>
+          </a:prstGeom>
+          <a:solidFill xmlns:a="http://schemas.openxmlformats.org/drawingml/2006/main">
+            <a:srgbClr val="FFFFFF"/>
+          </a:solidFill>
+          <a:ln xmlns:a="http://schemas.openxmlformats.org/drawingml/2006/main" w="11906">
+            <a:solidFill>
+              <a:srgbClr val="B9C5CB"/>
+            </a:solidFill>
+            <a:prstDash val="solid"/>
+          </a:ln>
+        </p:spPr>
+        <p:txBody>
+          <a:bodyPr xmlns:a="http://schemas.openxmlformats.org/drawingml/2006/main" lIns="114300" tIns="114300" rIns="114300" bIns="114300" anchor="ctr">
+            <a:normAutofit fontScale="100000"/>
+          </a:bodyPr>
+          <a:lstStyle xmlns:a="http://schemas.openxmlformats.org/drawingml/2006/main"/>
+          <a:p xmlns:a="http://schemas.openxmlformats.org/drawingml/2006/main">
+            <a:pPr algn="ctr">
+              <a:defRPr sz="1275" b="1">
+                <a:solidFill>
+                  <a:srgbClr val="4E6170"/>
+                </a:solidFill>
+                <a:latin typeface="Avenir Next"/>
+                <a:ea typeface="Avenir Next"/>
+                <a:cs typeface="Avenir Next"/>
+              </a:defRPr>
+            </a:pPr>
+            <a:r>
+              <a:rPr sz="1275" b="1">
+                <a:solidFill>
+                  <a:srgbClr val="4E6170"/>
+                </a:solidFill>
+                <a:latin typeface="Avenir Next"/>
+                <a:ea typeface="Avenir Next"/>
+                <a:cs typeface="Avenir Next"/>
+              </a:rPr>
+              <a:t>[KPI 01]</a:t>
+            </a:r>
+          </a:p>
+        </p:txBody>
+      </p:sp>
+      <p:sp>
+        <p:nvSpPr>
+          <p:cNvPr id="8" name="kpi-2-10">
+            <a:extLst xmlns:a="http://schemas.openxmlformats.org/drawingml/2006/main">
+              <a:ext uri="{FF2B5EF4-FFF2-40B4-BE49-F238E27FC236}">
+                <a16:creationId xmlns:a16="http://schemas.microsoft.com/office/drawing/2014/main" id="{4AC8E62F-A7AF-42E6-83DF-E68330856913}"/>
+              </a:ext>
+            </a:extLst>
+          </p:cNvPr>
+          <p:cNvSpPr>
+            <a:spLocks xmlns:a="http://schemas.openxmlformats.org/drawingml/2006/main" noGrp="1"/>
+          </p:cNvSpPr>
+          <p:nvPr/>
+        </p:nvSpPr>
+        <p:spPr>
+          <a:xfrm xmlns:a="http://schemas.openxmlformats.org/drawingml/2006/main">
+            <a:off x="4295775" y="1752600"/>
+            <a:ext cx="3333750" cy="1143000"/>
+          </a:xfrm>
+          <a:prstGeom xmlns:a="http://schemas.openxmlformats.org/drawingml/2006/main" prst="rect">
+            <a:avLst/>
+          </a:prstGeom>
+          <a:solidFill xmlns:a="http://schemas.openxmlformats.org/drawingml/2006/main">
+            <a:srgbClr val="DDF3F0"/>
+          </a:solidFill>
+          <a:ln xmlns:a="http://schemas.openxmlformats.org/drawingml/2006/main" w="11906">
+            <a:solidFill>
+              <a:srgbClr val="00A7A0"/>
+            </a:solidFill>
+            <a:prstDash val="solid"/>
+          </a:ln>
+        </p:spPr>
+        <p:txBody>
+          <a:bodyPr xmlns:a="http://schemas.openxmlformats.org/drawingml/2006/main" lIns="114300" tIns="114300" rIns="114300" bIns="114300" anchor="ctr">
+            <a:normAutofit fontScale="100000"/>
+          </a:bodyPr>
+          <a:lstStyle xmlns:a="http://schemas.openxmlformats.org/drawingml/2006/main"/>
+          <a:p xmlns:a="http://schemas.openxmlformats.org/drawingml/2006/main">
+            <a:pPr algn="ctr">
+              <a:defRPr sz="1275" b="1">
+                <a:solidFill>
+                  <a:srgbClr val="087D79"/>
+                </a:solidFill>
+                <a:latin typeface="Avenir Next"/>
+                <a:ea typeface="Avenir Next"/>
+                <a:cs typeface="Avenir Next"/>
+              </a:defRPr>
+            </a:pPr>
+            <a:r>
+              <a:rPr sz="1275" b="1">
+                <a:solidFill>
+                  <a:srgbClr val="087D79"/>
+                </a:solidFill>
+                <a:latin typeface="Avenir Next"/>
+                <a:ea typeface="Avenir Next"/>
+                <a:cs typeface="Avenir Next"/>
+              </a:rPr>
+              <a:t>[KPI 02]</a:t>
+            </a:r>
+          </a:p>
+        </p:txBody>
+      </p:sp>
+      <p:sp>
+        <p:nvSpPr>
+          <p:cNvPr id="9" name="kpi-3-10">
+            <a:extLst xmlns:a="http://schemas.openxmlformats.org/drawingml/2006/main">
+              <a:ext uri="{FF2B5EF4-FFF2-40B4-BE49-F238E27FC236}">
+                <a16:creationId xmlns:a16="http://schemas.microsoft.com/office/drawing/2014/main" id="{83F22FA2-8C74-482B-9D5A-2A79F91584C0}"/>
+              </a:ext>
+            </a:extLst>
+          </p:cNvPr>
+          <p:cNvSpPr>
+            <a:spLocks xmlns:a="http://schemas.openxmlformats.org/drawingml/2006/main" noGrp="1"/>
+          </p:cNvSpPr>
+          <p:nvPr/>
+        </p:nvSpPr>
+        <p:spPr>
+          <a:xfrm xmlns:a="http://schemas.openxmlformats.org/drawingml/2006/main">
+            <a:off x="7981950" y="1752600"/>
+            <a:ext cx="3333750" cy="1143000"/>
+          </a:xfrm>
+          <a:prstGeom xmlns:a="http://schemas.openxmlformats.org/drawingml/2006/main" prst="rect">
+            <a:avLst/>
+          </a:prstGeom>
+          <a:solidFill xmlns:a="http://schemas.openxmlformats.org/drawingml/2006/main">
+            <a:srgbClr val="FFFFFF"/>
+          </a:solidFill>
+          <a:ln xmlns:a="http://schemas.openxmlformats.org/drawingml/2006/main" w="11906">
+            <a:solidFill>
+              <a:srgbClr val="B9C5CB"/>
+            </a:solidFill>
+            <a:prstDash val="solid"/>
+          </a:ln>
+        </p:spPr>
+        <p:txBody>
+          <a:bodyPr xmlns:a="http://schemas.openxmlformats.org/drawingml/2006/main" lIns="114300" tIns="114300" rIns="114300" bIns="114300" anchor="ctr">
+            <a:normAutofit fontScale="100000"/>
+          </a:bodyPr>
+          <a:lstStyle xmlns:a="http://schemas.openxmlformats.org/drawingml/2006/main"/>
+          <a:p xmlns:a="http://schemas.openxmlformats.org/drawingml/2006/main">
+            <a:pPr algn="ctr">
+              <a:defRPr sz="1275" b="1">
+                <a:solidFill>
+                  <a:srgbClr val="4E6170"/>
+                </a:solidFill>
+                <a:latin typeface="Avenir Next"/>
+                <a:ea typeface="Avenir Next"/>
+                <a:cs typeface="Avenir Next"/>
+              </a:defRPr>
+            </a:pPr>
+            <a:r>
+              <a:rPr sz="1275" b="1">
+                <a:solidFill>
+                  <a:srgbClr val="4E6170"/>
+                </a:solidFill>
+                <a:latin typeface="Avenir Next"/>
+                <a:ea typeface="Avenir Next"/>
+                <a:cs typeface="Avenir Next"/>
+              </a:rPr>
+              <a:t>[KPI 03]</a:t>
+            </a:r>
+          </a:p>
+        </p:txBody>
+      </p:sp>
+      <p:sp>
+        <p:nvSpPr>
+          <p:cNvPr id="10" name="summary-body-10">
+            <a:extLst xmlns:a="http://schemas.openxmlformats.org/drawingml/2006/main">
+              <a:ext uri="{FF2B5EF4-FFF2-40B4-BE49-F238E27FC236}">
+                <a16:creationId xmlns:a16="http://schemas.microsoft.com/office/drawing/2014/main" id="{1A5ECA62-1946-44F0-9601-6B89C6254A74}"/>
+              </a:ext>
+            </a:extLst>
+          </p:cNvPr>
+          <p:cNvSpPr>
+            <a:spLocks xmlns:a="http://schemas.openxmlformats.org/drawingml/2006/main" noGrp="1"/>
+          </p:cNvSpPr>
+          <p:nvPr/>
+        </p:nvSpPr>
+        <p:spPr>
+          <a:xfrm xmlns:a="http://schemas.openxmlformats.org/drawingml/2006/main">
+            <a:off x="609600" y="3257550"/>
+            <a:ext cx="10706100" cy="2667000"/>
+          </a:xfrm>
+          <a:prstGeom xmlns:a="http://schemas.openxmlformats.org/drawingml/2006/main" prst="rect">
+            <a:avLst/>
+          </a:prstGeom>
+          <a:solidFill xmlns:a="http://schemas.openxmlformats.org/drawingml/2006/main">
+            <a:srgbClr val="F1F4F5"/>
+          </a:solidFill>
+          <a:ln xmlns:a="http://schemas.openxmlformats.org/drawingml/2006/main" w="11906">
+            <a:solidFill>
+              <a:srgbClr val="E4EAED"/>
+            </a:solidFill>
+            <a:prstDash val="solid"/>
+          </a:ln>
+        </p:spPr>
+        <p:txBody>
+          <a:bodyPr xmlns:a="http://schemas.openxmlformats.org/drawingml/2006/main" lIns="114300" tIns="114300" rIns="114300" bIns="114300" anchor="ctr">
+            <a:normAutofit fontScale="100000"/>
+          </a:bodyPr>
+          <a:lstStyle xmlns:a="http://schemas.openxmlformats.org/drawingml/2006/main"/>
+          <a:p xmlns:a="http://schemas.openxmlformats.org/drawingml/2006/main">
+            <a:pPr algn="ctr">
+              <a:defRPr sz="1350" b="1">
+                <a:solidFill>
+                  <a:srgbClr val="4E6170"/>
+                </a:solidFill>
+                <a:latin typeface="Avenir Next"/>
+                <a:ea typeface="Avenir Next"/>
+                <a:cs typeface="Avenir Next"/>
+              </a:defRPr>
+            </a:pPr>
+            <a:r>
+              <a:rPr sz="1350" b="1">
+                <a:solidFill>
+                  <a:srgbClr val="4E6170"/>
+                </a:solidFill>
+                <a:latin typeface="Avenir Next"/>
+                <a:ea typeface="Avenir Next"/>
+                <a:cs typeface="Avenir Next"/>
+              </a:rPr>
+              <a:t>[EXECUTIVE SUMMARY / KEY MESSAGES]</a:t>
+            </a:r>
+          </a:p>
+        </p:txBody>
+      </p:sp>
+    </p:spTree>
+    <p:extLst>
+      <p:ext uri="{BB962C8B-B14F-4D97-AF65-F5344CB8AC3E}">
+        <p14:creationId xmlns:p14="http://schemas.microsoft.com/office/powerpoint/2010/main" val="1785642721"/>
+      </p:ext>
+    </p:extLst>
+  </p:cSld>
+</p:sld>
+</file>
+
+<file path=ppt/slides/slide11.xml><?xml version="1.0" encoding="utf-8"?>
+<p:sld xmlns:p="http://schemas.openxmlformats.org/presentationml/2006/main">
+  <p:cSld>
+    <p:bg>
+      <p:bgPr>
+        <a:solidFill xmlns:a="http://schemas.openxmlformats.org/drawingml/2006/main">
+          <a:srgbClr val="F8F9F7"/>
+        </a:solidFill>
+      </p:bgPr>
+    </p:bg>
+    <p:spTree>
+      <p:nvGrpSpPr>
+        <p:cNvPr id="1" name=""/>
+        <p:cNvGrpSpPr/>
+        <p:nvPr/>
+      </p:nvGrpSpPr>
+      <p:grpSpPr>
+        <a:xfrm xmlns:a="http://schemas.openxmlformats.org/drawingml/2006/main"/>
+      </p:grpSpPr>
+      <p:sp>
+        <p:nvSpPr>
+          <p:cNvPr id="12" name="top-accent-11">
+            <a:extLst xmlns:a="http://schemas.openxmlformats.org/drawingml/2006/main">
+              <a:ext uri="{FF2B5EF4-FFF2-40B4-BE49-F238E27FC236}">
+                <a16:creationId xmlns:a16="http://schemas.microsoft.com/office/drawing/2014/main" id="{2EDACF12-7ABB-4D72-9A4A-53DF8171C80D}"/>
+              </a:ext>
+            </a:extLst>
+          </p:cNvPr>
+          <p:cNvSpPr>
+            <a:spLocks xmlns:a="http://schemas.openxmlformats.org/drawingml/2006/main" noGrp="1"/>
+          </p:cNvSpPr>
+          <p:nvPr/>
+        </p:nvSpPr>
+        <p:spPr>
+          <a:xfrm xmlns:a="http://schemas.openxmlformats.org/drawingml/2006/main">
+            <a:off x="0" y="0"/>
+            <a:ext cx="12192000" cy="76200"/>
+          </a:xfrm>
+          <a:prstGeom xmlns:a="http://schemas.openxmlformats.org/drawingml/2006/main" prst="rect">
+            <a:avLst/>
+          </a:prstGeom>
+          <a:solidFill xmlns:a="http://schemas.openxmlformats.org/drawingml/2006/main">
+            <a:srgbClr val="00A7A0"/>
+          </a:solidFill>
+          <a:ln xmlns:a="http://schemas.openxmlformats.org/drawingml/2006/main" w="0">
+            <a:noFill/>
+          </a:ln>
+        </p:spPr>
+      </p:sp>
+      <p:sp>
+        <p:nvSpPr>
+          <p:cNvPr id="2" name="section-label-11">
+            <a:extLst xmlns:a="http://schemas.openxmlformats.org/drawingml/2006/main">
+              <a:ext uri="{FF2B5EF4-FFF2-40B4-BE49-F238E27FC236}">
+                <a16:creationId xmlns:a16="http://schemas.microsoft.com/office/drawing/2014/main" id="{4A714380-53B7-40B2-866A-1E9625B88EC7}"/>
+              </a:ext>
+            </a:extLst>
+          </p:cNvPr>
+          <p:cNvSpPr>
+            <a:spLocks xmlns:a="http://schemas.openxmlformats.org/drawingml/2006/main" noGrp="1"/>
+          </p:cNvSpPr>
+          <p:nvPr/>
+        </p:nvSpPr>
+        <p:spPr>
+          <a:xfrm xmlns:a="http://schemas.openxmlformats.org/drawingml/2006/main">
+            <a:off x="609600" y="285750"/>
+            <a:ext cx="6858000" cy="209550"/>
+          </a:xfrm>
+          <a:prstGeom xmlns:a="http://schemas.openxmlformats.org/drawingml/2006/main" prst="rect">
+            <a:avLst/>
+          </a:prstGeom>
+          <a:noFill xmlns:a="http://schemas.openxmlformats.org/drawingml/2006/main"/>
+          <a:ln xmlns:a="http://schemas.openxmlformats.org/drawingml/2006/main" w="0">
+            <a:noFill/>
+          </a:ln>
+        </p:spPr>
+        <p:txBody>
+          <a:bodyPr xmlns:a="http://schemas.openxmlformats.org/drawingml/2006/main" lIns="0" tIns="0" rIns="0" bIns="0" anchor="ctr">
+            <a:normAutofit fontScale="100000"/>
+          </a:bodyPr>
+          <a:lstStyle xmlns:a="http://schemas.openxmlformats.org/drawingml/2006/main"/>
+          <a:p xmlns:a="http://schemas.openxmlformats.org/drawingml/2006/main">
+            <a:pPr algn="l">
+              <a:defRPr sz="975" b="1">
+                <a:solidFill>
+                  <a:srgbClr val="087D79"/>
+                </a:solidFill>
+                <a:latin typeface="Avenir Next"/>
+                <a:ea typeface="Avenir Next"/>
+                <a:cs typeface="Avenir Next"/>
+              </a:defRPr>
+            </a:pPr>
+            <a:r>
+              <a:rPr sz="975" b="1">
+                <a:solidFill>
+                  <a:srgbClr val="087D79"/>
+                </a:solidFill>
+                <a:latin typeface="Avenir Next"/>
+                <a:ea typeface="Avenir Next"/>
+                <a:cs typeface="Avenir Next"/>
+              </a:rPr>
+              <a:t>[SECTION LABEL]</a:t>
+            </a:r>
+          </a:p>
+        </p:txBody>
+      </p:sp>
+      <p:sp>
+        <p:nvSpPr>
+          <p:cNvPr id="3" name="title-11">
+            <a:extLst xmlns:a="http://schemas.openxmlformats.org/drawingml/2006/main">
+              <a:ext uri="{FF2B5EF4-FFF2-40B4-BE49-F238E27FC236}">
+                <a16:creationId xmlns:a16="http://schemas.microsoft.com/office/drawing/2014/main" id="{D4245B3F-EC70-4597-95DD-B2BDE18C517E}"/>
+              </a:ext>
+            </a:extLst>
+          </p:cNvPr>
+          <p:cNvSpPr>
+            <a:spLocks xmlns:a="http://schemas.openxmlformats.org/drawingml/2006/main" noGrp="1"/>
+          </p:cNvSpPr>
+          <p:nvPr/>
+        </p:nvSpPr>
+        <p:spPr>
+          <a:xfrm xmlns:a="http://schemas.openxmlformats.org/drawingml/2006/main">
+            <a:off x="609600" y="561975"/>
+            <a:ext cx="10972800" cy="514350"/>
+          </a:xfrm>
+          <a:prstGeom xmlns:a="http://schemas.openxmlformats.org/drawingml/2006/main" prst="rect">
+            <a:avLst/>
+          </a:prstGeom>
+          <a:noFill xmlns:a="http://schemas.openxmlformats.org/drawingml/2006/main"/>
+          <a:ln xmlns:a="http://schemas.openxmlformats.org/drawingml/2006/main" w="0">
+            <a:noFill/>
+          </a:ln>
+        </p:spPr>
+        <p:txBody>
+          <a:bodyPr xmlns:a="http://schemas.openxmlformats.org/drawingml/2006/main" lIns="0" tIns="0" rIns="0" bIns="0" anchor="ctr">
+            <a:normAutofit fontScale="100000"/>
+          </a:bodyPr>
+          <a:lstStyle xmlns:a="http://schemas.openxmlformats.org/drawingml/2006/main"/>
+          <a:p xmlns:a="http://schemas.openxmlformats.org/drawingml/2006/main">
+            <a:pPr algn="l">
+              <a:defRPr sz="2625" b="1">
+                <a:solidFill>
+                  <a:srgbClr val="102638"/>
+                </a:solidFill>
+                <a:latin typeface="Avenir Next"/>
+                <a:ea typeface="Avenir Next"/>
+                <a:cs typeface="Avenir Next"/>
+              </a:defRPr>
+            </a:pPr>
+            <a:r>
+              <a:rPr sz="2625" b="1">
+                <a:solidFill>
+                  <a:srgbClr val="102638"/>
+                </a:solidFill>
+                <a:latin typeface="Avenir Next"/>
+                <a:ea typeface="Avenir Next"/>
+                <a:cs typeface="Avenir Next"/>
+              </a:rPr>
+              <a:t>[SLIDE TITLE]</a:t>
+            </a:r>
+          </a:p>
+        </p:txBody>
+      </p:sp>
+      <p:sp>
+        <p:nvSpPr>
+          <p:cNvPr id="4" name="subtitle-11">
+            <a:extLst xmlns:a="http://schemas.openxmlformats.org/drawingml/2006/main">
+              <a:ext uri="{FF2B5EF4-FFF2-40B4-BE49-F238E27FC236}">
+                <a16:creationId xmlns:a16="http://schemas.microsoft.com/office/drawing/2014/main" id="{C73CFD4A-23BF-45EC-8A1C-C9ADCDCDA14B}"/>
+              </a:ext>
+            </a:extLst>
+          </p:cNvPr>
+          <p:cNvSpPr>
+            <a:spLocks xmlns:a="http://schemas.openxmlformats.org/drawingml/2006/main" noGrp="1"/>
+          </p:cNvSpPr>
+          <p:nvPr/>
+        </p:nvSpPr>
+        <p:spPr>
+          <a:xfrm xmlns:a="http://schemas.openxmlformats.org/drawingml/2006/main">
+            <a:off x="609600" y="1085850"/>
+            <a:ext cx="10668000" cy="304800"/>
+          </a:xfrm>
+          <a:prstGeom xmlns:a="http://schemas.openxmlformats.org/drawingml/2006/main" prst="rect">
+            <a:avLst/>
+          </a:prstGeom>
+          <a:noFill xmlns:a="http://schemas.openxmlformats.org/drawingml/2006/main"/>
+          <a:ln xmlns:a="http://schemas.openxmlformats.org/drawingml/2006/main" w="0">
+            <a:noFill/>
+          </a:ln>
+        </p:spPr>
+        <p:txBody>
+          <a:bodyPr xmlns:a="http://schemas.openxmlformats.org/drawingml/2006/main" lIns="0" tIns="0" rIns="0" bIns="0" anchor="ctr">
+            <a:normAutofit fontScale="100000"/>
+          </a:bodyPr>
+          <a:lstStyle xmlns:a="http://schemas.openxmlformats.org/drawingml/2006/main"/>
+          <a:p xmlns:a="http://schemas.openxmlformats.org/drawingml/2006/main">
+            <a:pPr algn="l">
+              <a:defRPr sz="1350" b="0">
+                <a:solidFill>
+                  <a:srgbClr val="4E6170"/>
+                </a:solidFill>
+                <a:latin typeface="Avenir Next"/>
+                <a:ea typeface="Avenir Next"/>
+                <a:cs typeface="Avenir Next"/>
+              </a:defRPr>
+            </a:pPr>
+            <a:r>
+              <a:rPr sz="1350" b="0">
+                <a:solidFill>
+                  <a:srgbClr val="4E6170"/>
+                </a:solidFill>
+                <a:latin typeface="Avenir Next"/>
+                <a:ea typeface="Avenir Next"/>
+                <a:cs typeface="Avenir Next"/>
+              </a:rPr>
+              <a:t>[Subtitle or context]</a:t>
+            </a:r>
+          </a:p>
+        </p:txBody>
+      </p:sp>
+      <p:sp>
+        <p:nvSpPr>
+          <p:cNvPr id="5" name="footer-rule-11">
+            <a:extLst xmlns:a="http://schemas.openxmlformats.org/drawingml/2006/main">
+              <a:ext uri="{FF2B5EF4-FFF2-40B4-BE49-F238E27FC236}">
+                <a16:creationId xmlns:a16="http://schemas.microsoft.com/office/drawing/2014/main" id="{0E4182F2-7CFA-4C1C-B539-EB5FFAF4A683}"/>
+              </a:ext>
+            </a:extLst>
+          </p:cNvPr>
+          <p:cNvSpPr>
+            <a:spLocks xmlns:a="http://schemas.openxmlformats.org/drawingml/2006/main" noGrp="1"/>
+          </p:cNvSpPr>
+          <p:nvPr/>
+        </p:nvSpPr>
+        <p:spPr>
+          <a:xfrm xmlns:a="http://schemas.openxmlformats.org/drawingml/2006/main">
+            <a:off x="609600" y="6457950"/>
+            <a:ext cx="10972800" cy="9525"/>
+          </a:xfrm>
+          <a:prstGeom xmlns:a="http://schemas.openxmlformats.org/drawingml/2006/main" prst="rect">
+            <a:avLst/>
+          </a:prstGeom>
+          <a:solidFill xmlns:a="http://schemas.openxmlformats.org/drawingml/2006/main">
+            <a:srgbClr val="E4EAED"/>
+          </a:solidFill>
+          <a:ln xmlns:a="http://schemas.openxmlformats.org/drawingml/2006/main" w="0">
+            <a:noFill/>
+          </a:ln>
+        </p:spPr>
+      </p:sp>
+      <p:sp>
+        <p:nvSpPr>
+          <p:cNvPr id="6" name="page-11">
+            <a:extLst xmlns:a="http://schemas.openxmlformats.org/drawingml/2006/main">
+              <a:ext uri="{FF2B5EF4-FFF2-40B4-BE49-F238E27FC236}">
+                <a16:creationId xmlns:a16="http://schemas.microsoft.com/office/drawing/2014/main" id="{4C5F6E5C-BEB3-4FFA-852D-6B504D8DFAE3}"/>
+              </a:ext>
+            </a:extLst>
+          </p:cNvPr>
+          <p:cNvSpPr>
+            <a:spLocks xmlns:a="http://schemas.openxmlformats.org/drawingml/2006/main" noGrp="1"/>
+          </p:cNvSpPr>
+          <p:nvPr/>
+        </p:nvSpPr>
+        <p:spPr>
+          <a:xfrm xmlns:a="http://schemas.openxmlformats.org/drawingml/2006/main">
+            <a:off x="11144250" y="6515100"/>
+            <a:ext cx="438150" cy="171450"/>
+          </a:xfrm>
+          <a:prstGeom xmlns:a="http://schemas.openxmlformats.org/drawingml/2006/main" prst="rect">
+            <a:avLst/>
+          </a:prstGeom>
+          <a:noFill xmlns:a="http://schemas.openxmlformats.org/drawingml/2006/main"/>
+          <a:ln xmlns:a="http://schemas.openxmlformats.org/drawingml/2006/main" w="0">
+            <a:noFill/>
+          </a:ln>
+        </p:spPr>
+        <p:txBody>
+          <a:bodyPr xmlns:a="http://schemas.openxmlformats.org/drawingml/2006/main" lIns="0" tIns="0" rIns="0" bIns="0" anchor="ctr">
+            <a:normAutofit fontScale="100000"/>
+          </a:bodyPr>
+          <a:lstStyle xmlns:a="http://schemas.openxmlformats.org/drawingml/2006/main"/>
+          <a:p xmlns:a="http://schemas.openxmlformats.org/drawingml/2006/main">
+            <a:pPr algn="r">
+              <a:defRPr sz="825" b="1">
+                <a:solidFill>
+                  <a:srgbClr val="71818D"/>
+                </a:solidFill>
+                <a:latin typeface="Avenir Next"/>
+                <a:ea typeface="Avenir Next"/>
+                <a:cs typeface="Avenir Next"/>
+              </a:defRPr>
+            </a:pPr>
+            <a:r>
+              <a:rPr sz="825" b="1">
+                <a:solidFill>
+                  <a:srgbClr val="71818D"/>
+                </a:solidFill>
+                <a:latin typeface="Avenir Next"/>
+                <a:ea typeface="Avenir Next"/>
+                <a:cs typeface="Avenir Next"/>
+              </a:rPr>
+              <a:t>11</a:t>
+            </a:r>
+          </a:p>
+        </p:txBody>
+      </p:sp>
+      <p:sp>
+        <p:nvSpPr>
+          <p:cNvPr id="7" name="left-column-label-11">
+            <a:extLst xmlns:a="http://schemas.openxmlformats.org/drawingml/2006/main">
+              <a:ext uri="{FF2B5EF4-FFF2-40B4-BE49-F238E27FC236}">
+                <a16:creationId xmlns:a16="http://schemas.microsoft.com/office/drawing/2014/main" id="{6E1B9298-2177-4D9E-A0C5-FDA6B89B482C}"/>
+              </a:ext>
+            </a:extLst>
+          </p:cNvPr>
+          <p:cNvSpPr>
+            <a:spLocks xmlns:a="http://schemas.openxmlformats.org/drawingml/2006/main" noGrp="1"/>
+          </p:cNvSpPr>
+          <p:nvPr/>
+        </p:nvSpPr>
+        <p:spPr>
+          <a:xfrm xmlns:a="http://schemas.openxmlformats.org/drawingml/2006/main">
+            <a:off x="609600" y="1657350"/>
+            <a:ext cx="5143500" cy="247650"/>
+          </a:xfrm>
+          <a:prstGeom xmlns:a="http://schemas.openxmlformats.org/drawingml/2006/main" prst="rect">
+            <a:avLst/>
+          </a:prstGeom>
+          <a:noFill xmlns:a="http://schemas.openxmlformats.org/drawingml/2006/main"/>
+          <a:ln xmlns:a="http://schemas.openxmlformats.org/drawingml/2006/main" w="0">
+            <a:noFill/>
+          </a:ln>
+        </p:spPr>
+        <p:txBody>
+          <a:bodyPr xmlns:a="http://schemas.openxmlformats.org/drawingml/2006/main" lIns="0" tIns="0" rIns="0" bIns="0" anchor="ctr">
+            <a:normAutofit fontScale="100000"/>
+          </a:bodyPr>
+          <a:lstStyle xmlns:a="http://schemas.openxmlformats.org/drawingml/2006/main"/>
+          <a:p xmlns:a="http://schemas.openxmlformats.org/drawingml/2006/main">
+            <a:pPr algn="l">
+              <a:defRPr sz="1050" b="1">
+                <a:solidFill>
+                  <a:srgbClr val="087D79"/>
+                </a:solidFill>
+                <a:latin typeface="Avenir Next"/>
+                <a:ea typeface="Avenir Next"/>
+                <a:cs typeface="Avenir Next"/>
+              </a:defRPr>
+            </a:pPr>
+            <a:r>
+              <a:rPr sz="1050" b="1">
+                <a:solidFill>
+                  <a:srgbClr val="087D79"/>
+                </a:solidFill>
+                <a:latin typeface="Avenir Next"/>
+                <a:ea typeface="Avenir Next"/>
+                <a:cs typeface="Avenir Next"/>
+              </a:rPr>
+              <a:t>[LEFT COLUMN LABEL]</a:t>
+            </a:r>
+          </a:p>
+        </p:txBody>
+      </p:sp>
+      <p:sp>
+        <p:nvSpPr>
+          <p:cNvPr id="8" name="right-column-label-11">
+            <a:extLst xmlns:a="http://schemas.openxmlformats.org/drawingml/2006/main">
+              <a:ext uri="{FF2B5EF4-FFF2-40B4-BE49-F238E27FC236}">
+                <a16:creationId xmlns:a16="http://schemas.microsoft.com/office/drawing/2014/main" id="{6A7E06CB-98F0-4A9A-955C-FEE9C0F2AE77}"/>
+              </a:ext>
+            </a:extLst>
+          </p:cNvPr>
+          <p:cNvSpPr>
+            <a:spLocks xmlns:a="http://schemas.openxmlformats.org/drawingml/2006/main" noGrp="1"/>
+          </p:cNvSpPr>
+          <p:nvPr/>
+        </p:nvSpPr>
+        <p:spPr>
+          <a:xfrm xmlns:a="http://schemas.openxmlformats.org/drawingml/2006/main">
+            <a:off x="6438900" y="1657350"/>
+            <a:ext cx="5143500" cy="247650"/>
+          </a:xfrm>
+          <a:prstGeom xmlns:a="http://schemas.openxmlformats.org/drawingml/2006/main" prst="rect">
+            <a:avLst/>
+          </a:prstGeom>
+          <a:noFill xmlns:a="http://schemas.openxmlformats.org/drawingml/2006/main"/>
+          <a:ln xmlns:a="http://schemas.openxmlformats.org/drawingml/2006/main" w="0">
+            <a:noFill/>
+          </a:ln>
+        </p:spPr>
+        <p:txBody>
+          <a:bodyPr xmlns:a="http://schemas.openxmlformats.org/drawingml/2006/main" lIns="0" tIns="0" rIns="0" bIns="0" anchor="ctr">
+            <a:normAutofit fontScale="100000"/>
+          </a:bodyPr>
+          <a:lstStyle xmlns:a="http://schemas.openxmlformats.org/drawingml/2006/main"/>
+          <a:p xmlns:a="http://schemas.openxmlformats.org/drawingml/2006/main">
+            <a:pPr algn="l">
+              <a:defRPr sz="1050" b="1">
+                <a:solidFill>
+                  <a:srgbClr val="087D79"/>
+                </a:solidFill>
+                <a:latin typeface="Avenir Next"/>
+                <a:ea typeface="Avenir Next"/>
+                <a:cs typeface="Avenir Next"/>
+              </a:defRPr>
+            </a:pPr>
+            <a:r>
+              <a:rPr sz="1050" b="1">
+                <a:solidFill>
+                  <a:srgbClr val="087D79"/>
+                </a:solidFill>
+                <a:latin typeface="Avenir Next"/>
+                <a:ea typeface="Avenir Next"/>
+                <a:cs typeface="Avenir Next"/>
+              </a:rPr>
+              <a:t>[RIGHT COLUMN LABEL]</a:t>
+            </a:r>
+          </a:p>
+        </p:txBody>
+      </p:sp>
+      <p:sp>
+        <p:nvSpPr>
+          <p:cNvPr id="9" name="comparison-picture-11">
+            <a:extLst xmlns:a="http://schemas.openxmlformats.org/drawingml/2006/main">
+              <a:ext uri="{FF2B5EF4-FFF2-40B4-BE49-F238E27FC236}">
+                <a16:creationId xmlns:a16="http://schemas.microsoft.com/office/drawing/2014/main" id="{CBCCE468-CAC4-45B7-BFBF-4C47651FA180}"/>
+              </a:ext>
+            </a:extLst>
+          </p:cNvPr>
+          <p:cNvSpPr>
+            <a:spLocks xmlns:a="http://schemas.openxmlformats.org/drawingml/2006/main" noGrp="1"/>
+          </p:cNvSpPr>
+          <p:nvPr/>
+        </p:nvSpPr>
+        <p:spPr>
+          <a:xfrm xmlns:a="http://schemas.openxmlformats.org/drawingml/2006/main">
+            <a:off x="609600" y="2009775"/>
+            <a:ext cx="5143500" cy="3829050"/>
+          </a:xfrm>
+          <a:prstGeom xmlns:a="http://schemas.openxmlformats.org/drawingml/2006/main" prst="rect">
+            <a:avLst/>
+          </a:prstGeom>
+          <a:solidFill xmlns:a="http://schemas.openxmlformats.org/drawingml/2006/main">
+            <a:srgbClr val="F1F4F5"/>
+          </a:solidFill>
+          <a:ln xmlns:a="http://schemas.openxmlformats.org/drawingml/2006/main" w="11906">
+            <a:solidFill>
+              <a:srgbClr val="B9C5CB"/>
+            </a:solidFill>
+            <a:prstDash val="solid"/>
+          </a:ln>
+        </p:spPr>
+        <p:txBody>
+          <a:bodyPr xmlns:a="http://schemas.openxmlformats.org/drawingml/2006/main" lIns="114300" tIns="114300" rIns="114300" bIns="114300" anchor="ctr">
+            <a:normAutofit fontScale="100000"/>
+          </a:bodyPr>
+          <a:lstStyle xmlns:a="http://schemas.openxmlformats.org/drawingml/2006/main"/>
+          <a:p xmlns:a="http://schemas.openxmlformats.org/drawingml/2006/main">
+            <a:pPr algn="ctr">
+              <a:defRPr sz="1200" b="1">
+                <a:solidFill>
+                  <a:srgbClr val="71818D"/>
+                </a:solidFill>
+                <a:latin typeface="Avenir Next"/>
+                <a:ea typeface="Avenir Next"/>
+                <a:cs typeface="Avenir Next"/>
+              </a:defRPr>
+            </a:pPr>
+            <a:r>
+              <a:rPr sz="1200" b="1">
+                <a:solidFill>
+                  <a:srgbClr val="71818D"/>
+                </a:solidFill>
+                <a:latin typeface="Avenir Next"/>
+                <a:ea typeface="Avenir Next"/>
+                <a:cs typeface="Avenir Next"/>
+              </a:rPr>
+              <a:t>[PICTURE / DIAGRAM]</a:t>
+            </a:r>
+          </a:p>
+        </p:txBody>
+      </p:sp>
+      <p:sp>
+        <p:nvSpPr>
+          <p:cNvPr id="10" name="comparison-divider-11">
+            <a:extLst xmlns:a="http://schemas.openxmlformats.org/drawingml/2006/main">
+              <a:ext uri="{FF2B5EF4-FFF2-40B4-BE49-F238E27FC236}">
+                <a16:creationId xmlns:a16="http://schemas.microsoft.com/office/drawing/2014/main" id="{C727DF1E-41EC-4799-8342-D1878FC22AB8}"/>
+              </a:ext>
+            </a:extLst>
+          </p:cNvPr>
+          <p:cNvSpPr>
+            <a:spLocks xmlns:a="http://schemas.openxmlformats.org/drawingml/2006/main" noGrp="1"/>
+          </p:cNvSpPr>
+          <p:nvPr/>
+        </p:nvSpPr>
+        <p:spPr>
+          <a:xfrm xmlns:a="http://schemas.openxmlformats.org/drawingml/2006/main">
+            <a:off x="6086475" y="1952625"/>
+            <a:ext cx="19050" cy="3943350"/>
+          </a:xfrm>
+          <a:prstGeom xmlns:a="http://schemas.openxmlformats.org/drawingml/2006/main" prst="rect">
+            <a:avLst/>
+          </a:prstGeom>
+          <a:solidFill xmlns:a="http://schemas.openxmlformats.org/drawingml/2006/main">
+            <a:srgbClr val="DDF3F0"/>
+          </a:solidFill>
+          <a:ln xmlns:a="http://schemas.openxmlformats.org/drawingml/2006/main" w="0">
+            <a:noFill/>
+          </a:ln>
+        </p:spPr>
+      </p:sp>
+      <p:sp>
+        <p:nvSpPr>
+          <p:cNvPr id="11" name="comparison-content-11">
+            <a:extLst xmlns:a="http://schemas.openxmlformats.org/drawingml/2006/main">
+              <a:ext uri="{FF2B5EF4-FFF2-40B4-BE49-F238E27FC236}">
+                <a16:creationId xmlns:a16="http://schemas.microsoft.com/office/drawing/2014/main" id="{88C51332-5DD8-4754-9513-F7DA25D66374}"/>
+              </a:ext>
+            </a:extLst>
+          </p:cNvPr>
+          <p:cNvSpPr>
+            <a:spLocks xmlns:a="http://schemas.openxmlformats.org/drawingml/2006/main" noGrp="1"/>
+          </p:cNvSpPr>
+          <p:nvPr/>
+        </p:nvSpPr>
+        <p:spPr>
+          <a:xfrm xmlns:a="http://schemas.openxmlformats.org/drawingml/2006/main">
+            <a:off x="6438900" y="2009775"/>
+            <a:ext cx="5143500" cy="3829050"/>
+          </a:xfrm>
+          <a:prstGeom xmlns:a="http://schemas.openxmlformats.org/drawingml/2006/main" prst="rect">
+            <a:avLst/>
+          </a:prstGeom>
+          <a:solidFill xmlns:a="http://schemas.openxmlformats.org/drawingml/2006/main">
+            <a:srgbClr val="FFFFFF"/>
+          </a:solidFill>
+          <a:ln xmlns:a="http://schemas.openxmlformats.org/drawingml/2006/main" w="11906">
+            <a:solidFill>
+              <a:srgbClr val="B9C5CB"/>
+            </a:solidFill>
+            <a:prstDash val="solid"/>
+          </a:ln>
+        </p:spPr>
+        <p:txBody>
+          <a:bodyPr xmlns:a="http://schemas.openxmlformats.org/drawingml/2006/main" lIns="114300" tIns="114300" rIns="114300" bIns="114300" anchor="ctr">
+            <a:normAutofit fontScale="100000"/>
+          </a:bodyPr>
+          <a:lstStyle xmlns:a="http://schemas.openxmlformats.org/drawingml/2006/main"/>
+          <a:p xmlns:a="http://schemas.openxmlformats.org/drawingml/2006/main">
+            <a:pPr algn="ctr">
+              <a:defRPr sz="1200" b="1">
+                <a:solidFill>
+                  <a:srgbClr val="71818D"/>
+                </a:solidFill>
+                <a:latin typeface="Avenir Next"/>
+                <a:ea typeface="Avenir Next"/>
+                <a:cs typeface="Avenir Next"/>
+              </a:defRPr>
+            </a:pPr>
+            <a:r>
+              <a:rPr sz="1200" b="1">
+                <a:solidFill>
+                  <a:srgbClr val="71818D"/>
+                </a:solidFill>
+                <a:latin typeface="Avenir Next"/>
+                <a:ea typeface="Avenir Next"/>
+                <a:cs typeface="Avenir Next"/>
+              </a:rPr>
+              <a:t>[COMPARISON TEXT / EVIDENCE]</a:t>
+            </a:r>
+          </a:p>
+        </p:txBody>
+      </p:sp>
+    </p:spTree>
+    <p:extLst>
+      <p:ext uri="{BB962C8B-B14F-4D97-AF65-F5344CB8AC3E}">
+        <p14:creationId xmlns:p14="http://schemas.microsoft.com/office/powerpoint/2010/main" val="1555550407"/>
+      </p:ext>
+    </p:extLst>
+  </p:cSld>
+</p:sld>
+</file>
+
+<file path=ppt/slides/slide12.xml><?xml version="1.0" encoding="utf-8"?>
+<p:sld xmlns:p="http://schemas.openxmlformats.org/presentationml/2006/main">
+  <p:cSld>
+    <p:bg>
+      <p:bgPr>
+        <a:solidFill xmlns:a="http://schemas.openxmlformats.org/drawingml/2006/main">
+          <a:srgbClr val="F8F9F7"/>
+        </a:solidFill>
+      </p:bgPr>
+    </p:bg>
+    <p:spTree>
+      <p:nvGrpSpPr>
+        <p:cNvPr id="1" name=""/>
+        <p:cNvGrpSpPr/>
+        <p:nvPr/>
+      </p:nvGrpSpPr>
+      <p:grpSpPr>
+        <a:xfrm xmlns:a="http://schemas.openxmlformats.org/drawingml/2006/main"/>
+      </p:grpSpPr>
+      <p:sp>
+        <p:nvSpPr>
+          <p:cNvPr id="9" name="top-accent-12">
+            <a:extLst xmlns:a="http://schemas.openxmlformats.org/drawingml/2006/main">
+              <a:ext uri="{FF2B5EF4-FFF2-40B4-BE49-F238E27FC236}">
+                <a16:creationId xmlns:a16="http://schemas.microsoft.com/office/drawing/2014/main" id="{E47D9201-4E94-4E97-9478-F7B0DFC3B27F}"/>
+              </a:ext>
+            </a:extLst>
+          </p:cNvPr>
+          <p:cNvSpPr>
+            <a:spLocks xmlns:a="http://schemas.openxmlformats.org/drawingml/2006/main" noGrp="1"/>
+          </p:cNvSpPr>
+          <p:nvPr/>
+        </p:nvSpPr>
+        <p:spPr>
+          <a:xfrm xmlns:a="http://schemas.openxmlformats.org/drawingml/2006/main">
+            <a:off x="0" y="0"/>
+            <a:ext cx="12192000" cy="76200"/>
+          </a:xfrm>
+          <a:prstGeom xmlns:a="http://schemas.openxmlformats.org/drawingml/2006/main" prst="rect">
+            <a:avLst/>
+          </a:prstGeom>
+          <a:solidFill xmlns:a="http://schemas.openxmlformats.org/drawingml/2006/main">
+            <a:srgbClr val="00A7A0"/>
+          </a:solidFill>
+          <a:ln xmlns:a="http://schemas.openxmlformats.org/drawingml/2006/main" w="0">
+            <a:noFill/>
+          </a:ln>
+        </p:spPr>
+      </p:sp>
+      <p:sp>
+        <p:nvSpPr>
+          <p:cNvPr id="2" name="section-label-12">
+            <a:extLst xmlns:a="http://schemas.openxmlformats.org/drawingml/2006/main">
+              <a:ext uri="{FF2B5EF4-FFF2-40B4-BE49-F238E27FC236}">
+                <a16:creationId xmlns:a16="http://schemas.microsoft.com/office/drawing/2014/main" id="{09BD38B2-1EA4-499B-84FC-745FEE90299E}"/>
+              </a:ext>
+            </a:extLst>
+          </p:cNvPr>
+          <p:cNvSpPr>
+            <a:spLocks xmlns:a="http://schemas.openxmlformats.org/drawingml/2006/main" noGrp="1"/>
+          </p:cNvSpPr>
+          <p:nvPr/>
+        </p:nvSpPr>
+        <p:spPr>
+          <a:xfrm xmlns:a="http://schemas.openxmlformats.org/drawingml/2006/main">
+            <a:off x="609600" y="285750"/>
+            <a:ext cx="6858000" cy="209550"/>
+          </a:xfrm>
+          <a:prstGeom xmlns:a="http://schemas.openxmlformats.org/drawingml/2006/main" prst="rect">
+            <a:avLst/>
+          </a:prstGeom>
+          <a:noFill xmlns:a="http://schemas.openxmlformats.org/drawingml/2006/main"/>
+          <a:ln xmlns:a="http://schemas.openxmlformats.org/drawingml/2006/main" w="0">
+            <a:noFill/>
+          </a:ln>
+        </p:spPr>
+        <p:txBody>
+          <a:bodyPr xmlns:a="http://schemas.openxmlformats.org/drawingml/2006/main" lIns="0" tIns="0" rIns="0" bIns="0" anchor="ctr">
+            <a:normAutofit fontScale="100000"/>
+          </a:bodyPr>
+          <a:lstStyle xmlns:a="http://schemas.openxmlformats.org/drawingml/2006/main"/>
+          <a:p xmlns:a="http://schemas.openxmlformats.org/drawingml/2006/main">
+            <a:pPr algn="l">
+              <a:defRPr sz="975" b="1">
+                <a:solidFill>
+                  <a:srgbClr val="087D79"/>
+                </a:solidFill>
+                <a:latin typeface="Avenir Next"/>
+                <a:ea typeface="Avenir Next"/>
+                <a:cs typeface="Avenir Next"/>
+              </a:defRPr>
+            </a:pPr>
+            <a:r>
+              <a:rPr sz="975" b="1">
+                <a:solidFill>
+                  <a:srgbClr val="087D79"/>
+                </a:solidFill>
+                <a:latin typeface="Avenir Next"/>
+                <a:ea typeface="Avenir Next"/>
+                <a:cs typeface="Avenir Next"/>
+              </a:rPr>
+              <a:t>[SECTION LABEL]</a:t>
+            </a:r>
+          </a:p>
+        </p:txBody>
+      </p:sp>
+      <p:sp>
+        <p:nvSpPr>
+          <p:cNvPr id="3" name="title-12">
+            <a:extLst xmlns:a="http://schemas.openxmlformats.org/drawingml/2006/main">
+              <a:ext uri="{FF2B5EF4-FFF2-40B4-BE49-F238E27FC236}">
+                <a16:creationId xmlns:a16="http://schemas.microsoft.com/office/drawing/2014/main" id="{CA39A009-C5C6-4AB3-AD75-AE094A4E34C8}"/>
+              </a:ext>
+            </a:extLst>
+          </p:cNvPr>
+          <p:cNvSpPr>
+            <a:spLocks xmlns:a="http://schemas.openxmlformats.org/drawingml/2006/main" noGrp="1"/>
+          </p:cNvSpPr>
+          <p:nvPr/>
+        </p:nvSpPr>
+        <p:spPr>
+          <a:xfrm xmlns:a="http://schemas.openxmlformats.org/drawingml/2006/main">
+            <a:off x="609600" y="561975"/>
+            <a:ext cx="10972800" cy="514350"/>
+          </a:xfrm>
+          <a:prstGeom xmlns:a="http://schemas.openxmlformats.org/drawingml/2006/main" prst="rect">
+            <a:avLst/>
+          </a:prstGeom>
+          <a:noFill xmlns:a="http://schemas.openxmlformats.org/drawingml/2006/main"/>
+          <a:ln xmlns:a="http://schemas.openxmlformats.org/drawingml/2006/main" w="0">
+            <a:noFill/>
+          </a:ln>
+        </p:spPr>
+        <p:txBody>
+          <a:bodyPr xmlns:a="http://schemas.openxmlformats.org/drawingml/2006/main" lIns="0" tIns="0" rIns="0" bIns="0" anchor="ctr">
+            <a:normAutofit fontScale="100000"/>
+          </a:bodyPr>
+          <a:lstStyle xmlns:a="http://schemas.openxmlformats.org/drawingml/2006/main"/>
+          <a:p xmlns:a="http://schemas.openxmlformats.org/drawingml/2006/main">
+            <a:pPr algn="l">
+              <a:defRPr sz="2625" b="1">
+                <a:solidFill>
+                  <a:srgbClr val="102638"/>
+                </a:solidFill>
+                <a:latin typeface="Avenir Next"/>
+                <a:ea typeface="Avenir Next"/>
+                <a:cs typeface="Avenir Next"/>
+              </a:defRPr>
+            </a:pPr>
+            <a:r>
+              <a:rPr sz="2625" b="1">
+                <a:solidFill>
+                  <a:srgbClr val="102638"/>
+                </a:solidFill>
+                <a:latin typeface="Avenir Next"/>
+                <a:ea typeface="Avenir Next"/>
+                <a:cs typeface="Avenir Next"/>
+              </a:rPr>
+              <a:t>[SLIDE TITLE]</a:t>
+            </a:r>
+          </a:p>
+        </p:txBody>
+      </p:sp>
+      <p:sp>
+        <p:nvSpPr>
+          <p:cNvPr id="4" name="subtitle-12">
+            <a:extLst xmlns:a="http://schemas.openxmlformats.org/drawingml/2006/main">
+              <a:ext uri="{FF2B5EF4-FFF2-40B4-BE49-F238E27FC236}">
+                <a16:creationId xmlns:a16="http://schemas.microsoft.com/office/drawing/2014/main" id="{CFDEE49D-75E0-4E61-AE75-791F21FDD780}"/>
+              </a:ext>
+            </a:extLst>
+          </p:cNvPr>
+          <p:cNvSpPr>
+            <a:spLocks xmlns:a="http://schemas.openxmlformats.org/drawingml/2006/main" noGrp="1"/>
+          </p:cNvSpPr>
+          <p:nvPr/>
+        </p:nvSpPr>
+        <p:spPr>
+          <a:xfrm xmlns:a="http://schemas.openxmlformats.org/drawingml/2006/main">
+            <a:off x="609600" y="1085850"/>
+            <a:ext cx="10668000" cy="304800"/>
+          </a:xfrm>
+          <a:prstGeom xmlns:a="http://schemas.openxmlformats.org/drawingml/2006/main" prst="rect">
+            <a:avLst/>
+          </a:prstGeom>
+          <a:noFill xmlns:a="http://schemas.openxmlformats.org/drawingml/2006/main"/>
+          <a:ln xmlns:a="http://schemas.openxmlformats.org/drawingml/2006/main" w="0">
+            <a:noFill/>
+          </a:ln>
+        </p:spPr>
+        <p:txBody>
+          <a:bodyPr xmlns:a="http://schemas.openxmlformats.org/drawingml/2006/main" lIns="0" tIns="0" rIns="0" bIns="0" anchor="ctr">
+            <a:normAutofit fontScale="100000"/>
+          </a:bodyPr>
+          <a:lstStyle xmlns:a="http://schemas.openxmlformats.org/drawingml/2006/main"/>
+          <a:p xmlns:a="http://schemas.openxmlformats.org/drawingml/2006/main">
+            <a:pPr algn="l">
+              <a:defRPr sz="1350" b="0">
+                <a:solidFill>
+                  <a:srgbClr val="4E6170"/>
+                </a:solidFill>
+                <a:latin typeface="Avenir Next"/>
+                <a:ea typeface="Avenir Next"/>
+                <a:cs typeface="Avenir Next"/>
+              </a:defRPr>
+            </a:pPr>
+            <a:r>
+              <a:rPr sz="1350" b="0">
+                <a:solidFill>
+                  <a:srgbClr val="4E6170"/>
+                </a:solidFill>
+                <a:latin typeface="Avenir Next"/>
+                <a:ea typeface="Avenir Next"/>
+                <a:cs typeface="Avenir Next"/>
+              </a:rPr>
+              <a:t>[Subtitle or context]</a:t>
+            </a:r>
+          </a:p>
+        </p:txBody>
+      </p:sp>
+      <p:sp>
+        <p:nvSpPr>
+          <p:cNvPr id="5" name="footer-rule-12">
+            <a:extLst xmlns:a="http://schemas.openxmlformats.org/drawingml/2006/main">
+              <a:ext uri="{FF2B5EF4-FFF2-40B4-BE49-F238E27FC236}">
+                <a16:creationId xmlns:a16="http://schemas.microsoft.com/office/drawing/2014/main" id="{2DDB7B7E-EA4D-4FC5-ADD8-572C49BABDFB}"/>
+              </a:ext>
+            </a:extLst>
+          </p:cNvPr>
+          <p:cNvSpPr>
+            <a:spLocks xmlns:a="http://schemas.openxmlformats.org/drawingml/2006/main" noGrp="1"/>
+          </p:cNvSpPr>
+          <p:nvPr/>
+        </p:nvSpPr>
+        <p:spPr>
+          <a:xfrm xmlns:a="http://schemas.openxmlformats.org/drawingml/2006/main">
+            <a:off x="609600" y="6457950"/>
+            <a:ext cx="10972800" cy="9525"/>
+          </a:xfrm>
+          <a:prstGeom xmlns:a="http://schemas.openxmlformats.org/drawingml/2006/main" prst="rect">
+            <a:avLst/>
+          </a:prstGeom>
+          <a:solidFill xmlns:a="http://schemas.openxmlformats.org/drawingml/2006/main">
+            <a:srgbClr val="E4EAED"/>
+          </a:solidFill>
+          <a:ln xmlns:a="http://schemas.openxmlformats.org/drawingml/2006/main" w="0">
+            <a:noFill/>
+          </a:ln>
+        </p:spPr>
+      </p:sp>
+      <p:sp>
+        <p:nvSpPr>
+          <p:cNvPr id="6" name="page-12">
+            <a:extLst xmlns:a="http://schemas.openxmlformats.org/drawingml/2006/main">
+              <a:ext uri="{FF2B5EF4-FFF2-40B4-BE49-F238E27FC236}">
+                <a16:creationId xmlns:a16="http://schemas.microsoft.com/office/drawing/2014/main" id="{400651CF-5135-4446-A9F0-D36B531974F7}"/>
+              </a:ext>
+            </a:extLst>
+          </p:cNvPr>
+          <p:cNvSpPr>
+            <a:spLocks xmlns:a="http://schemas.openxmlformats.org/drawingml/2006/main" noGrp="1"/>
+          </p:cNvSpPr>
+          <p:nvPr/>
+        </p:nvSpPr>
+        <p:spPr>
+          <a:xfrm xmlns:a="http://schemas.openxmlformats.org/drawingml/2006/main">
+            <a:off x="11144250" y="6515100"/>
+            <a:ext cx="438150" cy="171450"/>
+          </a:xfrm>
+          <a:prstGeom xmlns:a="http://schemas.openxmlformats.org/drawingml/2006/main" prst="rect">
+            <a:avLst/>
+          </a:prstGeom>
+          <a:noFill xmlns:a="http://schemas.openxmlformats.org/drawingml/2006/main"/>
+          <a:ln xmlns:a="http://schemas.openxmlformats.org/drawingml/2006/main" w="0">
+            <a:noFill/>
+          </a:ln>
+        </p:spPr>
+        <p:txBody>
+          <a:bodyPr xmlns:a="http://schemas.openxmlformats.org/drawingml/2006/main" lIns="0" tIns="0" rIns="0" bIns="0" anchor="ctr">
+            <a:normAutofit fontScale="100000"/>
+          </a:bodyPr>
+          <a:lstStyle xmlns:a="http://schemas.openxmlformats.org/drawingml/2006/main"/>
+          <a:p xmlns:a="http://schemas.openxmlformats.org/drawingml/2006/main">
+            <a:pPr algn="r">
+              <a:defRPr sz="825" b="1">
+                <a:solidFill>
+                  <a:srgbClr val="71818D"/>
+                </a:solidFill>
+                <a:latin typeface="Avenir Next"/>
+                <a:ea typeface="Avenir Next"/>
+                <a:cs typeface="Avenir Next"/>
+              </a:defRPr>
+            </a:pPr>
+            <a:r>
+              <a:rPr sz="825" b="1">
+                <a:solidFill>
+                  <a:srgbClr val="71818D"/>
+                </a:solidFill>
+                <a:latin typeface="Avenir Next"/>
+                <a:ea typeface="Avenir Next"/>
+                <a:cs typeface="Avenir Next"/>
+              </a:rPr>
+              <a:t>12</a:t>
+            </a:r>
+          </a:p>
+        </p:txBody>
+      </p:sp>
+      <p:sp>
+        <p:nvSpPr>
+          <p:cNvPr id="7" name="primary-chart-12">
+            <a:extLst xmlns:a="http://schemas.openxmlformats.org/drawingml/2006/main">
+              <a:ext uri="{FF2B5EF4-FFF2-40B4-BE49-F238E27FC236}">
+                <a16:creationId xmlns:a16="http://schemas.microsoft.com/office/drawing/2014/main" id="{A20DCC82-DE5D-4542-8A42-191718FD1841}"/>
+              </a:ext>
+            </a:extLst>
+          </p:cNvPr>
+          <p:cNvSpPr>
+            <a:spLocks xmlns:a="http://schemas.openxmlformats.org/drawingml/2006/main" noGrp="1"/>
+          </p:cNvSpPr>
+          <p:nvPr/>
+        </p:nvSpPr>
+        <p:spPr>
+          <a:xfrm xmlns:a="http://schemas.openxmlformats.org/drawingml/2006/main">
+            <a:off x="609600" y="1714500"/>
+            <a:ext cx="7810500" cy="4114800"/>
+          </a:xfrm>
+          <a:prstGeom xmlns:a="http://schemas.openxmlformats.org/drawingml/2006/main" prst="rect">
+            <a:avLst/>
+          </a:prstGeom>
+          <a:solidFill xmlns:a="http://schemas.openxmlformats.org/drawingml/2006/main">
+            <a:srgbClr val="FFFFFF"/>
+          </a:solidFill>
+          <a:ln xmlns:a="http://schemas.openxmlformats.org/drawingml/2006/main" w="11906">
+            <a:solidFill>
+              <a:srgbClr val="B9C5CB"/>
+            </a:solidFill>
+            <a:prstDash val="solid"/>
+          </a:ln>
+        </p:spPr>
+        <p:txBody>
+          <a:bodyPr xmlns:a="http://schemas.openxmlformats.org/drawingml/2006/main" lIns="114300" tIns="114300" rIns="114300" bIns="114300" anchor="ctr">
+            <a:normAutofit fontScale="100000"/>
+          </a:bodyPr>
+          <a:lstStyle xmlns:a="http://schemas.openxmlformats.org/drawingml/2006/main"/>
+          <a:p xmlns:a="http://schemas.openxmlformats.org/drawingml/2006/main">
+            <a:pPr algn="ctr">
+              <a:defRPr sz="1350" b="1">
+                <a:solidFill>
+                  <a:srgbClr val="71818D"/>
+                </a:solidFill>
+                <a:latin typeface="Avenir Next"/>
+                <a:ea typeface="Avenir Next"/>
+                <a:cs typeface="Avenir Next"/>
+              </a:defRPr>
+            </a:pPr>
+            <a:r>
+              <a:rPr sz="1350" b="1">
+                <a:solidFill>
+                  <a:srgbClr val="71818D"/>
+                </a:solidFill>
+                <a:latin typeface="Avenir Next"/>
+                <a:ea typeface="Avenir Next"/>
+                <a:cs typeface="Avenir Next"/>
+              </a:rPr>
+              <a:t>[PRIMARY CHART]</a:t>
+            </a:r>
+          </a:p>
+        </p:txBody>
+      </p:sp>
+      <p:sp>
+        <p:nvSpPr>
+          <p:cNvPr id="8" name="insight-sidebar-12">
+            <a:extLst xmlns:a="http://schemas.openxmlformats.org/drawingml/2006/main">
+              <a:ext uri="{FF2B5EF4-FFF2-40B4-BE49-F238E27FC236}">
+                <a16:creationId xmlns:a16="http://schemas.microsoft.com/office/drawing/2014/main" id="{0D9C17F1-2E22-48FB-92D9-36D3C614A572}"/>
+              </a:ext>
+            </a:extLst>
+          </p:cNvPr>
+          <p:cNvSpPr>
+            <a:spLocks xmlns:a="http://schemas.openxmlformats.org/drawingml/2006/main" noGrp="1"/>
+          </p:cNvSpPr>
+          <p:nvPr/>
+        </p:nvSpPr>
+        <p:spPr>
+          <a:xfrm xmlns:a="http://schemas.openxmlformats.org/drawingml/2006/main">
+            <a:off x="8763000" y="1714500"/>
+            <a:ext cx="2819400" cy="4114800"/>
+          </a:xfrm>
+          <a:prstGeom xmlns:a="http://schemas.openxmlformats.org/drawingml/2006/main" prst="rect">
+            <a:avLst/>
+          </a:prstGeom>
+          <a:solidFill xmlns:a="http://schemas.openxmlformats.org/drawingml/2006/main">
+            <a:srgbClr val="DDF3F0"/>
+          </a:solidFill>
+          <a:ln xmlns:a="http://schemas.openxmlformats.org/drawingml/2006/main" w="11906">
+            <a:solidFill>
+              <a:srgbClr val="00A7A0"/>
+            </a:solidFill>
+            <a:prstDash val="solid"/>
+          </a:ln>
+        </p:spPr>
+        <p:txBody>
+          <a:bodyPr xmlns:a="http://schemas.openxmlformats.org/drawingml/2006/main" lIns="114300" tIns="114300" rIns="114300" bIns="114300" anchor="ctr">
+            <a:normAutofit fontScale="100000"/>
+          </a:bodyPr>
+          <a:lstStyle xmlns:a="http://schemas.openxmlformats.org/drawingml/2006/main"/>
+          <a:p xmlns:a="http://schemas.openxmlformats.org/drawingml/2006/main">
+            <a:pPr algn="ctr">
+              <a:defRPr sz="1275" b="1">
+                <a:solidFill>
+                  <a:srgbClr val="087D79"/>
+                </a:solidFill>
+                <a:latin typeface="Avenir Next"/>
+                <a:ea typeface="Avenir Next"/>
+                <a:cs typeface="Avenir Next"/>
+              </a:defRPr>
+            </a:pPr>
+            <a:r>
+              <a:rPr sz="1275" b="1">
+                <a:solidFill>
+                  <a:srgbClr val="087D79"/>
+                </a:solidFill>
+                <a:latin typeface="Avenir Next"/>
+                <a:ea typeface="Avenir Next"/>
+                <a:cs typeface="Avenir Next"/>
+              </a:rPr>
+              <a:t>[INSIGHT / ANNOTATION]</a:t>
+            </a:r>
+          </a:p>
+        </p:txBody>
+      </p:sp>
+    </p:spTree>
+    <p:extLst>
+      <p:ext uri="{BB962C8B-B14F-4D97-AF65-F5344CB8AC3E}">
+        <p14:creationId xmlns:p14="http://schemas.microsoft.com/office/powerpoint/2010/main" val="1687742115"/>
+      </p:ext>
+    </p:extLst>
+  </p:cSld>
+</p:sld>
+</file>
+
+<file path=ppt/slides/slide13.xml><?xml version="1.0" encoding="utf-8"?>
+<p:sld xmlns:p="http://schemas.openxmlformats.org/presentationml/2006/main">
+  <p:cSld>
+    <p:bg>
+      <p:bgPr>
+        <a:solidFill xmlns:a="http://schemas.openxmlformats.org/drawingml/2006/main">
+          <a:srgbClr val="F8F9F7"/>
+        </a:solidFill>
+      </p:bgPr>
+    </p:bg>
+    <p:spTree>
+      <p:nvGrpSpPr>
+        <p:cNvPr id="1" name=""/>
+        <p:cNvGrpSpPr/>
+        <p:nvPr/>
+      </p:nvGrpSpPr>
+      <p:grpSpPr>
+        <a:xfrm xmlns:a="http://schemas.openxmlformats.org/drawingml/2006/main"/>
+      </p:grpSpPr>
+      <p:sp>
+        <p:nvSpPr>
+          <p:cNvPr id="11" name="top-accent-13">
+            <a:extLst xmlns:a="http://schemas.openxmlformats.org/drawingml/2006/main">
+              <a:ext uri="{FF2B5EF4-FFF2-40B4-BE49-F238E27FC236}">
+                <a16:creationId xmlns:a16="http://schemas.microsoft.com/office/drawing/2014/main" id="{9A8490D5-F53B-46AD-AD72-AC9988D09038}"/>
+              </a:ext>
+            </a:extLst>
+          </p:cNvPr>
+          <p:cNvSpPr>
+            <a:spLocks xmlns:a="http://schemas.openxmlformats.org/drawingml/2006/main" noGrp="1"/>
+          </p:cNvSpPr>
+          <p:nvPr/>
+        </p:nvSpPr>
+        <p:spPr>
+          <a:xfrm xmlns:a="http://schemas.openxmlformats.org/drawingml/2006/main">
+            <a:off x="0" y="0"/>
+            <a:ext cx="12192000" cy="76200"/>
+          </a:xfrm>
+          <a:prstGeom xmlns:a="http://schemas.openxmlformats.org/drawingml/2006/main" prst="rect">
+            <a:avLst/>
+          </a:prstGeom>
+          <a:solidFill xmlns:a="http://schemas.openxmlformats.org/drawingml/2006/main">
+            <a:srgbClr val="00A7A0"/>
+          </a:solidFill>
+          <a:ln xmlns:a="http://schemas.openxmlformats.org/drawingml/2006/main" w="0">
+            <a:noFill/>
+          </a:ln>
+        </p:spPr>
+      </p:sp>
+      <p:sp>
+        <p:nvSpPr>
+          <p:cNvPr id="2" name="section-label-13">
+            <a:extLst xmlns:a="http://schemas.openxmlformats.org/drawingml/2006/main">
+              <a:ext uri="{FF2B5EF4-FFF2-40B4-BE49-F238E27FC236}">
+                <a16:creationId xmlns:a16="http://schemas.microsoft.com/office/drawing/2014/main" id="{8345AF41-0925-45BA-8584-061B3A3E6C31}"/>
+              </a:ext>
+            </a:extLst>
+          </p:cNvPr>
+          <p:cNvSpPr>
+            <a:spLocks xmlns:a="http://schemas.openxmlformats.org/drawingml/2006/main" noGrp="1"/>
+          </p:cNvSpPr>
+          <p:nvPr/>
+        </p:nvSpPr>
+        <p:spPr>
+          <a:xfrm xmlns:a="http://schemas.openxmlformats.org/drawingml/2006/main">
+            <a:off x="609600" y="285750"/>
+            <a:ext cx="6858000" cy="209550"/>
+          </a:xfrm>
+          <a:prstGeom xmlns:a="http://schemas.openxmlformats.org/drawingml/2006/main" prst="rect">
+            <a:avLst/>
+          </a:prstGeom>
+          <a:noFill xmlns:a="http://schemas.openxmlformats.org/drawingml/2006/main"/>
+          <a:ln xmlns:a="http://schemas.openxmlformats.org/drawingml/2006/main" w="0">
+            <a:noFill/>
+          </a:ln>
+        </p:spPr>
+        <p:txBody>
+          <a:bodyPr xmlns:a="http://schemas.openxmlformats.org/drawingml/2006/main" lIns="0" tIns="0" rIns="0" bIns="0" anchor="ctr">
+            <a:normAutofit fontScale="100000"/>
+          </a:bodyPr>
+          <a:lstStyle xmlns:a="http://schemas.openxmlformats.org/drawingml/2006/main"/>
+          <a:p xmlns:a="http://schemas.openxmlformats.org/drawingml/2006/main">
+            <a:pPr algn="l">
+              <a:defRPr sz="975" b="1">
+                <a:solidFill>
+                  <a:srgbClr val="087D79"/>
+                </a:solidFill>
+                <a:latin typeface="Avenir Next"/>
+                <a:ea typeface="Avenir Next"/>
+                <a:cs typeface="Avenir Next"/>
+              </a:defRPr>
+            </a:pPr>
+            <a:r>
+              <a:rPr sz="975" b="1">
+                <a:solidFill>
+                  <a:srgbClr val="087D79"/>
+                </a:solidFill>
+                <a:latin typeface="Avenir Next"/>
+                <a:ea typeface="Avenir Next"/>
+                <a:cs typeface="Avenir Next"/>
+              </a:rPr>
+              <a:t>[SECTION LABEL]</a:t>
+            </a:r>
+          </a:p>
+        </p:txBody>
+      </p:sp>
+      <p:sp>
+        <p:nvSpPr>
+          <p:cNvPr id="3" name="title-13">
+            <a:extLst xmlns:a="http://schemas.openxmlformats.org/drawingml/2006/main">
+              <a:ext uri="{FF2B5EF4-FFF2-40B4-BE49-F238E27FC236}">
+                <a16:creationId xmlns:a16="http://schemas.microsoft.com/office/drawing/2014/main" id="{D002AD80-6793-497B-8AC9-63DA9C3E3381}"/>
+              </a:ext>
+            </a:extLst>
+          </p:cNvPr>
+          <p:cNvSpPr>
+            <a:spLocks xmlns:a="http://schemas.openxmlformats.org/drawingml/2006/main" noGrp="1"/>
+          </p:cNvSpPr>
+          <p:nvPr/>
+        </p:nvSpPr>
+        <p:spPr>
+          <a:xfrm xmlns:a="http://schemas.openxmlformats.org/drawingml/2006/main">
+            <a:off x="609600" y="561975"/>
+            <a:ext cx="10972800" cy="514350"/>
+          </a:xfrm>
+          <a:prstGeom xmlns:a="http://schemas.openxmlformats.org/drawingml/2006/main" prst="rect">
+            <a:avLst/>
+          </a:prstGeom>
+          <a:noFill xmlns:a="http://schemas.openxmlformats.org/drawingml/2006/main"/>
+          <a:ln xmlns:a="http://schemas.openxmlformats.org/drawingml/2006/main" w="0">
+            <a:noFill/>
+          </a:ln>
+        </p:spPr>
+        <p:txBody>
+          <a:bodyPr xmlns:a="http://schemas.openxmlformats.org/drawingml/2006/main" lIns="0" tIns="0" rIns="0" bIns="0" anchor="ctr">
+            <a:normAutofit fontScale="100000"/>
+          </a:bodyPr>
+          <a:lstStyle xmlns:a="http://schemas.openxmlformats.org/drawingml/2006/main"/>
+          <a:p xmlns:a="http://schemas.openxmlformats.org/drawingml/2006/main">
+            <a:pPr algn="l">
+              <a:defRPr sz="2625" b="1">
+                <a:solidFill>
+                  <a:srgbClr val="102638"/>
+                </a:solidFill>
+                <a:latin typeface="Avenir Next"/>
+                <a:ea typeface="Avenir Next"/>
+                <a:cs typeface="Avenir Next"/>
+              </a:defRPr>
+            </a:pPr>
+            <a:r>
+              <a:rPr sz="2625" b="1">
+                <a:solidFill>
+                  <a:srgbClr val="102638"/>
+                </a:solidFill>
+                <a:latin typeface="Avenir Next"/>
+                <a:ea typeface="Avenir Next"/>
+                <a:cs typeface="Avenir Next"/>
+              </a:rPr>
+              <a:t>[SLIDE TITLE]</a:t>
+            </a:r>
+          </a:p>
+        </p:txBody>
+      </p:sp>
+      <p:sp>
+        <p:nvSpPr>
+          <p:cNvPr id="4" name="subtitle-13">
+            <a:extLst xmlns:a="http://schemas.openxmlformats.org/drawingml/2006/main">
+              <a:ext uri="{FF2B5EF4-FFF2-40B4-BE49-F238E27FC236}">
+                <a16:creationId xmlns:a16="http://schemas.microsoft.com/office/drawing/2014/main" id="{E669F6C0-F9AD-4827-9E09-3445CD929435}"/>
+              </a:ext>
+            </a:extLst>
+          </p:cNvPr>
+          <p:cNvSpPr>
+            <a:spLocks xmlns:a="http://schemas.openxmlformats.org/drawingml/2006/main" noGrp="1"/>
+          </p:cNvSpPr>
+          <p:nvPr/>
+        </p:nvSpPr>
+        <p:spPr>
+          <a:xfrm xmlns:a="http://schemas.openxmlformats.org/drawingml/2006/main">
+            <a:off x="609600" y="1085850"/>
+            <a:ext cx="10668000" cy="304800"/>
+          </a:xfrm>
+          <a:prstGeom xmlns:a="http://schemas.openxmlformats.org/drawingml/2006/main" prst="rect">
+            <a:avLst/>
+          </a:prstGeom>
+          <a:noFill xmlns:a="http://schemas.openxmlformats.org/drawingml/2006/main"/>
+          <a:ln xmlns:a="http://schemas.openxmlformats.org/drawingml/2006/main" w="0">
+            <a:noFill/>
+          </a:ln>
+        </p:spPr>
+        <p:txBody>
+          <a:bodyPr xmlns:a="http://schemas.openxmlformats.org/drawingml/2006/main" lIns="0" tIns="0" rIns="0" bIns="0" anchor="ctr">
+            <a:normAutofit fontScale="100000"/>
+          </a:bodyPr>
+          <a:lstStyle xmlns:a="http://schemas.openxmlformats.org/drawingml/2006/main"/>
+          <a:p xmlns:a="http://schemas.openxmlformats.org/drawingml/2006/main">
+            <a:pPr algn="l">
+              <a:defRPr sz="1350" b="0">
+                <a:solidFill>
+                  <a:srgbClr val="4E6170"/>
+                </a:solidFill>
+                <a:latin typeface="Avenir Next"/>
+                <a:ea typeface="Avenir Next"/>
+                <a:cs typeface="Avenir Next"/>
+              </a:defRPr>
+            </a:pPr>
+            <a:r>
+              <a:rPr sz="1350" b="0">
+                <a:solidFill>
+                  <a:srgbClr val="4E6170"/>
+                </a:solidFill>
+                <a:latin typeface="Avenir Next"/>
+                <a:ea typeface="Avenir Next"/>
+                <a:cs typeface="Avenir Next"/>
+              </a:rPr>
+              <a:t>[Subtitle or context]</a:t>
+            </a:r>
+          </a:p>
+        </p:txBody>
+      </p:sp>
+      <p:sp>
+        <p:nvSpPr>
+          <p:cNvPr id="5" name="footer-rule-13">
+            <a:extLst xmlns:a="http://schemas.openxmlformats.org/drawingml/2006/main">
+              <a:ext uri="{FF2B5EF4-FFF2-40B4-BE49-F238E27FC236}">
+                <a16:creationId xmlns:a16="http://schemas.microsoft.com/office/drawing/2014/main" id="{2C0D6E2F-94A2-4A6B-AC6B-903508C1B3C5}"/>
+              </a:ext>
+            </a:extLst>
+          </p:cNvPr>
+          <p:cNvSpPr>
+            <a:spLocks xmlns:a="http://schemas.openxmlformats.org/drawingml/2006/main" noGrp="1"/>
+          </p:cNvSpPr>
+          <p:nvPr/>
+        </p:nvSpPr>
+        <p:spPr>
+          <a:xfrm xmlns:a="http://schemas.openxmlformats.org/drawingml/2006/main">
+            <a:off x="609600" y="6457950"/>
+            <a:ext cx="10972800" cy="9525"/>
+          </a:xfrm>
+          <a:prstGeom xmlns:a="http://schemas.openxmlformats.org/drawingml/2006/main" prst="rect">
+            <a:avLst/>
+          </a:prstGeom>
+          <a:solidFill xmlns:a="http://schemas.openxmlformats.org/drawingml/2006/main">
+            <a:srgbClr val="E4EAED"/>
+          </a:solidFill>
+          <a:ln xmlns:a="http://schemas.openxmlformats.org/drawingml/2006/main" w="0">
+            <a:noFill/>
+          </a:ln>
+        </p:spPr>
+      </p:sp>
+      <p:sp>
+        <p:nvSpPr>
+          <p:cNvPr id="6" name="page-13">
+            <a:extLst xmlns:a="http://schemas.openxmlformats.org/drawingml/2006/main">
+              <a:ext uri="{FF2B5EF4-FFF2-40B4-BE49-F238E27FC236}">
+                <a16:creationId xmlns:a16="http://schemas.microsoft.com/office/drawing/2014/main" id="{5E9EDAF1-3C1E-46AA-A5D3-535A6BE847FF}"/>
+              </a:ext>
+            </a:extLst>
+          </p:cNvPr>
+          <p:cNvSpPr>
+            <a:spLocks xmlns:a="http://schemas.openxmlformats.org/drawingml/2006/main" noGrp="1"/>
+          </p:cNvSpPr>
+          <p:nvPr/>
+        </p:nvSpPr>
+        <p:spPr>
+          <a:xfrm xmlns:a="http://schemas.openxmlformats.org/drawingml/2006/main">
+            <a:off x="11144250" y="6515100"/>
+            <a:ext cx="438150" cy="171450"/>
+          </a:xfrm>
+          <a:prstGeom xmlns:a="http://schemas.openxmlformats.org/drawingml/2006/main" prst="rect">
+            <a:avLst/>
+          </a:prstGeom>
+          <a:noFill xmlns:a="http://schemas.openxmlformats.org/drawingml/2006/main"/>
+          <a:ln xmlns:a="http://schemas.openxmlformats.org/drawingml/2006/main" w="0">
+            <a:noFill/>
+          </a:ln>
+        </p:spPr>
+        <p:txBody>
+          <a:bodyPr xmlns:a="http://schemas.openxmlformats.org/drawingml/2006/main" lIns="0" tIns="0" rIns="0" bIns="0" anchor="ctr">
+            <a:normAutofit fontScale="100000"/>
+          </a:bodyPr>
+          <a:lstStyle xmlns:a="http://schemas.openxmlformats.org/drawingml/2006/main"/>
+          <a:p xmlns:a="http://schemas.openxmlformats.org/drawingml/2006/main">
+            <a:pPr algn="r">
+              <a:defRPr sz="825" b="1">
+                <a:solidFill>
+                  <a:srgbClr val="71818D"/>
+                </a:solidFill>
+                <a:latin typeface="Avenir Next"/>
+                <a:ea typeface="Avenir Next"/>
+                <a:cs typeface="Avenir Next"/>
+              </a:defRPr>
+            </a:pPr>
+            <a:r>
+              <a:rPr sz="825" b="1">
+                <a:solidFill>
+                  <a:srgbClr val="71818D"/>
+                </a:solidFill>
+                <a:latin typeface="Avenir Next"/>
+                <a:ea typeface="Avenir Next"/>
+                <a:cs typeface="Avenir Next"/>
+              </a:rPr>
+              <a:t>13</a:t>
+            </a:r>
+          </a:p>
+        </p:txBody>
+      </p:sp>
+      <p:sp>
+        <p:nvSpPr>
+          <p:cNvPr id="7" name="wide-chart-13">
+            <a:extLst xmlns:a="http://schemas.openxmlformats.org/drawingml/2006/main">
+              <a:ext uri="{FF2B5EF4-FFF2-40B4-BE49-F238E27FC236}">
+                <a16:creationId xmlns:a16="http://schemas.microsoft.com/office/drawing/2014/main" id="{2D9C4EBE-FE7C-40A2-A2E7-E9AC69B50430}"/>
+              </a:ext>
+            </a:extLst>
+          </p:cNvPr>
+          <p:cNvSpPr>
+            <a:spLocks xmlns:a="http://schemas.openxmlformats.org/drawingml/2006/main" noGrp="1"/>
+          </p:cNvSpPr>
+          <p:nvPr/>
+        </p:nvSpPr>
+        <p:spPr>
+          <a:xfrm xmlns:a="http://schemas.openxmlformats.org/drawingml/2006/main">
+            <a:off x="609600" y="1657350"/>
+            <a:ext cx="10972800" cy="3143250"/>
+          </a:xfrm>
+          <a:prstGeom xmlns:a="http://schemas.openxmlformats.org/drawingml/2006/main" prst="rect">
+            <a:avLst/>
+          </a:prstGeom>
+          <a:solidFill xmlns:a="http://schemas.openxmlformats.org/drawingml/2006/main">
+            <a:srgbClr val="FFFFFF"/>
+          </a:solidFill>
+          <a:ln xmlns:a="http://schemas.openxmlformats.org/drawingml/2006/main" w="11906">
+            <a:solidFill>
+              <a:srgbClr val="B9C5CB"/>
+            </a:solidFill>
+            <a:prstDash val="solid"/>
+          </a:ln>
+        </p:spPr>
+        <p:txBody>
+          <a:bodyPr xmlns:a="http://schemas.openxmlformats.org/drawingml/2006/main" lIns="114300" tIns="114300" rIns="114300" bIns="114300" anchor="ctr">
+            <a:normAutofit fontScale="100000"/>
+          </a:bodyPr>
+          <a:lstStyle xmlns:a="http://schemas.openxmlformats.org/drawingml/2006/main"/>
+          <a:p xmlns:a="http://schemas.openxmlformats.org/drawingml/2006/main">
+            <a:pPr algn="ctr">
+              <a:defRPr sz="1350" b="1">
+                <a:solidFill>
+                  <a:srgbClr val="71818D"/>
+                </a:solidFill>
+                <a:latin typeface="Avenir Next"/>
+                <a:ea typeface="Avenir Next"/>
+                <a:cs typeface="Avenir Next"/>
+              </a:defRPr>
+            </a:pPr>
+            <a:r>
+              <a:rPr sz="1350" b="1">
+                <a:solidFill>
+                  <a:srgbClr val="71818D"/>
+                </a:solidFill>
+                <a:latin typeface="Avenir Next"/>
+                <a:ea typeface="Avenir Next"/>
+                <a:cs typeface="Avenir Next"/>
+              </a:rPr>
+              <a:t>[FULL-WIDTH CHART]</a:t>
+            </a:r>
+          </a:p>
+        </p:txBody>
+      </p:sp>
+      <p:sp>
+        <p:nvSpPr>
+          <p:cNvPr id="8" name="chart-note-1-13">
+            <a:extLst xmlns:a="http://schemas.openxmlformats.org/drawingml/2006/main">
+              <a:ext uri="{FF2B5EF4-FFF2-40B4-BE49-F238E27FC236}">
+                <a16:creationId xmlns:a16="http://schemas.microsoft.com/office/drawing/2014/main" id="{93B43250-45EC-418E-A63D-F71A097A15C0}"/>
+              </a:ext>
+            </a:extLst>
+          </p:cNvPr>
+          <p:cNvSpPr>
+            <a:spLocks xmlns:a="http://schemas.openxmlformats.org/drawingml/2006/main" noGrp="1"/>
+          </p:cNvSpPr>
+          <p:nvPr/>
+        </p:nvSpPr>
+        <p:spPr>
+          <a:xfrm xmlns:a="http://schemas.openxmlformats.org/drawingml/2006/main">
+            <a:off x="609600" y="5105400"/>
+            <a:ext cx="3448050" cy="933450"/>
+          </a:xfrm>
+          <a:prstGeom xmlns:a="http://schemas.openxmlformats.org/drawingml/2006/main" prst="rect">
+            <a:avLst/>
+          </a:prstGeom>
+          <a:solidFill xmlns:a="http://schemas.openxmlformats.org/drawingml/2006/main">
+            <a:srgbClr val="F1F4F5"/>
+          </a:solidFill>
+          <a:ln xmlns:a="http://schemas.openxmlformats.org/drawingml/2006/main" w="11906">
+            <a:solidFill>
+              <a:srgbClr val="E4EAED"/>
+            </a:solidFill>
+            <a:prstDash val="solid"/>
+          </a:ln>
+        </p:spPr>
+        <p:txBody>
+          <a:bodyPr xmlns:a="http://schemas.openxmlformats.org/drawingml/2006/main" lIns="114300" tIns="114300" rIns="114300" bIns="114300" anchor="ctr">
+            <a:normAutofit fontScale="100000"/>
+          </a:bodyPr>
+          <a:lstStyle xmlns:a="http://schemas.openxmlformats.org/drawingml/2006/main"/>
+          <a:p xmlns:a="http://schemas.openxmlformats.org/drawingml/2006/main">
+            <a:pPr algn="ctr">
+              <a:defRPr sz="1050" b="1">
+                <a:solidFill>
+                  <a:srgbClr val="4E6170"/>
+                </a:solidFill>
+                <a:latin typeface="Avenir Next"/>
+                <a:ea typeface="Avenir Next"/>
+                <a:cs typeface="Avenir Next"/>
+              </a:defRPr>
+            </a:pPr>
+            <a:r>
+              <a:rPr sz="1050" b="1">
+                <a:solidFill>
+                  <a:srgbClr val="4E6170"/>
+                </a:solidFill>
+                <a:latin typeface="Avenir Next"/>
+                <a:ea typeface="Avenir Next"/>
+                <a:cs typeface="Avenir Next"/>
+              </a:rPr>
+              <a:t>[ANNOTATION 01]</a:t>
+            </a:r>
+          </a:p>
+        </p:txBody>
+      </p:sp>
+      <p:sp>
+        <p:nvSpPr>
+          <p:cNvPr id="9" name="chart-note-2-13">
+            <a:extLst xmlns:a="http://schemas.openxmlformats.org/drawingml/2006/main">
+              <a:ext uri="{FF2B5EF4-FFF2-40B4-BE49-F238E27FC236}">
+                <a16:creationId xmlns:a16="http://schemas.microsoft.com/office/drawing/2014/main" id="{59095F34-EF40-4586-BB9C-3A95C191E682}"/>
+              </a:ext>
+            </a:extLst>
+          </p:cNvPr>
+          <p:cNvSpPr>
+            <a:spLocks xmlns:a="http://schemas.openxmlformats.org/drawingml/2006/main" noGrp="1"/>
+          </p:cNvSpPr>
+          <p:nvPr/>
+        </p:nvSpPr>
+        <p:spPr>
+          <a:xfrm xmlns:a="http://schemas.openxmlformats.org/drawingml/2006/main">
+            <a:off x="4371975" y="5105400"/>
+            <a:ext cx="3448050" cy="933450"/>
+          </a:xfrm>
+          <a:prstGeom xmlns:a="http://schemas.openxmlformats.org/drawingml/2006/main" prst="rect">
+            <a:avLst/>
+          </a:prstGeom>
+          <a:solidFill xmlns:a="http://schemas.openxmlformats.org/drawingml/2006/main">
+            <a:srgbClr val="F1F4F5"/>
+          </a:solidFill>
+          <a:ln xmlns:a="http://schemas.openxmlformats.org/drawingml/2006/main" w="11906">
+            <a:solidFill>
+              <a:srgbClr val="E4EAED"/>
+            </a:solidFill>
+            <a:prstDash val="solid"/>
+          </a:ln>
+        </p:spPr>
+        <p:txBody>
+          <a:bodyPr xmlns:a="http://schemas.openxmlformats.org/drawingml/2006/main" lIns="114300" tIns="114300" rIns="114300" bIns="114300" anchor="ctr">
+            <a:normAutofit fontScale="100000"/>
+          </a:bodyPr>
+          <a:lstStyle xmlns:a="http://schemas.openxmlformats.org/drawingml/2006/main"/>
+          <a:p xmlns:a="http://schemas.openxmlformats.org/drawingml/2006/main">
+            <a:pPr algn="ctr">
+              <a:defRPr sz="1050" b="1">
+                <a:solidFill>
+                  <a:srgbClr val="4E6170"/>
+                </a:solidFill>
+                <a:latin typeface="Avenir Next"/>
+                <a:ea typeface="Avenir Next"/>
+                <a:cs typeface="Avenir Next"/>
+              </a:defRPr>
+            </a:pPr>
+            <a:r>
+              <a:rPr sz="1050" b="1">
+                <a:solidFill>
+                  <a:srgbClr val="4E6170"/>
+                </a:solidFill>
+                <a:latin typeface="Avenir Next"/>
+                <a:ea typeface="Avenir Next"/>
+                <a:cs typeface="Avenir Next"/>
+              </a:rPr>
+              <a:t>[ANNOTATION 02]</a:t>
+            </a:r>
+          </a:p>
+        </p:txBody>
+      </p:sp>
+      <p:sp>
+        <p:nvSpPr>
+          <p:cNvPr id="10" name="chart-note-3-13">
+            <a:extLst xmlns:a="http://schemas.openxmlformats.org/drawingml/2006/main">
+              <a:ext uri="{FF2B5EF4-FFF2-40B4-BE49-F238E27FC236}">
+                <a16:creationId xmlns:a16="http://schemas.microsoft.com/office/drawing/2014/main" id="{1328C4B5-3C7B-4B0B-B697-D85207E6A460}"/>
+              </a:ext>
+            </a:extLst>
+          </p:cNvPr>
+          <p:cNvSpPr>
+            <a:spLocks xmlns:a="http://schemas.openxmlformats.org/drawingml/2006/main" noGrp="1"/>
+          </p:cNvSpPr>
+          <p:nvPr/>
+        </p:nvSpPr>
+        <p:spPr>
+          <a:xfrm xmlns:a="http://schemas.openxmlformats.org/drawingml/2006/main">
+            <a:off x="8134350" y="5105400"/>
+            <a:ext cx="3448050" cy="933450"/>
+          </a:xfrm>
+          <a:prstGeom xmlns:a="http://schemas.openxmlformats.org/drawingml/2006/main" prst="rect">
+            <a:avLst/>
+          </a:prstGeom>
+          <a:solidFill xmlns:a="http://schemas.openxmlformats.org/drawingml/2006/main">
+            <a:srgbClr val="FAEDD8"/>
+          </a:solidFill>
+          <a:ln xmlns:a="http://schemas.openxmlformats.org/drawingml/2006/main" w="11906">
+            <a:solidFill>
+              <a:srgbClr val="EAA126"/>
+            </a:solidFill>
+            <a:prstDash val="solid"/>
+          </a:ln>
+        </p:spPr>
+        <p:txBody>
+          <a:bodyPr xmlns:a="http://schemas.openxmlformats.org/drawingml/2006/main" lIns="114300" tIns="114300" rIns="114300" bIns="114300" anchor="ctr">
+            <a:normAutofit fontScale="100000"/>
+          </a:bodyPr>
+          <a:lstStyle xmlns:a="http://schemas.openxmlformats.org/drawingml/2006/main"/>
+          <a:p xmlns:a="http://schemas.openxmlformats.org/drawingml/2006/main">
+            <a:pPr algn="ctr">
+              <a:defRPr sz="1050" b="1">
+                <a:solidFill>
+                  <a:srgbClr val="8A5D19"/>
+                </a:solidFill>
+                <a:latin typeface="Avenir Next"/>
+                <a:ea typeface="Avenir Next"/>
+                <a:cs typeface="Avenir Next"/>
+              </a:defRPr>
+            </a:pPr>
+            <a:r>
+              <a:rPr sz="1050" b="1">
+                <a:solidFill>
+                  <a:srgbClr val="8A5D19"/>
+                </a:solidFill>
+                <a:latin typeface="Avenir Next"/>
+                <a:ea typeface="Avenir Next"/>
+                <a:cs typeface="Avenir Next"/>
+              </a:rPr>
+              <a:t>[ANNOTATION 03]</a:t>
+            </a:r>
+          </a:p>
+        </p:txBody>
+      </p:sp>
+    </p:spTree>
+    <p:extLst>
+      <p:ext uri="{BB962C8B-B14F-4D97-AF65-F5344CB8AC3E}">
+        <p14:creationId xmlns:p14="http://schemas.microsoft.com/office/powerpoint/2010/main" val="106394492"/>
+      </p:ext>
+    </p:extLst>
+  </p:cSld>
+</p:sld>
+</file>
+
+<file path=ppt/slides/slide14.xml><?xml version="1.0" encoding="utf-8"?>
+<p:sld xmlns:p="http://schemas.openxmlformats.org/presentationml/2006/main">
+  <p:cSld>
+    <p:bg>
+      <p:bgPr>
+        <a:solidFill xmlns:a="http://schemas.openxmlformats.org/drawingml/2006/main">
+          <a:srgbClr val="F8F9F7"/>
+        </a:solidFill>
+      </p:bgPr>
+    </p:bg>
+    <p:spTree>
+      <p:nvGrpSpPr>
+        <p:cNvPr id="1" name=""/>
+        <p:cNvGrpSpPr/>
+        <p:nvPr/>
+      </p:nvGrpSpPr>
+      <p:grpSpPr>
+        <a:xfrm xmlns:a="http://schemas.openxmlformats.org/drawingml/2006/main"/>
+      </p:grpSpPr>
+      <p:sp>
+        <p:nvSpPr>
+          <p:cNvPr id="11" name="top-accent-14">
+            <a:extLst xmlns:a="http://schemas.openxmlformats.org/drawingml/2006/main">
+              <a:ext uri="{FF2B5EF4-FFF2-40B4-BE49-F238E27FC236}">
+                <a16:creationId xmlns:a16="http://schemas.microsoft.com/office/drawing/2014/main" id="{3D3431BB-FD47-443E-AD8E-1F5B466460F3}"/>
+              </a:ext>
+            </a:extLst>
+          </p:cNvPr>
+          <p:cNvSpPr>
+            <a:spLocks xmlns:a="http://schemas.openxmlformats.org/drawingml/2006/main" noGrp="1"/>
+          </p:cNvSpPr>
+          <p:nvPr/>
+        </p:nvSpPr>
+        <p:spPr>
+          <a:xfrm xmlns:a="http://schemas.openxmlformats.org/drawingml/2006/main">
+            <a:off x="0" y="0"/>
+            <a:ext cx="12192000" cy="76200"/>
+          </a:xfrm>
+          <a:prstGeom xmlns:a="http://schemas.openxmlformats.org/drawingml/2006/main" prst="rect">
+            <a:avLst/>
+          </a:prstGeom>
+          <a:solidFill xmlns:a="http://schemas.openxmlformats.org/drawingml/2006/main">
+            <a:srgbClr val="00A7A0"/>
+          </a:solidFill>
+          <a:ln xmlns:a="http://schemas.openxmlformats.org/drawingml/2006/main" w="0">
+            <a:noFill/>
+          </a:ln>
+        </p:spPr>
+      </p:sp>
+      <p:sp>
+        <p:nvSpPr>
+          <p:cNvPr id="2" name="section-label-14">
+            <a:extLst xmlns:a="http://schemas.openxmlformats.org/drawingml/2006/main">
+              <a:ext uri="{FF2B5EF4-FFF2-40B4-BE49-F238E27FC236}">
+                <a16:creationId xmlns:a16="http://schemas.microsoft.com/office/drawing/2014/main" id="{D818746D-8CB9-45B6-B1E5-A450E305B97F}"/>
+              </a:ext>
+            </a:extLst>
+          </p:cNvPr>
+          <p:cNvSpPr>
+            <a:spLocks xmlns:a="http://schemas.openxmlformats.org/drawingml/2006/main" noGrp="1"/>
+          </p:cNvSpPr>
+          <p:nvPr/>
+        </p:nvSpPr>
+        <p:spPr>
+          <a:xfrm xmlns:a="http://schemas.openxmlformats.org/drawingml/2006/main">
+            <a:off x="609600" y="285750"/>
+            <a:ext cx="6858000" cy="209550"/>
+          </a:xfrm>
+          <a:prstGeom xmlns:a="http://schemas.openxmlformats.org/drawingml/2006/main" prst="rect">
+            <a:avLst/>
+          </a:prstGeom>
+          <a:noFill xmlns:a="http://schemas.openxmlformats.org/drawingml/2006/main"/>
+          <a:ln xmlns:a="http://schemas.openxmlformats.org/drawingml/2006/main" w="0">
+            <a:noFill/>
+          </a:ln>
+        </p:spPr>
+        <p:txBody>
+          <a:bodyPr xmlns:a="http://schemas.openxmlformats.org/drawingml/2006/main" lIns="0" tIns="0" rIns="0" bIns="0" anchor="ctr">
+            <a:normAutofit fontScale="100000"/>
+          </a:bodyPr>
+          <a:lstStyle xmlns:a="http://schemas.openxmlformats.org/drawingml/2006/main"/>
+          <a:p xmlns:a="http://schemas.openxmlformats.org/drawingml/2006/main">
+            <a:pPr algn="l">
+              <a:defRPr sz="975" b="1">
+                <a:solidFill>
+                  <a:srgbClr val="087D79"/>
+                </a:solidFill>
+                <a:latin typeface="Avenir Next"/>
+                <a:ea typeface="Avenir Next"/>
+                <a:cs typeface="Avenir Next"/>
+              </a:defRPr>
+            </a:pPr>
+            <a:r>
+              <a:rPr sz="975" b="1">
+                <a:solidFill>
+                  <a:srgbClr val="087D79"/>
+                </a:solidFill>
+                <a:latin typeface="Avenir Next"/>
+                <a:ea typeface="Avenir Next"/>
+                <a:cs typeface="Avenir Next"/>
+              </a:rPr>
+              <a:t>[SECTION LABEL]</a:t>
+            </a:r>
+          </a:p>
+        </p:txBody>
+      </p:sp>
+      <p:sp>
+        <p:nvSpPr>
+          <p:cNvPr id="3" name="title-14">
+            <a:extLst xmlns:a="http://schemas.openxmlformats.org/drawingml/2006/main">
+              <a:ext uri="{FF2B5EF4-FFF2-40B4-BE49-F238E27FC236}">
+                <a16:creationId xmlns:a16="http://schemas.microsoft.com/office/drawing/2014/main" id="{75268676-E9A6-4C27-ACE4-BBF9E95AE806}"/>
+              </a:ext>
+            </a:extLst>
+          </p:cNvPr>
+          <p:cNvSpPr>
+            <a:spLocks xmlns:a="http://schemas.openxmlformats.org/drawingml/2006/main" noGrp="1"/>
+          </p:cNvSpPr>
+          <p:nvPr/>
+        </p:nvSpPr>
+        <p:spPr>
+          <a:xfrm xmlns:a="http://schemas.openxmlformats.org/drawingml/2006/main">
+            <a:off x="609600" y="561975"/>
+            <a:ext cx="10972800" cy="514350"/>
+          </a:xfrm>
+          <a:prstGeom xmlns:a="http://schemas.openxmlformats.org/drawingml/2006/main" prst="rect">
+            <a:avLst/>
+          </a:prstGeom>
+          <a:noFill xmlns:a="http://schemas.openxmlformats.org/drawingml/2006/main"/>
+          <a:ln xmlns:a="http://schemas.openxmlformats.org/drawingml/2006/main" w="0">
+            <a:noFill/>
+          </a:ln>
+        </p:spPr>
+        <p:txBody>
+          <a:bodyPr xmlns:a="http://schemas.openxmlformats.org/drawingml/2006/main" lIns="0" tIns="0" rIns="0" bIns="0" anchor="ctr">
+            <a:normAutofit fontScale="100000"/>
+          </a:bodyPr>
+          <a:lstStyle xmlns:a="http://schemas.openxmlformats.org/drawingml/2006/main"/>
+          <a:p xmlns:a="http://schemas.openxmlformats.org/drawingml/2006/main">
+            <a:pPr algn="l">
+              <a:defRPr sz="2625" b="1">
+                <a:solidFill>
+                  <a:srgbClr val="102638"/>
+                </a:solidFill>
+                <a:latin typeface="Avenir Next"/>
+                <a:ea typeface="Avenir Next"/>
+                <a:cs typeface="Avenir Next"/>
+              </a:defRPr>
+            </a:pPr>
+            <a:r>
+              <a:rPr sz="2625" b="1">
+                <a:solidFill>
+                  <a:srgbClr val="102638"/>
+                </a:solidFill>
+                <a:latin typeface="Avenir Next"/>
+                <a:ea typeface="Avenir Next"/>
+                <a:cs typeface="Avenir Next"/>
+              </a:rPr>
+              <a:t>[SLIDE TITLE]</a:t>
+            </a:r>
+          </a:p>
+        </p:txBody>
+      </p:sp>
+      <p:sp>
+        <p:nvSpPr>
+          <p:cNvPr id="4" name="subtitle-14">
+            <a:extLst xmlns:a="http://schemas.openxmlformats.org/drawingml/2006/main">
+              <a:ext uri="{FF2B5EF4-FFF2-40B4-BE49-F238E27FC236}">
+                <a16:creationId xmlns:a16="http://schemas.microsoft.com/office/drawing/2014/main" id="{CDE55988-513F-49F2-A318-B5F61AB67F43}"/>
+              </a:ext>
+            </a:extLst>
+          </p:cNvPr>
+          <p:cNvSpPr>
+            <a:spLocks xmlns:a="http://schemas.openxmlformats.org/drawingml/2006/main" noGrp="1"/>
+          </p:cNvSpPr>
+          <p:nvPr/>
+        </p:nvSpPr>
+        <p:spPr>
+          <a:xfrm xmlns:a="http://schemas.openxmlformats.org/drawingml/2006/main">
+            <a:off x="609600" y="1085850"/>
+            <a:ext cx="10668000" cy="304800"/>
+          </a:xfrm>
+          <a:prstGeom xmlns:a="http://schemas.openxmlformats.org/drawingml/2006/main" prst="rect">
+            <a:avLst/>
+          </a:prstGeom>
+          <a:noFill xmlns:a="http://schemas.openxmlformats.org/drawingml/2006/main"/>
+          <a:ln xmlns:a="http://schemas.openxmlformats.org/drawingml/2006/main" w="0">
+            <a:noFill/>
+          </a:ln>
+        </p:spPr>
+        <p:txBody>
+          <a:bodyPr xmlns:a="http://schemas.openxmlformats.org/drawingml/2006/main" lIns="0" tIns="0" rIns="0" bIns="0" anchor="ctr">
+            <a:normAutofit fontScale="100000"/>
+          </a:bodyPr>
+          <a:lstStyle xmlns:a="http://schemas.openxmlformats.org/drawingml/2006/main"/>
+          <a:p xmlns:a="http://schemas.openxmlformats.org/drawingml/2006/main">
+            <a:pPr algn="l">
+              <a:defRPr sz="1350" b="0">
+                <a:solidFill>
+                  <a:srgbClr val="4E6170"/>
+                </a:solidFill>
+                <a:latin typeface="Avenir Next"/>
+                <a:ea typeface="Avenir Next"/>
+                <a:cs typeface="Avenir Next"/>
+              </a:defRPr>
+            </a:pPr>
+            <a:r>
+              <a:rPr sz="1350" b="0">
+                <a:solidFill>
+                  <a:srgbClr val="4E6170"/>
+                </a:solidFill>
+                <a:latin typeface="Avenir Next"/>
+                <a:ea typeface="Avenir Next"/>
+                <a:cs typeface="Avenir Next"/>
+              </a:rPr>
+              <a:t>[Subtitle or context]</a:t>
+            </a:r>
+          </a:p>
+        </p:txBody>
+      </p:sp>
+      <p:sp>
+        <p:nvSpPr>
+          <p:cNvPr id="5" name="footer-rule-14">
+            <a:extLst xmlns:a="http://schemas.openxmlformats.org/drawingml/2006/main">
+              <a:ext uri="{FF2B5EF4-FFF2-40B4-BE49-F238E27FC236}">
+                <a16:creationId xmlns:a16="http://schemas.microsoft.com/office/drawing/2014/main" id="{FE90973A-27EF-4F59-9EBC-D3B03C600F60}"/>
+              </a:ext>
+            </a:extLst>
+          </p:cNvPr>
+          <p:cNvSpPr>
+            <a:spLocks xmlns:a="http://schemas.openxmlformats.org/drawingml/2006/main" noGrp="1"/>
+          </p:cNvSpPr>
+          <p:nvPr/>
+        </p:nvSpPr>
+        <p:spPr>
+          <a:xfrm xmlns:a="http://schemas.openxmlformats.org/drawingml/2006/main">
+            <a:off x="609600" y="6457950"/>
+            <a:ext cx="10972800" cy="9525"/>
+          </a:xfrm>
+          <a:prstGeom xmlns:a="http://schemas.openxmlformats.org/drawingml/2006/main" prst="rect">
+            <a:avLst/>
+          </a:prstGeom>
+          <a:solidFill xmlns:a="http://schemas.openxmlformats.org/drawingml/2006/main">
+            <a:srgbClr val="E4EAED"/>
+          </a:solidFill>
+          <a:ln xmlns:a="http://schemas.openxmlformats.org/drawingml/2006/main" w="0">
+            <a:noFill/>
+          </a:ln>
+        </p:spPr>
+      </p:sp>
+      <p:sp>
+        <p:nvSpPr>
+          <p:cNvPr id="6" name="page-14">
+            <a:extLst xmlns:a="http://schemas.openxmlformats.org/drawingml/2006/main">
+              <a:ext uri="{FF2B5EF4-FFF2-40B4-BE49-F238E27FC236}">
+                <a16:creationId xmlns:a16="http://schemas.microsoft.com/office/drawing/2014/main" id="{BCD3549B-ADCF-4FEB-9CC1-94B33B0CF94F}"/>
+              </a:ext>
+            </a:extLst>
+          </p:cNvPr>
+          <p:cNvSpPr>
+            <a:spLocks xmlns:a="http://schemas.openxmlformats.org/drawingml/2006/main" noGrp="1"/>
+          </p:cNvSpPr>
+          <p:nvPr/>
+        </p:nvSpPr>
+        <p:spPr>
+          <a:xfrm xmlns:a="http://schemas.openxmlformats.org/drawingml/2006/main">
+            <a:off x="11144250" y="6515100"/>
+            <a:ext cx="438150" cy="171450"/>
+          </a:xfrm>
+          <a:prstGeom xmlns:a="http://schemas.openxmlformats.org/drawingml/2006/main" prst="rect">
+            <a:avLst/>
+          </a:prstGeom>
+          <a:noFill xmlns:a="http://schemas.openxmlformats.org/drawingml/2006/main"/>
+          <a:ln xmlns:a="http://schemas.openxmlformats.org/drawingml/2006/main" w="0">
+            <a:noFill/>
+          </a:ln>
+        </p:spPr>
+        <p:txBody>
+          <a:bodyPr xmlns:a="http://schemas.openxmlformats.org/drawingml/2006/main" lIns="0" tIns="0" rIns="0" bIns="0" anchor="ctr">
+            <a:normAutofit fontScale="100000"/>
+          </a:bodyPr>
+          <a:lstStyle xmlns:a="http://schemas.openxmlformats.org/drawingml/2006/main"/>
+          <a:p xmlns:a="http://schemas.openxmlformats.org/drawingml/2006/main">
+            <a:pPr algn="r">
+              <a:defRPr sz="825" b="1">
+                <a:solidFill>
+                  <a:srgbClr val="71818D"/>
+                </a:solidFill>
+                <a:latin typeface="Avenir Next"/>
+                <a:ea typeface="Avenir Next"/>
+                <a:cs typeface="Avenir Next"/>
+              </a:defRPr>
+            </a:pPr>
+            <a:r>
+              <a:rPr sz="825" b="1">
+                <a:solidFill>
+                  <a:srgbClr val="71818D"/>
+                </a:solidFill>
+                <a:latin typeface="Avenir Next"/>
+                <a:ea typeface="Avenir Next"/>
+                <a:cs typeface="Avenir Next"/>
+              </a:rPr>
+              <a:t>14</a:t>
+            </a:r>
+          </a:p>
+        </p:txBody>
+      </p:sp>
+      <p:sp>
+        <p:nvSpPr>
+          <p:cNvPr id="7" name="quadrant-picture-14">
+            <a:extLst xmlns:a="http://schemas.openxmlformats.org/drawingml/2006/main">
+              <a:ext uri="{FF2B5EF4-FFF2-40B4-BE49-F238E27FC236}">
+                <a16:creationId xmlns:a16="http://schemas.microsoft.com/office/drawing/2014/main" id="{92B8C219-790D-4410-B7C0-7634399E0F0C}"/>
+              </a:ext>
+            </a:extLst>
+          </p:cNvPr>
+          <p:cNvSpPr>
+            <a:spLocks xmlns:a="http://schemas.openxmlformats.org/drawingml/2006/main" noGrp="1"/>
+          </p:cNvSpPr>
+          <p:nvPr/>
+        </p:nvSpPr>
+        <p:spPr>
+          <a:xfrm xmlns:a="http://schemas.openxmlformats.org/drawingml/2006/main">
+            <a:off x="609600" y="1657350"/>
+            <a:ext cx="5219700" cy="1924050"/>
+          </a:xfrm>
+          <a:prstGeom xmlns:a="http://schemas.openxmlformats.org/drawingml/2006/main" prst="rect">
+            <a:avLst/>
+          </a:prstGeom>
+          <a:solidFill xmlns:a="http://schemas.openxmlformats.org/drawingml/2006/main">
+            <a:srgbClr val="FFFFFF"/>
+          </a:solidFill>
+          <a:ln xmlns:a="http://schemas.openxmlformats.org/drawingml/2006/main" w="11906">
+            <a:solidFill>
+              <a:srgbClr val="B9C5CB"/>
+            </a:solidFill>
+            <a:prstDash val="solid"/>
+          </a:ln>
+        </p:spPr>
+        <p:txBody>
+          <a:bodyPr xmlns:a="http://schemas.openxmlformats.org/drawingml/2006/main" lIns="114300" tIns="114300" rIns="114300" bIns="114300" anchor="ctr">
+            <a:normAutofit fontScale="100000"/>
+          </a:bodyPr>
+          <a:lstStyle xmlns:a="http://schemas.openxmlformats.org/drawingml/2006/main"/>
+          <a:p xmlns:a="http://schemas.openxmlformats.org/drawingml/2006/main">
+            <a:pPr algn="ctr">
+              <a:defRPr sz="1200" b="1">
+                <a:solidFill>
+                  <a:srgbClr val="4E6170"/>
+                </a:solidFill>
+                <a:latin typeface="Avenir Next"/>
+                <a:ea typeface="Avenir Next"/>
+                <a:cs typeface="Avenir Next"/>
+              </a:defRPr>
+            </a:pPr>
+            <a:r>
+              <a:rPr sz="1200" b="1">
+                <a:solidFill>
+                  <a:srgbClr val="4E6170"/>
+                </a:solidFill>
+                <a:latin typeface="Avenir Next"/>
+                <a:ea typeface="Avenir Next"/>
+                <a:cs typeface="Avenir Next"/>
+              </a:rPr>
+              <a:t>[PICTURE]</a:t>
+            </a:r>
+          </a:p>
+        </p:txBody>
+      </p:sp>
+      <p:sp>
+        <p:nvSpPr>
+          <p:cNvPr id="8" name="quadrant-chart-14">
+            <a:extLst xmlns:a="http://schemas.openxmlformats.org/drawingml/2006/main">
+              <a:ext uri="{FF2B5EF4-FFF2-40B4-BE49-F238E27FC236}">
+                <a16:creationId xmlns:a16="http://schemas.microsoft.com/office/drawing/2014/main" id="{88A8662B-A546-4E9A-B645-2872060F814D}"/>
+              </a:ext>
+            </a:extLst>
+          </p:cNvPr>
+          <p:cNvSpPr>
+            <a:spLocks xmlns:a="http://schemas.openxmlformats.org/drawingml/2006/main" noGrp="1"/>
+          </p:cNvSpPr>
+          <p:nvPr/>
+        </p:nvSpPr>
+        <p:spPr>
+          <a:xfrm xmlns:a="http://schemas.openxmlformats.org/drawingml/2006/main">
+            <a:off x="6362700" y="1657350"/>
+            <a:ext cx="5219700" cy="1924050"/>
+          </a:xfrm>
+          <a:prstGeom xmlns:a="http://schemas.openxmlformats.org/drawingml/2006/main" prst="rect">
+            <a:avLst/>
+          </a:prstGeom>
+          <a:solidFill xmlns:a="http://schemas.openxmlformats.org/drawingml/2006/main">
+            <a:srgbClr val="FFFFFF"/>
+          </a:solidFill>
+          <a:ln xmlns:a="http://schemas.openxmlformats.org/drawingml/2006/main" w="11906">
+            <a:solidFill>
+              <a:srgbClr val="B9C5CB"/>
+            </a:solidFill>
+            <a:prstDash val="solid"/>
+          </a:ln>
+        </p:spPr>
+        <p:txBody>
+          <a:bodyPr xmlns:a="http://schemas.openxmlformats.org/drawingml/2006/main" lIns="114300" tIns="114300" rIns="114300" bIns="114300" anchor="ctr">
+            <a:normAutofit fontScale="100000"/>
+          </a:bodyPr>
+          <a:lstStyle xmlns:a="http://schemas.openxmlformats.org/drawingml/2006/main"/>
+          <a:p xmlns:a="http://schemas.openxmlformats.org/drawingml/2006/main">
+            <a:pPr algn="ctr">
+              <a:defRPr sz="1200" b="1">
+                <a:solidFill>
+                  <a:srgbClr val="4E6170"/>
+                </a:solidFill>
+                <a:latin typeface="Avenir Next"/>
+                <a:ea typeface="Avenir Next"/>
+                <a:cs typeface="Avenir Next"/>
+              </a:defRPr>
+            </a:pPr>
+            <a:r>
+              <a:rPr sz="1200" b="1">
+                <a:solidFill>
+                  <a:srgbClr val="4E6170"/>
+                </a:solidFill>
+                <a:latin typeface="Avenir Next"/>
+                <a:ea typeface="Avenir Next"/>
+                <a:cs typeface="Avenir Next"/>
+              </a:rPr>
+              <a:t>[CHART]</a:t>
+            </a:r>
+          </a:p>
+        </p:txBody>
+      </p:sp>
+      <p:sp>
+        <p:nvSpPr>
+          <p:cNvPr id="9" name="quadrant-table-14">
+            <a:extLst xmlns:a="http://schemas.openxmlformats.org/drawingml/2006/main">
+              <a:ext uri="{FF2B5EF4-FFF2-40B4-BE49-F238E27FC236}">
+                <a16:creationId xmlns:a16="http://schemas.microsoft.com/office/drawing/2014/main" id="{30027B1D-C2A8-4CAA-A977-DE63A79DCD75}"/>
+              </a:ext>
+            </a:extLst>
+          </p:cNvPr>
+          <p:cNvSpPr>
+            <a:spLocks xmlns:a="http://schemas.openxmlformats.org/drawingml/2006/main" noGrp="1"/>
+          </p:cNvSpPr>
+          <p:nvPr/>
+        </p:nvSpPr>
+        <p:spPr>
+          <a:xfrm xmlns:a="http://schemas.openxmlformats.org/drawingml/2006/main">
+            <a:off x="609600" y="3886200"/>
+            <a:ext cx="5219700" cy="1924050"/>
+          </a:xfrm>
+          <a:prstGeom xmlns:a="http://schemas.openxmlformats.org/drawingml/2006/main" prst="rect">
+            <a:avLst/>
+          </a:prstGeom>
+          <a:solidFill xmlns:a="http://schemas.openxmlformats.org/drawingml/2006/main">
+            <a:srgbClr val="FFFFFF"/>
+          </a:solidFill>
+          <a:ln xmlns:a="http://schemas.openxmlformats.org/drawingml/2006/main" w="11906">
+            <a:solidFill>
+              <a:srgbClr val="B9C5CB"/>
+            </a:solidFill>
+            <a:prstDash val="solid"/>
+          </a:ln>
+        </p:spPr>
+        <p:txBody>
+          <a:bodyPr xmlns:a="http://schemas.openxmlformats.org/drawingml/2006/main" lIns="114300" tIns="114300" rIns="114300" bIns="114300" anchor="ctr">
+            <a:normAutofit fontScale="100000"/>
+          </a:bodyPr>
+          <a:lstStyle xmlns:a="http://schemas.openxmlformats.org/drawingml/2006/main"/>
+          <a:p xmlns:a="http://schemas.openxmlformats.org/drawingml/2006/main">
+            <a:pPr algn="ctr">
+              <a:defRPr sz="1200" b="1">
+                <a:solidFill>
+                  <a:srgbClr val="4E6170"/>
+                </a:solidFill>
+                <a:latin typeface="Avenir Next"/>
+                <a:ea typeface="Avenir Next"/>
+                <a:cs typeface="Avenir Next"/>
+              </a:defRPr>
+            </a:pPr>
+            <a:r>
+              <a:rPr sz="1200" b="1">
+                <a:solidFill>
+                  <a:srgbClr val="4E6170"/>
+                </a:solidFill>
+                <a:latin typeface="Avenir Next"/>
+                <a:ea typeface="Avenir Next"/>
+                <a:cs typeface="Avenir Next"/>
+              </a:rPr>
+              <a:t>[TABLE]</a:t>
+            </a:r>
+          </a:p>
+        </p:txBody>
+      </p:sp>
+      <p:sp>
+        <p:nvSpPr>
+          <p:cNvPr id="10" name="quadrant-text-14">
+            <a:extLst xmlns:a="http://schemas.openxmlformats.org/drawingml/2006/main">
+              <a:ext uri="{FF2B5EF4-FFF2-40B4-BE49-F238E27FC236}">
+                <a16:creationId xmlns:a16="http://schemas.microsoft.com/office/drawing/2014/main" id="{3BCE3A34-A667-4119-AB66-EF9B650E87ED}"/>
+              </a:ext>
+            </a:extLst>
+          </p:cNvPr>
+          <p:cNvSpPr>
+            <a:spLocks xmlns:a="http://schemas.openxmlformats.org/drawingml/2006/main" noGrp="1"/>
+          </p:cNvSpPr>
+          <p:nvPr/>
+        </p:nvSpPr>
+        <p:spPr>
+          <a:xfrm xmlns:a="http://schemas.openxmlformats.org/drawingml/2006/main">
+            <a:off x="6362700" y="3886200"/>
+            <a:ext cx="5219700" cy="1924050"/>
+          </a:xfrm>
+          <a:prstGeom xmlns:a="http://schemas.openxmlformats.org/drawingml/2006/main" prst="rect">
+            <a:avLst/>
+          </a:prstGeom>
+          <a:solidFill xmlns:a="http://schemas.openxmlformats.org/drawingml/2006/main">
+            <a:srgbClr val="DDF3F0"/>
+          </a:solidFill>
+          <a:ln xmlns:a="http://schemas.openxmlformats.org/drawingml/2006/main" w="11906">
+            <a:solidFill>
+              <a:srgbClr val="00A7A0"/>
+            </a:solidFill>
+            <a:prstDash val="solid"/>
+          </a:ln>
+        </p:spPr>
+        <p:txBody>
+          <a:bodyPr xmlns:a="http://schemas.openxmlformats.org/drawingml/2006/main" lIns="114300" tIns="114300" rIns="114300" bIns="114300" anchor="ctr">
+            <a:normAutofit fontScale="100000"/>
+          </a:bodyPr>
+          <a:lstStyle xmlns:a="http://schemas.openxmlformats.org/drawingml/2006/main"/>
+          <a:p xmlns:a="http://schemas.openxmlformats.org/drawingml/2006/main">
+            <a:pPr algn="ctr">
+              <a:defRPr sz="1200" b="1">
+                <a:solidFill>
+                  <a:srgbClr val="087D79"/>
+                </a:solidFill>
+                <a:latin typeface="Avenir Next"/>
+                <a:ea typeface="Avenir Next"/>
+                <a:cs typeface="Avenir Next"/>
+              </a:defRPr>
+            </a:pPr>
+            <a:r>
+              <a:rPr sz="1200" b="1">
+                <a:solidFill>
+                  <a:srgbClr val="087D79"/>
+                </a:solidFill>
+                <a:latin typeface="Avenir Next"/>
+                <a:ea typeface="Avenir Next"/>
+                <a:cs typeface="Avenir Next"/>
+              </a:rPr>
+              <a:t>[BODY / COMMENTARY]</a:t>
+            </a:r>
+          </a:p>
+        </p:txBody>
+      </p:sp>
+    </p:spTree>
+    <p:extLst>
+      <p:ext uri="{BB962C8B-B14F-4D97-AF65-F5344CB8AC3E}">
+        <p14:creationId xmlns:p14="http://schemas.microsoft.com/office/powerpoint/2010/main" val="961966006"/>
+      </p:ext>
+    </p:extLst>
+  </p:cSld>
+</p:sld>
+</file>
+
+<file path=ppt/slides/slide15.xml><?xml version="1.0" encoding="utf-8"?>
+<p:sld xmlns:p="http://schemas.openxmlformats.org/presentationml/2006/main">
+  <p:cSld>
+    <p:bg>
+      <p:bgPr>
+        <a:solidFill xmlns:a="http://schemas.openxmlformats.org/drawingml/2006/main">
+          <a:srgbClr val="F8F9F7"/>
+        </a:solidFill>
+      </p:bgPr>
+    </p:bg>
+    <p:spTree>
+      <p:nvGrpSpPr>
+        <p:cNvPr id="1" name=""/>
+        <p:cNvGrpSpPr/>
+        <p:nvPr/>
+      </p:nvGrpSpPr>
+      <p:grpSpPr>
+        <a:xfrm xmlns:a="http://schemas.openxmlformats.org/drawingml/2006/main"/>
+      </p:grpSpPr>
+      <p:sp>
+        <p:nvSpPr>
+          <p:cNvPr id="9" name="top-accent-15">
+            <a:extLst xmlns:a="http://schemas.openxmlformats.org/drawingml/2006/main">
+              <a:ext uri="{FF2B5EF4-FFF2-40B4-BE49-F238E27FC236}">
+                <a16:creationId xmlns:a16="http://schemas.microsoft.com/office/drawing/2014/main" id="{689CF8E6-B279-4CAC-98AA-BC8B472225EE}"/>
+              </a:ext>
+            </a:extLst>
+          </p:cNvPr>
+          <p:cNvSpPr>
+            <a:spLocks xmlns:a="http://schemas.openxmlformats.org/drawingml/2006/main" noGrp="1"/>
+          </p:cNvSpPr>
+          <p:nvPr/>
+        </p:nvSpPr>
+        <p:spPr>
+          <a:xfrm xmlns:a="http://schemas.openxmlformats.org/drawingml/2006/main">
+            <a:off x="0" y="0"/>
+            <a:ext cx="12192000" cy="76200"/>
+          </a:xfrm>
+          <a:prstGeom xmlns:a="http://schemas.openxmlformats.org/drawingml/2006/main" prst="rect">
+            <a:avLst/>
+          </a:prstGeom>
+          <a:solidFill xmlns:a="http://schemas.openxmlformats.org/drawingml/2006/main">
+            <a:srgbClr val="00A7A0"/>
+          </a:solidFill>
+          <a:ln xmlns:a="http://schemas.openxmlformats.org/drawingml/2006/main" w="0">
+            <a:noFill/>
+          </a:ln>
+        </p:spPr>
+      </p:sp>
+      <p:sp>
+        <p:nvSpPr>
+          <p:cNvPr id="2" name="section-label-15">
+            <a:extLst xmlns:a="http://schemas.openxmlformats.org/drawingml/2006/main">
+              <a:ext uri="{FF2B5EF4-FFF2-40B4-BE49-F238E27FC236}">
+                <a16:creationId xmlns:a16="http://schemas.microsoft.com/office/drawing/2014/main" id="{08497E3C-18B2-4470-8709-A5A1A0F51516}"/>
+              </a:ext>
+            </a:extLst>
+          </p:cNvPr>
+          <p:cNvSpPr>
+            <a:spLocks xmlns:a="http://schemas.openxmlformats.org/drawingml/2006/main" noGrp="1"/>
+          </p:cNvSpPr>
+          <p:nvPr/>
+        </p:nvSpPr>
+        <p:spPr>
+          <a:xfrm xmlns:a="http://schemas.openxmlformats.org/drawingml/2006/main">
+            <a:off x="609600" y="285750"/>
+            <a:ext cx="6858000" cy="209550"/>
+          </a:xfrm>
+          <a:prstGeom xmlns:a="http://schemas.openxmlformats.org/drawingml/2006/main" prst="rect">
+            <a:avLst/>
+          </a:prstGeom>
+          <a:noFill xmlns:a="http://schemas.openxmlformats.org/drawingml/2006/main"/>
+          <a:ln xmlns:a="http://schemas.openxmlformats.org/drawingml/2006/main" w="0">
+            <a:noFill/>
+          </a:ln>
+        </p:spPr>
+        <p:txBody>
+          <a:bodyPr xmlns:a="http://schemas.openxmlformats.org/drawingml/2006/main" lIns="0" tIns="0" rIns="0" bIns="0" anchor="ctr">
+            <a:normAutofit fontScale="100000"/>
+          </a:bodyPr>
+          <a:lstStyle xmlns:a="http://schemas.openxmlformats.org/drawingml/2006/main"/>
+          <a:p xmlns:a="http://schemas.openxmlformats.org/drawingml/2006/main">
+            <a:pPr algn="l">
+              <a:defRPr sz="975" b="1">
+                <a:solidFill>
+                  <a:srgbClr val="087D79"/>
+                </a:solidFill>
+                <a:latin typeface="Avenir Next"/>
+                <a:ea typeface="Avenir Next"/>
+                <a:cs typeface="Avenir Next"/>
+              </a:defRPr>
+            </a:pPr>
+            <a:r>
+              <a:rPr sz="975" b="1">
+                <a:solidFill>
+                  <a:srgbClr val="087D79"/>
+                </a:solidFill>
+                <a:latin typeface="Avenir Next"/>
+                <a:ea typeface="Avenir Next"/>
+                <a:cs typeface="Avenir Next"/>
+              </a:rPr>
+              <a:t>[SECTION LABEL]</a:t>
+            </a:r>
+          </a:p>
+        </p:txBody>
+      </p:sp>
+      <p:sp>
+        <p:nvSpPr>
+          <p:cNvPr id="3" name="title-15">
+            <a:extLst xmlns:a="http://schemas.openxmlformats.org/drawingml/2006/main">
+              <a:ext uri="{FF2B5EF4-FFF2-40B4-BE49-F238E27FC236}">
+                <a16:creationId xmlns:a16="http://schemas.microsoft.com/office/drawing/2014/main" id="{4A81615A-3C6E-4A16-BBA1-9FA8C13EC13B}"/>
+              </a:ext>
+            </a:extLst>
+          </p:cNvPr>
+          <p:cNvSpPr>
+            <a:spLocks xmlns:a="http://schemas.openxmlformats.org/drawingml/2006/main" noGrp="1"/>
+          </p:cNvSpPr>
+          <p:nvPr/>
+        </p:nvSpPr>
+        <p:spPr>
+          <a:xfrm xmlns:a="http://schemas.openxmlformats.org/drawingml/2006/main">
+            <a:off x="609600" y="561975"/>
+            <a:ext cx="10972800" cy="514350"/>
+          </a:xfrm>
+          <a:prstGeom xmlns:a="http://schemas.openxmlformats.org/drawingml/2006/main" prst="rect">
+            <a:avLst/>
+          </a:prstGeom>
+          <a:noFill xmlns:a="http://schemas.openxmlformats.org/drawingml/2006/main"/>
+          <a:ln xmlns:a="http://schemas.openxmlformats.org/drawingml/2006/main" w="0">
+            <a:noFill/>
+          </a:ln>
+        </p:spPr>
+        <p:txBody>
+          <a:bodyPr xmlns:a="http://schemas.openxmlformats.org/drawingml/2006/main" lIns="0" tIns="0" rIns="0" bIns="0" anchor="ctr">
+            <a:normAutofit fontScale="100000"/>
+          </a:bodyPr>
+          <a:lstStyle xmlns:a="http://schemas.openxmlformats.org/drawingml/2006/main"/>
+          <a:p xmlns:a="http://schemas.openxmlformats.org/drawingml/2006/main">
+            <a:pPr algn="l">
+              <a:defRPr sz="2625" b="1">
+                <a:solidFill>
+                  <a:srgbClr val="102638"/>
+                </a:solidFill>
+                <a:latin typeface="Avenir Next"/>
+                <a:ea typeface="Avenir Next"/>
+                <a:cs typeface="Avenir Next"/>
+              </a:defRPr>
+            </a:pPr>
+            <a:r>
+              <a:rPr sz="2625" b="1">
+                <a:solidFill>
+                  <a:srgbClr val="102638"/>
+                </a:solidFill>
+                <a:latin typeface="Avenir Next"/>
+                <a:ea typeface="Avenir Next"/>
+                <a:cs typeface="Avenir Next"/>
+              </a:rPr>
+              <a:t>[SLIDE TITLE]</a:t>
+            </a:r>
+          </a:p>
+        </p:txBody>
+      </p:sp>
+      <p:sp>
+        <p:nvSpPr>
+          <p:cNvPr id="4" name="subtitle-15">
+            <a:extLst xmlns:a="http://schemas.openxmlformats.org/drawingml/2006/main">
+              <a:ext uri="{FF2B5EF4-FFF2-40B4-BE49-F238E27FC236}">
+                <a16:creationId xmlns:a16="http://schemas.microsoft.com/office/drawing/2014/main" id="{02422C3F-0484-4DF6-A074-C447D1BC6413}"/>
+              </a:ext>
+            </a:extLst>
+          </p:cNvPr>
+          <p:cNvSpPr>
+            <a:spLocks xmlns:a="http://schemas.openxmlformats.org/drawingml/2006/main" noGrp="1"/>
+          </p:cNvSpPr>
+          <p:nvPr/>
+        </p:nvSpPr>
+        <p:spPr>
+          <a:xfrm xmlns:a="http://schemas.openxmlformats.org/drawingml/2006/main">
+            <a:off x="609600" y="1085850"/>
+            <a:ext cx="10668000" cy="304800"/>
+          </a:xfrm>
+          <a:prstGeom xmlns:a="http://schemas.openxmlformats.org/drawingml/2006/main" prst="rect">
+            <a:avLst/>
+          </a:prstGeom>
+          <a:noFill xmlns:a="http://schemas.openxmlformats.org/drawingml/2006/main"/>
+          <a:ln xmlns:a="http://schemas.openxmlformats.org/drawingml/2006/main" w="0">
+            <a:noFill/>
+          </a:ln>
+        </p:spPr>
+        <p:txBody>
+          <a:bodyPr xmlns:a="http://schemas.openxmlformats.org/drawingml/2006/main" lIns="0" tIns="0" rIns="0" bIns="0" anchor="ctr">
+            <a:normAutofit fontScale="100000"/>
+          </a:bodyPr>
+          <a:lstStyle xmlns:a="http://schemas.openxmlformats.org/drawingml/2006/main"/>
+          <a:p xmlns:a="http://schemas.openxmlformats.org/drawingml/2006/main">
+            <a:pPr algn="l">
+              <a:defRPr sz="1350" b="0">
+                <a:solidFill>
+                  <a:srgbClr val="4E6170"/>
+                </a:solidFill>
+                <a:latin typeface="Avenir Next"/>
+                <a:ea typeface="Avenir Next"/>
+                <a:cs typeface="Avenir Next"/>
+              </a:defRPr>
+            </a:pPr>
+            <a:r>
+              <a:rPr sz="1350" b="0">
+                <a:solidFill>
+                  <a:srgbClr val="4E6170"/>
+                </a:solidFill>
+                <a:latin typeface="Avenir Next"/>
+                <a:ea typeface="Avenir Next"/>
+                <a:cs typeface="Avenir Next"/>
+              </a:rPr>
+              <a:t>[Subtitle or context]</a:t>
+            </a:r>
+          </a:p>
+        </p:txBody>
+      </p:sp>
+      <p:sp>
+        <p:nvSpPr>
+          <p:cNvPr id="5" name="footer-rule-15">
+            <a:extLst xmlns:a="http://schemas.openxmlformats.org/drawingml/2006/main">
+              <a:ext uri="{FF2B5EF4-FFF2-40B4-BE49-F238E27FC236}">
+                <a16:creationId xmlns:a16="http://schemas.microsoft.com/office/drawing/2014/main" id="{8DC45E16-5AC2-4F6B-BB87-3A230A0F111E}"/>
+              </a:ext>
+            </a:extLst>
+          </p:cNvPr>
+          <p:cNvSpPr>
+            <a:spLocks xmlns:a="http://schemas.openxmlformats.org/drawingml/2006/main" noGrp="1"/>
+          </p:cNvSpPr>
+          <p:nvPr/>
+        </p:nvSpPr>
+        <p:spPr>
+          <a:xfrm xmlns:a="http://schemas.openxmlformats.org/drawingml/2006/main">
+            <a:off x="609600" y="6457950"/>
+            <a:ext cx="10972800" cy="9525"/>
+          </a:xfrm>
+          <a:prstGeom xmlns:a="http://schemas.openxmlformats.org/drawingml/2006/main" prst="rect">
+            <a:avLst/>
+          </a:prstGeom>
+          <a:solidFill xmlns:a="http://schemas.openxmlformats.org/drawingml/2006/main">
+            <a:srgbClr val="E4EAED"/>
+          </a:solidFill>
+          <a:ln xmlns:a="http://schemas.openxmlformats.org/drawingml/2006/main" w="0">
+            <a:noFill/>
+          </a:ln>
+        </p:spPr>
+      </p:sp>
+      <p:sp>
+        <p:nvSpPr>
+          <p:cNvPr id="6" name="page-15">
+            <a:extLst xmlns:a="http://schemas.openxmlformats.org/drawingml/2006/main">
+              <a:ext uri="{FF2B5EF4-FFF2-40B4-BE49-F238E27FC236}">
+                <a16:creationId xmlns:a16="http://schemas.microsoft.com/office/drawing/2014/main" id="{2904C22F-852A-4BF4-BE53-0C64A4ED74D0}"/>
+              </a:ext>
+            </a:extLst>
+          </p:cNvPr>
+          <p:cNvSpPr>
+            <a:spLocks xmlns:a="http://schemas.openxmlformats.org/drawingml/2006/main" noGrp="1"/>
+          </p:cNvSpPr>
+          <p:nvPr/>
+        </p:nvSpPr>
+        <p:spPr>
+          <a:xfrm xmlns:a="http://schemas.openxmlformats.org/drawingml/2006/main">
+            <a:off x="11144250" y="6515100"/>
+            <a:ext cx="438150" cy="171450"/>
+          </a:xfrm>
+          <a:prstGeom xmlns:a="http://schemas.openxmlformats.org/drawingml/2006/main" prst="rect">
+            <a:avLst/>
+          </a:prstGeom>
+          <a:noFill xmlns:a="http://schemas.openxmlformats.org/drawingml/2006/main"/>
+          <a:ln xmlns:a="http://schemas.openxmlformats.org/drawingml/2006/main" w="0">
+            <a:noFill/>
+          </a:ln>
+        </p:spPr>
+        <p:txBody>
+          <a:bodyPr xmlns:a="http://schemas.openxmlformats.org/drawingml/2006/main" lIns="0" tIns="0" rIns="0" bIns="0" anchor="ctr">
+            <a:normAutofit fontScale="100000"/>
+          </a:bodyPr>
+          <a:lstStyle xmlns:a="http://schemas.openxmlformats.org/drawingml/2006/main"/>
+          <a:p xmlns:a="http://schemas.openxmlformats.org/drawingml/2006/main">
+            <a:pPr algn="r">
+              <a:defRPr sz="825" b="1">
+                <a:solidFill>
+                  <a:srgbClr val="71818D"/>
+                </a:solidFill>
+                <a:latin typeface="Avenir Next"/>
+                <a:ea typeface="Avenir Next"/>
+                <a:cs typeface="Avenir Next"/>
+              </a:defRPr>
+            </a:pPr>
+            <a:r>
+              <a:rPr sz="825" b="1">
+                <a:solidFill>
+                  <a:srgbClr val="71818D"/>
+                </a:solidFill>
+                <a:latin typeface="Avenir Next"/>
+                <a:ea typeface="Avenir Next"/>
+                <a:cs typeface="Avenir Next"/>
+              </a:rPr>
+              <a:t>15</a:t>
+            </a:r>
+          </a:p>
+        </p:txBody>
+      </p:sp>
+      <p:sp>
+        <p:nvSpPr>
+          <p:cNvPr id="7" name="main-table-15">
+            <a:extLst xmlns:a="http://schemas.openxmlformats.org/drawingml/2006/main">
+              <a:ext uri="{FF2B5EF4-FFF2-40B4-BE49-F238E27FC236}">
+                <a16:creationId xmlns:a16="http://schemas.microsoft.com/office/drawing/2014/main" id="{54C24672-0491-405D-83DF-790AC271F270}"/>
+              </a:ext>
+            </a:extLst>
+          </p:cNvPr>
+          <p:cNvSpPr>
+            <a:spLocks xmlns:a="http://schemas.openxmlformats.org/drawingml/2006/main" noGrp="1"/>
+          </p:cNvSpPr>
+          <p:nvPr/>
+        </p:nvSpPr>
+        <p:spPr>
+          <a:xfrm xmlns:a="http://schemas.openxmlformats.org/drawingml/2006/main">
+            <a:off x="609600" y="1733550"/>
+            <a:ext cx="7524750" cy="4095750"/>
+          </a:xfrm>
+          <a:prstGeom xmlns:a="http://schemas.openxmlformats.org/drawingml/2006/main" prst="rect">
+            <a:avLst/>
+          </a:prstGeom>
+          <a:solidFill xmlns:a="http://schemas.openxmlformats.org/drawingml/2006/main">
+            <a:srgbClr val="FFFFFF"/>
+          </a:solidFill>
+          <a:ln xmlns:a="http://schemas.openxmlformats.org/drawingml/2006/main" w="11906">
+            <a:solidFill>
+              <a:srgbClr val="B9C5CB"/>
+            </a:solidFill>
+            <a:prstDash val="solid"/>
+          </a:ln>
+        </p:spPr>
+        <p:txBody>
+          <a:bodyPr xmlns:a="http://schemas.openxmlformats.org/drawingml/2006/main" lIns="114300" tIns="114300" rIns="114300" bIns="114300" anchor="ctr">
+            <a:normAutofit fontScale="100000"/>
+          </a:bodyPr>
+          <a:lstStyle xmlns:a="http://schemas.openxmlformats.org/drawingml/2006/main"/>
+          <a:p xmlns:a="http://schemas.openxmlformats.org/drawingml/2006/main">
+            <a:pPr algn="ctr">
+              <a:defRPr sz="1350" b="1">
+                <a:solidFill>
+                  <a:srgbClr val="71818D"/>
+                </a:solidFill>
+                <a:latin typeface="Avenir Next"/>
+                <a:ea typeface="Avenir Next"/>
+                <a:cs typeface="Avenir Next"/>
+              </a:defRPr>
+            </a:pPr>
+            <a:r>
+              <a:rPr sz="1350" b="1">
+                <a:solidFill>
+                  <a:srgbClr val="71818D"/>
+                </a:solidFill>
+                <a:latin typeface="Avenir Next"/>
+                <a:ea typeface="Avenir Next"/>
+                <a:cs typeface="Avenir Next"/>
+              </a:rPr>
+              <a:t>[EDITABLE TABLE]</a:t>
+            </a:r>
+          </a:p>
+        </p:txBody>
+      </p:sp>
+      <p:sp>
+        <p:nvSpPr>
+          <p:cNvPr id="8" name="table-commentary-15">
+            <a:extLst xmlns:a="http://schemas.openxmlformats.org/drawingml/2006/main">
+              <a:ext uri="{FF2B5EF4-FFF2-40B4-BE49-F238E27FC236}">
+                <a16:creationId xmlns:a16="http://schemas.microsoft.com/office/drawing/2014/main" id="{103C35CE-4151-4071-A724-6AE165CABDB9}"/>
+              </a:ext>
+            </a:extLst>
+          </p:cNvPr>
+          <p:cNvSpPr>
+            <a:spLocks xmlns:a="http://schemas.openxmlformats.org/drawingml/2006/main" noGrp="1"/>
+          </p:cNvSpPr>
+          <p:nvPr/>
+        </p:nvSpPr>
+        <p:spPr>
+          <a:xfrm xmlns:a="http://schemas.openxmlformats.org/drawingml/2006/main">
+            <a:off x="8477250" y="1733550"/>
+            <a:ext cx="3105150" cy="4095750"/>
+          </a:xfrm>
+          <a:prstGeom xmlns:a="http://schemas.openxmlformats.org/drawingml/2006/main" prst="rect">
+            <a:avLst/>
+          </a:prstGeom>
+          <a:solidFill xmlns:a="http://schemas.openxmlformats.org/drawingml/2006/main">
+            <a:srgbClr val="F1F4F5"/>
+          </a:solidFill>
+          <a:ln xmlns:a="http://schemas.openxmlformats.org/drawingml/2006/main" w="11906">
+            <a:solidFill>
+              <a:srgbClr val="E4EAED"/>
+            </a:solidFill>
+            <a:prstDash val="solid"/>
+          </a:ln>
+        </p:spPr>
+        <p:txBody>
+          <a:bodyPr xmlns:a="http://schemas.openxmlformats.org/drawingml/2006/main" lIns="114300" tIns="114300" rIns="114300" bIns="114300" anchor="ctr">
+            <a:normAutofit fontScale="100000"/>
+          </a:bodyPr>
+          <a:lstStyle xmlns:a="http://schemas.openxmlformats.org/drawingml/2006/main"/>
+          <a:p xmlns:a="http://schemas.openxmlformats.org/drawingml/2006/main">
+            <a:pPr algn="ctr">
+              <a:defRPr sz="1200" b="1">
+                <a:solidFill>
+                  <a:srgbClr val="4E6170"/>
+                </a:solidFill>
+                <a:latin typeface="Avenir Next"/>
+                <a:ea typeface="Avenir Next"/>
+                <a:cs typeface="Avenir Next"/>
+              </a:defRPr>
+            </a:pPr>
+            <a:r>
+              <a:rPr sz="1200" b="1">
+                <a:solidFill>
+                  <a:srgbClr val="4E6170"/>
+                </a:solidFill>
+                <a:latin typeface="Avenir Next"/>
+                <a:ea typeface="Avenir Next"/>
+                <a:cs typeface="Avenir Next"/>
+              </a:rPr>
+              <a:t>[COMMENTARY / DECISION]</a:t>
+            </a:r>
+          </a:p>
+        </p:txBody>
+      </p:sp>
+    </p:spTree>
+    <p:extLst>
+      <p:ext uri="{BB962C8B-B14F-4D97-AF65-F5344CB8AC3E}">
+        <p14:creationId xmlns:p14="http://schemas.microsoft.com/office/powerpoint/2010/main" val="1337421280"/>
+      </p:ext>
+    </p:extLst>
+  </p:cSld>
+</p:sld>
+</file>
+
+<file path=ppt/slides/slide16.xml><?xml version="1.0" encoding="utf-8"?>
+<p:sld xmlns:p="http://schemas.openxmlformats.org/presentationml/2006/main">
+  <p:cSld>
+    <p:bg>
+      <p:bgPr>
+        <a:solidFill xmlns:a="http://schemas.openxmlformats.org/drawingml/2006/main">
+          <a:srgbClr val="102638"/>
+        </a:solidFill>
+      </p:bgPr>
+    </p:bg>
+    <p:spTree>
+      <p:nvGrpSpPr>
+        <p:cNvPr id="1" name=""/>
+        <p:cNvGrpSpPr/>
+        <p:nvPr/>
+      </p:nvGrpSpPr>
+      <p:grpSpPr>
+        <a:xfrm xmlns:a="http://schemas.openxmlformats.org/drawingml/2006/main"/>
+      </p:grpSpPr>
+      <p:sp>
+        <p:nvSpPr>
+          <p:cNvPr id="12" name="closing-left-accent-16">
+            <a:extLst xmlns:a="http://schemas.openxmlformats.org/drawingml/2006/main">
+              <a:ext uri="{FF2B5EF4-FFF2-40B4-BE49-F238E27FC236}">
+                <a16:creationId xmlns:a16="http://schemas.microsoft.com/office/drawing/2014/main" id="{3969ECF3-1CFA-47B1-920B-D789744C2611}"/>
+              </a:ext>
+            </a:extLst>
+          </p:cNvPr>
+          <p:cNvSpPr>
+            <a:spLocks xmlns:a="http://schemas.openxmlformats.org/drawingml/2006/main" noGrp="1"/>
+          </p:cNvSpPr>
+          <p:nvPr/>
+        </p:nvSpPr>
+        <p:spPr>
+          <a:xfrm xmlns:a="http://schemas.openxmlformats.org/drawingml/2006/main">
+            <a:off x="0" y="0"/>
+            <a:ext cx="142875" cy="6858000"/>
+          </a:xfrm>
+          <a:prstGeom xmlns:a="http://schemas.openxmlformats.org/drawingml/2006/main" prst="rect">
+            <a:avLst/>
+          </a:prstGeom>
+          <a:solidFill xmlns:a="http://schemas.openxmlformats.org/drawingml/2006/main">
+            <a:srgbClr val="00A7A0"/>
+          </a:solidFill>
+          <a:ln xmlns:a="http://schemas.openxmlformats.org/drawingml/2006/main" w="0">
+            <a:noFill/>
+          </a:ln>
+        </p:spPr>
+      </p:sp>
+      <p:sp>
+        <p:nvSpPr>
+          <p:cNvPr id="2" name="closing-label-16">
+            <a:extLst xmlns:a="http://schemas.openxmlformats.org/drawingml/2006/main">
+              <a:ext uri="{FF2B5EF4-FFF2-40B4-BE49-F238E27FC236}">
+                <a16:creationId xmlns:a16="http://schemas.microsoft.com/office/drawing/2014/main" id="{02042581-42B6-4A40-961A-B137AFC0C416}"/>
+              </a:ext>
+            </a:extLst>
+          </p:cNvPr>
+          <p:cNvSpPr>
+            <a:spLocks xmlns:a="http://schemas.openxmlformats.org/drawingml/2006/main" noGrp="1"/>
+          </p:cNvSpPr>
+          <p:nvPr/>
+        </p:nvSpPr>
+        <p:spPr>
+          <a:xfrm xmlns:a="http://schemas.openxmlformats.org/drawingml/2006/main">
+            <a:off x="723900" y="609600"/>
+            <a:ext cx="5143500" cy="247650"/>
+          </a:xfrm>
+          <a:prstGeom xmlns:a="http://schemas.openxmlformats.org/drawingml/2006/main" prst="rect">
+            <a:avLst/>
+          </a:prstGeom>
+          <a:noFill xmlns:a="http://schemas.openxmlformats.org/drawingml/2006/main"/>
+          <a:ln xmlns:a="http://schemas.openxmlformats.org/drawingml/2006/main" w="0">
+            <a:noFill/>
+          </a:ln>
+        </p:spPr>
+        <p:txBody>
+          <a:bodyPr xmlns:a="http://schemas.openxmlformats.org/drawingml/2006/main" lIns="0" tIns="0" rIns="0" bIns="0" anchor="ctr">
+            <a:normAutofit fontScale="100000"/>
+          </a:bodyPr>
+          <a:lstStyle xmlns:a="http://schemas.openxmlformats.org/drawingml/2006/main"/>
+          <a:p xmlns:a="http://schemas.openxmlformats.org/drawingml/2006/main">
+            <a:pPr algn="l">
+              <a:defRPr sz="1050" b="1">
+                <a:solidFill>
+                  <a:srgbClr val="00A7A0"/>
+                </a:solidFill>
+                <a:latin typeface="Avenir Next"/>
+                <a:ea typeface="Avenir Next"/>
+                <a:cs typeface="Avenir Next"/>
+              </a:defRPr>
+            </a:pPr>
+            <a:r>
+              <a:rPr sz="1050" b="1">
+                <a:solidFill>
+                  <a:srgbClr val="00A7A0"/>
+                </a:solidFill>
+                <a:latin typeface="Avenir Next"/>
+                <a:ea typeface="Avenir Next"/>
+                <a:cs typeface="Avenir Next"/>
+              </a:rPr>
+              <a:t>[CLOSING LABEL]</a:t>
+            </a:r>
+          </a:p>
+        </p:txBody>
+      </p:sp>
+      <p:sp>
+        <p:nvSpPr>
+          <p:cNvPr id="3" name="closing-title-16">
+            <a:extLst xmlns:a="http://schemas.openxmlformats.org/drawingml/2006/main">
+              <a:ext uri="{FF2B5EF4-FFF2-40B4-BE49-F238E27FC236}">
+                <a16:creationId xmlns:a16="http://schemas.microsoft.com/office/drawing/2014/main" id="{0161A030-09BD-4CFA-BE4F-BC764884A155}"/>
+              </a:ext>
+            </a:extLst>
+          </p:cNvPr>
+          <p:cNvSpPr>
+            <a:spLocks xmlns:a="http://schemas.openxmlformats.org/drawingml/2006/main" noGrp="1"/>
+          </p:cNvSpPr>
+          <p:nvPr/>
+        </p:nvSpPr>
+        <p:spPr>
+          <a:xfrm xmlns:a="http://schemas.openxmlformats.org/drawingml/2006/main">
+            <a:off x="723900" y="1000125"/>
+            <a:ext cx="7810500" cy="685800"/>
+          </a:xfrm>
+          <a:prstGeom xmlns:a="http://schemas.openxmlformats.org/drawingml/2006/main" prst="rect">
+            <a:avLst/>
+          </a:prstGeom>
+          <a:noFill xmlns:a="http://schemas.openxmlformats.org/drawingml/2006/main"/>
+          <a:ln xmlns:a="http://schemas.openxmlformats.org/drawingml/2006/main" w="0">
+            <a:noFill/>
+          </a:ln>
+        </p:spPr>
+        <p:txBody>
+          <a:bodyPr xmlns:a="http://schemas.openxmlformats.org/drawingml/2006/main" lIns="0" tIns="0" rIns="0" bIns="0" anchor="ctr">
+            <a:normAutofit fontScale="100000"/>
+          </a:bodyPr>
+          <a:lstStyle xmlns:a="http://schemas.openxmlformats.org/drawingml/2006/main"/>
+          <a:p xmlns:a="http://schemas.openxmlformats.org/drawingml/2006/main">
+            <a:pPr algn="l">
+              <a:defRPr sz="3150" b="1">
+                <a:solidFill>
+                  <a:srgbClr val="FFFFFF"/>
+                </a:solidFill>
+                <a:latin typeface="Avenir Next"/>
+                <a:ea typeface="Avenir Next"/>
+                <a:cs typeface="Avenir Next"/>
+              </a:defRPr>
+            </a:pPr>
+            <a:r>
+              <a:rPr sz="3150" b="1">
+                <a:solidFill>
+                  <a:srgbClr val="FFFFFF"/>
+                </a:solidFill>
+                <a:latin typeface="Avenir Next"/>
+                <a:ea typeface="Avenir Next"/>
+                <a:cs typeface="Avenir Next"/>
+              </a:rPr>
+              <a:t>[CLOSING TITLE]</a:t>
+            </a:r>
+          </a:p>
+        </p:txBody>
+      </p:sp>
+      <p:sp>
+        <p:nvSpPr>
+          <p:cNvPr id="4" name="closing-logo-16">
+            <a:extLst xmlns:a="http://schemas.openxmlformats.org/drawingml/2006/main">
+              <a:ext uri="{FF2B5EF4-FFF2-40B4-BE49-F238E27FC236}">
+                <a16:creationId xmlns:a16="http://schemas.microsoft.com/office/drawing/2014/main" id="{34481148-24C0-4409-82E7-8268B5F85AC2}"/>
+              </a:ext>
+            </a:extLst>
+          </p:cNvPr>
+          <p:cNvSpPr>
+            <a:spLocks xmlns:a="http://schemas.openxmlformats.org/drawingml/2006/main" noGrp="1"/>
+          </p:cNvSpPr>
+          <p:nvPr/>
+        </p:nvSpPr>
+        <p:spPr>
+          <a:xfrm xmlns:a="http://schemas.openxmlformats.org/drawingml/2006/main">
+            <a:off x="9982200" y="723900"/>
+            <a:ext cx="1409700" cy="876300"/>
+          </a:xfrm>
+          <a:prstGeom xmlns:a="http://schemas.openxmlformats.org/drawingml/2006/main" prst="rect">
+            <a:avLst/>
+          </a:prstGeom>
+          <a:solidFill xmlns:a="http://schemas.openxmlformats.org/drawingml/2006/main">
+            <a:srgbClr val="17374A"/>
+          </a:solidFill>
+          <a:ln xmlns:a="http://schemas.openxmlformats.org/drawingml/2006/main" w="11906">
+            <a:solidFill>
+              <a:srgbClr val="345265"/>
+            </a:solidFill>
+            <a:prstDash val="solid"/>
+          </a:ln>
+        </p:spPr>
+        <p:txBody>
+          <a:bodyPr xmlns:a="http://schemas.openxmlformats.org/drawingml/2006/main" lIns="114300" tIns="114300" rIns="114300" bIns="114300" anchor="ctr">
+            <a:normAutofit fontScale="100000"/>
+          </a:bodyPr>
+          <a:lstStyle xmlns:a="http://schemas.openxmlformats.org/drawingml/2006/main"/>
+          <a:p xmlns:a="http://schemas.openxmlformats.org/drawingml/2006/main">
+            <a:pPr algn="ctr">
+              <a:defRPr sz="975" b="1">
+                <a:solidFill>
+                  <a:srgbClr val="B8C7D0"/>
+                </a:solidFill>
+                <a:latin typeface="Avenir Next"/>
+                <a:ea typeface="Avenir Next"/>
+                <a:cs typeface="Avenir Next"/>
+              </a:defRPr>
+            </a:pPr>
+            <a:r>
+              <a:rPr sz="975" b="1">
+                <a:solidFill>
+                  <a:srgbClr val="B8C7D0"/>
+                </a:solidFill>
+                <a:latin typeface="Avenir Next"/>
+                <a:ea typeface="Avenir Next"/>
+                <a:cs typeface="Avenir Next"/>
+              </a:rPr>
+              <a:t>[LOGO]</a:t>
+            </a:r>
+          </a:p>
+        </p:txBody>
+      </p:sp>
+      <p:sp>
+        <p:nvSpPr>
+          <p:cNvPr id="5" name="closing-takeaway-16">
+            <a:extLst xmlns:a="http://schemas.openxmlformats.org/drawingml/2006/main">
+              <a:ext uri="{FF2B5EF4-FFF2-40B4-BE49-F238E27FC236}">
+                <a16:creationId xmlns:a16="http://schemas.microsoft.com/office/drawing/2014/main" id="{816190A4-9A0A-4C17-ABE3-DBFF5E8D8331}"/>
+              </a:ext>
+            </a:extLst>
+          </p:cNvPr>
+          <p:cNvSpPr>
+            <a:spLocks xmlns:a="http://schemas.openxmlformats.org/drawingml/2006/main" noGrp="1"/>
+          </p:cNvSpPr>
+          <p:nvPr/>
+        </p:nvSpPr>
+        <p:spPr>
+          <a:xfrm xmlns:a="http://schemas.openxmlformats.org/drawingml/2006/main">
+            <a:off x="723900" y="1981200"/>
+            <a:ext cx="10668000" cy="1066800"/>
+          </a:xfrm>
+          <a:prstGeom xmlns:a="http://schemas.openxmlformats.org/drawingml/2006/main" prst="rect">
+            <a:avLst/>
+          </a:prstGeom>
+          <a:solidFill xmlns:a="http://schemas.openxmlformats.org/drawingml/2006/main">
+            <a:srgbClr val="17374A"/>
+          </a:solidFill>
+          <a:ln xmlns:a="http://schemas.openxmlformats.org/drawingml/2006/main" w="11906">
+            <a:solidFill>
+              <a:srgbClr val="345265"/>
+            </a:solidFill>
+            <a:prstDash val="solid"/>
+          </a:ln>
+        </p:spPr>
+        <p:txBody>
+          <a:bodyPr xmlns:a="http://schemas.openxmlformats.org/drawingml/2006/main" lIns="114300" tIns="114300" rIns="114300" bIns="114300" anchor="ctr">
+            <a:normAutofit fontScale="100000"/>
+          </a:bodyPr>
+          <a:lstStyle xmlns:a="http://schemas.openxmlformats.org/drawingml/2006/main"/>
+          <a:p xmlns:a="http://schemas.openxmlformats.org/drawingml/2006/main">
+            <a:pPr algn="ctr">
+              <a:defRPr sz="1500" b="1">
+                <a:solidFill>
+                  <a:srgbClr val="FFFFFF"/>
+                </a:solidFill>
+                <a:latin typeface="Avenir Next"/>
+                <a:ea typeface="Avenir Next"/>
+                <a:cs typeface="Avenir Next"/>
+              </a:defRPr>
+            </a:pPr>
+            <a:r>
+              <a:rPr sz="1500" b="1">
+                <a:solidFill>
+                  <a:srgbClr val="FFFFFF"/>
+                </a:solidFill>
+                <a:latin typeface="Avenir Next"/>
+                <a:ea typeface="Avenir Next"/>
+                <a:cs typeface="Avenir Next"/>
+              </a:rPr>
+              <a:t>[KEY TAKEAWAY]</a:t>
+            </a:r>
+          </a:p>
+        </p:txBody>
+      </p:sp>
+      <p:sp>
+        <p:nvSpPr>
+          <p:cNvPr id="6" name="next-step-1-16">
+            <a:extLst xmlns:a="http://schemas.openxmlformats.org/drawingml/2006/main">
+              <a:ext uri="{FF2B5EF4-FFF2-40B4-BE49-F238E27FC236}">
+                <a16:creationId xmlns:a16="http://schemas.microsoft.com/office/drawing/2014/main" id="{41A4CFAA-65F7-4B6F-9B21-44E65B324A4C}"/>
+              </a:ext>
+            </a:extLst>
+          </p:cNvPr>
+          <p:cNvSpPr>
+            <a:spLocks xmlns:a="http://schemas.openxmlformats.org/drawingml/2006/main" noGrp="1"/>
+          </p:cNvSpPr>
+          <p:nvPr/>
+        </p:nvSpPr>
+        <p:spPr>
+          <a:xfrm xmlns:a="http://schemas.openxmlformats.org/drawingml/2006/main">
+            <a:off x="723900" y="3486150"/>
+            <a:ext cx="3352800" cy="1352550"/>
+          </a:xfrm>
+          <a:prstGeom xmlns:a="http://schemas.openxmlformats.org/drawingml/2006/main" prst="rect">
+            <a:avLst/>
+          </a:prstGeom>
+          <a:solidFill xmlns:a="http://schemas.openxmlformats.org/drawingml/2006/main">
+            <a:srgbClr val="DDF3F0"/>
+          </a:solidFill>
+          <a:ln xmlns:a="http://schemas.openxmlformats.org/drawingml/2006/main" w="11906">
+            <a:solidFill>
+              <a:srgbClr val="00A7A0"/>
+            </a:solidFill>
+            <a:prstDash val="solid"/>
+          </a:ln>
+        </p:spPr>
+        <p:txBody>
+          <a:bodyPr xmlns:a="http://schemas.openxmlformats.org/drawingml/2006/main" lIns="114300" tIns="114300" rIns="114300" bIns="114300" anchor="ctr">
+            <a:normAutofit fontScale="100000"/>
+          </a:bodyPr>
+          <a:lstStyle xmlns:a="http://schemas.openxmlformats.org/drawingml/2006/main"/>
+          <a:p xmlns:a="http://schemas.openxmlformats.org/drawingml/2006/main">
+            <a:pPr algn="ctr">
+              <a:defRPr sz="1125" b="1">
+                <a:solidFill>
+                  <a:srgbClr val="087D79"/>
+                </a:solidFill>
+                <a:latin typeface="Avenir Next"/>
+                <a:ea typeface="Avenir Next"/>
+                <a:cs typeface="Avenir Next"/>
+              </a:defRPr>
+            </a:pPr>
+            <a:r>
+              <a:rPr sz="1125" b="1">
+                <a:solidFill>
+                  <a:srgbClr val="087D79"/>
+                </a:solidFill>
+                <a:latin typeface="Avenir Next"/>
+                <a:ea typeface="Avenir Next"/>
+                <a:cs typeface="Avenir Next"/>
+              </a:rPr>
+              <a:t>[NEXT STEP 01]</a:t>
+            </a:r>
+          </a:p>
+        </p:txBody>
+      </p:sp>
+      <p:sp>
+        <p:nvSpPr>
+          <p:cNvPr id="7" name="next-step-2-16">
+            <a:extLst xmlns:a="http://schemas.openxmlformats.org/drawingml/2006/main">
+              <a:ext uri="{FF2B5EF4-FFF2-40B4-BE49-F238E27FC236}">
+                <a16:creationId xmlns:a16="http://schemas.microsoft.com/office/drawing/2014/main" id="{B2210B93-C0E9-4274-A098-5B7B3F3FD1A6}"/>
+              </a:ext>
+            </a:extLst>
+          </p:cNvPr>
+          <p:cNvSpPr>
+            <a:spLocks xmlns:a="http://schemas.openxmlformats.org/drawingml/2006/main" noGrp="1"/>
+          </p:cNvSpPr>
+          <p:nvPr/>
+        </p:nvSpPr>
+        <p:spPr>
+          <a:xfrm xmlns:a="http://schemas.openxmlformats.org/drawingml/2006/main">
+            <a:off x="4381500" y="3486150"/>
+            <a:ext cx="3352800" cy="1352550"/>
+          </a:xfrm>
+          <a:prstGeom xmlns:a="http://schemas.openxmlformats.org/drawingml/2006/main" prst="rect">
+            <a:avLst/>
+          </a:prstGeom>
+          <a:solidFill xmlns:a="http://schemas.openxmlformats.org/drawingml/2006/main">
+            <a:srgbClr val="17374A"/>
+          </a:solidFill>
+          <a:ln xmlns:a="http://schemas.openxmlformats.org/drawingml/2006/main" w="11906">
+            <a:solidFill>
+              <a:srgbClr val="345265"/>
+            </a:solidFill>
+            <a:prstDash val="solid"/>
+          </a:ln>
+        </p:spPr>
+        <p:txBody>
+          <a:bodyPr xmlns:a="http://schemas.openxmlformats.org/drawingml/2006/main" lIns="114300" tIns="114300" rIns="114300" bIns="114300" anchor="ctr">
+            <a:normAutofit fontScale="100000"/>
+          </a:bodyPr>
+          <a:lstStyle xmlns:a="http://schemas.openxmlformats.org/drawingml/2006/main"/>
+          <a:p xmlns:a="http://schemas.openxmlformats.org/drawingml/2006/main">
+            <a:pPr algn="ctr">
+              <a:defRPr sz="1125" b="1">
+                <a:solidFill>
+                  <a:srgbClr val="B8C7D0"/>
+                </a:solidFill>
+                <a:latin typeface="Avenir Next"/>
+                <a:ea typeface="Avenir Next"/>
+                <a:cs typeface="Avenir Next"/>
+              </a:defRPr>
+            </a:pPr>
+            <a:r>
+              <a:rPr sz="1125" b="1">
+                <a:solidFill>
+                  <a:srgbClr val="B8C7D0"/>
+                </a:solidFill>
+                <a:latin typeface="Avenir Next"/>
+                <a:ea typeface="Avenir Next"/>
+                <a:cs typeface="Avenir Next"/>
+              </a:rPr>
+              <a:t>[NEXT STEP 02]</a:t>
+            </a:r>
+          </a:p>
+        </p:txBody>
+      </p:sp>
+      <p:sp>
+        <p:nvSpPr>
+          <p:cNvPr id="8" name="next-step-3-16">
+            <a:extLst xmlns:a="http://schemas.openxmlformats.org/drawingml/2006/main">
+              <a:ext uri="{FF2B5EF4-FFF2-40B4-BE49-F238E27FC236}">
+                <a16:creationId xmlns:a16="http://schemas.microsoft.com/office/drawing/2014/main" id="{BFE7AAF5-3244-43F7-82C6-AAE35306A3F9}"/>
+              </a:ext>
+            </a:extLst>
+          </p:cNvPr>
+          <p:cNvSpPr>
+            <a:spLocks xmlns:a="http://schemas.openxmlformats.org/drawingml/2006/main" noGrp="1"/>
+          </p:cNvSpPr>
+          <p:nvPr/>
+        </p:nvSpPr>
+        <p:spPr>
+          <a:xfrm xmlns:a="http://schemas.openxmlformats.org/drawingml/2006/main">
+            <a:off x="8039100" y="3486150"/>
+            <a:ext cx="3352800" cy="1352550"/>
+          </a:xfrm>
+          <a:prstGeom xmlns:a="http://schemas.openxmlformats.org/drawingml/2006/main" prst="rect">
+            <a:avLst/>
+          </a:prstGeom>
+          <a:solidFill xmlns:a="http://schemas.openxmlformats.org/drawingml/2006/main">
+            <a:srgbClr val="17374A"/>
+          </a:solidFill>
+          <a:ln xmlns:a="http://schemas.openxmlformats.org/drawingml/2006/main" w="11906">
+            <a:solidFill>
+              <a:srgbClr val="345265"/>
+            </a:solidFill>
+            <a:prstDash val="solid"/>
+          </a:ln>
+        </p:spPr>
+        <p:txBody>
+          <a:bodyPr xmlns:a="http://schemas.openxmlformats.org/drawingml/2006/main" lIns="114300" tIns="114300" rIns="114300" bIns="114300" anchor="ctr">
+            <a:normAutofit fontScale="100000"/>
+          </a:bodyPr>
+          <a:lstStyle xmlns:a="http://schemas.openxmlformats.org/drawingml/2006/main"/>
+          <a:p xmlns:a="http://schemas.openxmlformats.org/drawingml/2006/main">
+            <a:pPr algn="ctr">
+              <a:defRPr sz="1125" b="1">
+                <a:solidFill>
+                  <a:srgbClr val="B8C7D0"/>
+                </a:solidFill>
+                <a:latin typeface="Avenir Next"/>
+                <a:ea typeface="Avenir Next"/>
+                <a:cs typeface="Avenir Next"/>
+              </a:defRPr>
+            </a:pPr>
+            <a:r>
+              <a:rPr sz="1125" b="1">
+                <a:solidFill>
+                  <a:srgbClr val="B8C7D0"/>
+                </a:solidFill>
+                <a:latin typeface="Avenir Next"/>
+                <a:ea typeface="Avenir Next"/>
+                <a:cs typeface="Avenir Next"/>
+              </a:rPr>
+              <a:t>[NEXT STEP 03]</a:t>
+            </a:r>
+          </a:p>
+        </p:txBody>
+      </p:sp>
+      <p:sp>
+        <p:nvSpPr>
+          <p:cNvPr id="9" name="closing-contact-16">
+            <a:extLst xmlns:a="http://schemas.openxmlformats.org/drawingml/2006/main">
+              <a:ext uri="{FF2B5EF4-FFF2-40B4-BE49-F238E27FC236}">
+                <a16:creationId xmlns:a16="http://schemas.microsoft.com/office/drawing/2014/main" id="{226A91A1-0359-4A7E-A2E9-BE9F2FDCA685}"/>
+              </a:ext>
+            </a:extLst>
+          </p:cNvPr>
+          <p:cNvSpPr>
+            <a:spLocks xmlns:a="http://schemas.openxmlformats.org/drawingml/2006/main" noGrp="1"/>
+          </p:cNvSpPr>
+          <p:nvPr/>
+        </p:nvSpPr>
+        <p:spPr>
+          <a:xfrm xmlns:a="http://schemas.openxmlformats.org/drawingml/2006/main">
+            <a:off x="723900" y="5505450"/>
+            <a:ext cx="7239000" cy="285750"/>
+          </a:xfrm>
+          <a:prstGeom xmlns:a="http://schemas.openxmlformats.org/drawingml/2006/main" prst="rect">
+            <a:avLst/>
+          </a:prstGeom>
+          <a:noFill xmlns:a="http://schemas.openxmlformats.org/drawingml/2006/main"/>
+          <a:ln xmlns:a="http://schemas.openxmlformats.org/drawingml/2006/main" w="0">
+            <a:noFill/>
+          </a:ln>
+        </p:spPr>
+        <p:txBody>
+          <a:bodyPr xmlns:a="http://schemas.openxmlformats.org/drawingml/2006/main" lIns="0" tIns="0" rIns="0" bIns="0" anchor="ctr">
+            <a:normAutofit fontScale="100000"/>
+          </a:bodyPr>
+          <a:lstStyle xmlns:a="http://schemas.openxmlformats.org/drawingml/2006/main"/>
+          <a:p xmlns:a="http://schemas.openxmlformats.org/drawingml/2006/main">
+            <a:pPr algn="l">
+              <a:defRPr sz="1125" b="0">
+                <a:solidFill>
+                  <a:srgbClr val="B8C7D0"/>
+                </a:solidFill>
+                <a:latin typeface="Avenir Next"/>
+                <a:ea typeface="Avenir Next"/>
+                <a:cs typeface="Avenir Next"/>
+              </a:defRPr>
+            </a:pPr>
+            <a:r>
+              <a:rPr sz="1125" b="0">
+                <a:solidFill>
+                  <a:srgbClr val="B8C7D0"/>
+                </a:solidFill>
+                <a:latin typeface="Avenir Next"/>
+                <a:ea typeface="Avenir Next"/>
+                <a:cs typeface="Avenir Next"/>
+              </a:rPr>
+              <a:t>[OWNER / CONTACT / DATE]</a:t>
+            </a:r>
+          </a:p>
+        </p:txBody>
+      </p:sp>
+      <p:sp>
+        <p:nvSpPr>
+          <p:cNvPr id="10" name="footer-rule-16">
+            <a:extLst xmlns:a="http://schemas.openxmlformats.org/drawingml/2006/main">
+              <a:ext uri="{FF2B5EF4-FFF2-40B4-BE49-F238E27FC236}">
+                <a16:creationId xmlns:a16="http://schemas.microsoft.com/office/drawing/2014/main" id="{0E238EB8-9FF9-44FA-9600-B767E2B1DFF2}"/>
+              </a:ext>
+            </a:extLst>
+          </p:cNvPr>
+          <p:cNvSpPr>
+            <a:spLocks xmlns:a="http://schemas.openxmlformats.org/drawingml/2006/main" noGrp="1"/>
+          </p:cNvSpPr>
+          <p:nvPr/>
+        </p:nvSpPr>
+        <p:spPr>
+          <a:xfrm xmlns:a="http://schemas.openxmlformats.org/drawingml/2006/main">
+            <a:off x="609600" y="6457950"/>
+            <a:ext cx="10972800" cy="9525"/>
+          </a:xfrm>
+          <a:prstGeom xmlns:a="http://schemas.openxmlformats.org/drawingml/2006/main" prst="rect">
+            <a:avLst/>
+          </a:prstGeom>
+          <a:solidFill xmlns:a="http://schemas.openxmlformats.org/drawingml/2006/main">
+            <a:srgbClr val="345265"/>
+          </a:solidFill>
+          <a:ln xmlns:a="http://schemas.openxmlformats.org/drawingml/2006/main" w="0">
+            <a:noFill/>
+          </a:ln>
+        </p:spPr>
+      </p:sp>
+      <p:sp>
+        <p:nvSpPr>
+          <p:cNvPr id="11" name="page-16">
+            <a:extLst xmlns:a="http://schemas.openxmlformats.org/drawingml/2006/main">
+              <a:ext uri="{FF2B5EF4-FFF2-40B4-BE49-F238E27FC236}">
+                <a16:creationId xmlns:a16="http://schemas.microsoft.com/office/drawing/2014/main" id="{1E4D0E14-109E-4A83-909F-E2DF9222C015}"/>
+              </a:ext>
+            </a:extLst>
+          </p:cNvPr>
+          <p:cNvSpPr>
+            <a:spLocks xmlns:a="http://schemas.openxmlformats.org/drawingml/2006/main" noGrp="1"/>
+          </p:cNvSpPr>
+          <p:nvPr/>
+        </p:nvSpPr>
+        <p:spPr>
+          <a:xfrm xmlns:a="http://schemas.openxmlformats.org/drawingml/2006/main">
+            <a:off x="11144250" y="6515100"/>
+            <a:ext cx="438150" cy="171450"/>
+          </a:xfrm>
+          <a:prstGeom xmlns:a="http://schemas.openxmlformats.org/drawingml/2006/main" prst="rect">
+            <a:avLst/>
+          </a:prstGeom>
+          <a:noFill xmlns:a="http://schemas.openxmlformats.org/drawingml/2006/main"/>
+          <a:ln xmlns:a="http://schemas.openxmlformats.org/drawingml/2006/main" w="0">
+            <a:noFill/>
+          </a:ln>
+        </p:spPr>
+        <p:txBody>
+          <a:bodyPr xmlns:a="http://schemas.openxmlformats.org/drawingml/2006/main" lIns="0" tIns="0" rIns="0" bIns="0" anchor="ctr">
+            <a:normAutofit fontScale="100000"/>
+          </a:bodyPr>
+          <a:lstStyle xmlns:a="http://schemas.openxmlformats.org/drawingml/2006/main"/>
+          <a:p xmlns:a="http://schemas.openxmlformats.org/drawingml/2006/main">
+            <a:pPr algn="r">
+              <a:defRPr sz="825" b="1">
+                <a:solidFill>
+                  <a:srgbClr val="B8C7D0"/>
+                </a:solidFill>
+                <a:latin typeface="Avenir Next"/>
+                <a:ea typeface="Avenir Next"/>
+                <a:cs typeface="Avenir Next"/>
+              </a:defRPr>
+            </a:pPr>
+            <a:r>
+              <a:rPr sz="825" b="1">
+                <a:solidFill>
+                  <a:srgbClr val="B8C7D0"/>
+                </a:solidFill>
+                <a:latin typeface="Avenir Next"/>
+                <a:ea typeface="Avenir Next"/>
+                <a:cs typeface="Avenir Next"/>
+              </a:rPr>
+              <a:t>16</a:t>
+            </a:r>
+          </a:p>
+        </p:txBody>
+      </p:sp>
+    </p:spTree>
+    <p:extLst>
+      <p:ext uri="{BB962C8B-B14F-4D97-AF65-F5344CB8AC3E}">
+        <p14:creationId xmlns:p14="http://schemas.microsoft.com/office/powerpoint/2010/main" val="1092590703"/>
       </p:ext>
     </p:extLst>
   </p:cSld>
@@ -12577,6 +18678,385 @@
 </p:sld>
 </file>
 
+<file path=ppt/slides/slide9.xml><?xml version="1.0" encoding="utf-8"?>
+<p:sld xmlns:p="http://schemas.openxmlformats.org/presentationml/2006/main">
+  <p:cSld>
+    <p:bg>
+      <p:bgPr>
+        <a:solidFill xmlns:a="http://schemas.openxmlformats.org/drawingml/2006/main">
+          <a:srgbClr val="102638"/>
+        </a:solidFill>
+      </p:bgPr>
+    </p:bg>
+    <p:spTree>
+      <p:nvGrpSpPr>
+        <p:cNvPr id="1" name=""/>
+        <p:cNvGrpSpPr/>
+        <p:nvPr/>
+      </p:nvGrpSpPr>
+      <p:grpSpPr>
+        <a:xfrm xmlns:a="http://schemas.openxmlformats.org/drawingml/2006/main"/>
+      </p:grpSpPr>
+      <p:sp>
+        <p:nvSpPr>
+          <p:cNvPr id="8" name="section-left-accent-09">
+            <a:extLst xmlns:a="http://schemas.openxmlformats.org/drawingml/2006/main">
+              <a:ext uri="{FF2B5EF4-FFF2-40B4-BE49-F238E27FC236}">
+                <a16:creationId xmlns:a16="http://schemas.microsoft.com/office/drawing/2014/main" id="{80550AD2-CDDA-4F9E-AB74-B4543AB61293}"/>
+              </a:ext>
+            </a:extLst>
+          </p:cNvPr>
+          <p:cNvSpPr>
+            <a:spLocks xmlns:a="http://schemas.openxmlformats.org/drawingml/2006/main" noGrp="1"/>
+          </p:cNvSpPr>
+          <p:nvPr/>
+        </p:nvSpPr>
+        <p:spPr>
+          <a:xfrm xmlns:a="http://schemas.openxmlformats.org/drawingml/2006/main">
+            <a:off x="0" y="0"/>
+            <a:ext cx="142875" cy="6858000"/>
+          </a:xfrm>
+          <a:prstGeom xmlns:a="http://schemas.openxmlformats.org/drawingml/2006/main" prst="rect">
+            <a:avLst/>
+          </a:prstGeom>
+          <a:solidFill xmlns:a="http://schemas.openxmlformats.org/drawingml/2006/main">
+            <a:srgbClr val="00A7A0"/>
+          </a:solidFill>
+          <a:ln xmlns:a="http://schemas.openxmlformats.org/drawingml/2006/main" w="0">
+            <a:noFill/>
+          </a:ln>
+        </p:spPr>
+      </p:sp>
+      <p:sp>
+        <p:nvSpPr>
+          <p:cNvPr id="2" name="section-label-09">
+            <a:extLst xmlns:a="http://schemas.openxmlformats.org/drawingml/2006/main">
+              <a:ext uri="{FF2B5EF4-FFF2-40B4-BE49-F238E27FC236}">
+                <a16:creationId xmlns:a16="http://schemas.microsoft.com/office/drawing/2014/main" id="{01CDB1A1-7F48-47DB-AA90-7265D008F6CC}"/>
+              </a:ext>
+            </a:extLst>
+          </p:cNvPr>
+          <p:cNvSpPr>
+            <a:spLocks xmlns:a="http://schemas.openxmlformats.org/drawingml/2006/main" noGrp="1"/>
+          </p:cNvSpPr>
+          <p:nvPr/>
+        </p:nvSpPr>
+        <p:spPr>
+          <a:xfrm xmlns:a="http://schemas.openxmlformats.org/drawingml/2006/main">
+            <a:off x="723900" y="685800"/>
+            <a:ext cx="4953000" cy="266700"/>
+          </a:xfrm>
+          <a:prstGeom xmlns:a="http://schemas.openxmlformats.org/drawingml/2006/main" prst="rect">
+            <a:avLst/>
+          </a:prstGeom>
+          <a:noFill xmlns:a="http://schemas.openxmlformats.org/drawingml/2006/main"/>
+          <a:ln xmlns:a="http://schemas.openxmlformats.org/drawingml/2006/main" w="0">
+            <a:noFill/>
+          </a:ln>
+        </p:spPr>
+        <p:txBody>
+          <a:bodyPr xmlns:a="http://schemas.openxmlformats.org/drawingml/2006/main" lIns="0" tIns="0" rIns="0" bIns="0" anchor="ctr">
+            <a:normAutofit fontScale="100000"/>
+          </a:bodyPr>
+          <a:lstStyle xmlns:a="http://schemas.openxmlformats.org/drawingml/2006/main"/>
+          <a:p xmlns:a="http://schemas.openxmlformats.org/drawingml/2006/main">
+            <a:pPr algn="l">
+              <a:defRPr sz="1125" b="1">
+                <a:solidFill>
+                  <a:srgbClr val="00A7A0"/>
+                </a:solidFill>
+                <a:latin typeface="Avenir Next"/>
+                <a:ea typeface="Avenir Next"/>
+                <a:cs typeface="Avenir Next"/>
+              </a:defRPr>
+            </a:pPr>
+            <a:r>
+              <a:rPr sz="1125" b="1">
+                <a:solidFill>
+                  <a:srgbClr val="00A7A0"/>
+                </a:solidFill>
+                <a:latin typeface="Avenir Next"/>
+                <a:ea typeface="Avenir Next"/>
+                <a:cs typeface="Avenir Next"/>
+              </a:rPr>
+              <a:t>[SECTION LABEL]</a:t>
+            </a:r>
+          </a:p>
+        </p:txBody>
+      </p:sp>
+      <p:sp>
+        <p:nvSpPr>
+          <p:cNvPr id="3" name="section-title-09">
+            <a:extLst xmlns:a="http://schemas.openxmlformats.org/drawingml/2006/main">
+              <a:ext uri="{FF2B5EF4-FFF2-40B4-BE49-F238E27FC236}">
+                <a16:creationId xmlns:a16="http://schemas.microsoft.com/office/drawing/2014/main" id="{FCD345BE-F8BF-4B93-B747-1758FFD82E7E}"/>
+              </a:ext>
+            </a:extLst>
+          </p:cNvPr>
+          <p:cNvSpPr>
+            <a:spLocks xmlns:a="http://schemas.openxmlformats.org/drawingml/2006/main" noGrp="1"/>
+          </p:cNvSpPr>
+          <p:nvPr/>
+        </p:nvSpPr>
+        <p:spPr>
+          <a:xfrm xmlns:a="http://schemas.openxmlformats.org/drawingml/2006/main">
+            <a:off x="723900" y="1571625"/>
+            <a:ext cx="9620250" cy="1257300"/>
+          </a:xfrm>
+          <a:prstGeom xmlns:a="http://schemas.openxmlformats.org/drawingml/2006/main" prst="rect">
+            <a:avLst/>
+          </a:prstGeom>
+          <a:noFill xmlns:a="http://schemas.openxmlformats.org/drawingml/2006/main"/>
+          <a:ln xmlns:a="http://schemas.openxmlformats.org/drawingml/2006/main" w="0">
+            <a:noFill/>
+          </a:ln>
+        </p:spPr>
+        <p:txBody>
+          <a:bodyPr xmlns:a="http://schemas.openxmlformats.org/drawingml/2006/main" lIns="0" tIns="0" rIns="0" bIns="0" anchor="ctr">
+            <a:normAutofit fontScale="100000"/>
+          </a:bodyPr>
+          <a:lstStyle xmlns:a="http://schemas.openxmlformats.org/drawingml/2006/main"/>
+          <a:p xmlns:a="http://schemas.openxmlformats.org/drawingml/2006/main">
+            <a:pPr algn="l">
+              <a:defRPr sz="3900" b="1">
+                <a:solidFill>
+                  <a:srgbClr val="FFFFFF"/>
+                </a:solidFill>
+                <a:latin typeface="Avenir Next"/>
+                <a:ea typeface="Avenir Next"/>
+                <a:cs typeface="Avenir Next"/>
+              </a:defRPr>
+            </a:pPr>
+            <a:r>
+              <a:rPr sz="3900" b="1">
+                <a:solidFill>
+                  <a:srgbClr val="FFFFFF"/>
+                </a:solidFill>
+                <a:latin typeface="Avenir Next"/>
+                <a:ea typeface="Avenir Next"/>
+                <a:cs typeface="Avenir Next"/>
+              </a:rPr>
+              <a:t>[SECTION TITLE]</a:t>
+            </a:r>
+          </a:p>
+        </p:txBody>
+      </p:sp>
+      <p:sp>
+        <p:nvSpPr>
+          <p:cNvPr id="4" name="section-context-09">
+            <a:extLst xmlns:a="http://schemas.openxmlformats.org/drawingml/2006/main">
+              <a:ext uri="{FF2B5EF4-FFF2-40B4-BE49-F238E27FC236}">
+                <a16:creationId xmlns:a16="http://schemas.microsoft.com/office/drawing/2014/main" id="{0E72F424-B3A8-4DFF-921C-A6A7E5595956}"/>
+              </a:ext>
+            </a:extLst>
+          </p:cNvPr>
+          <p:cNvSpPr>
+            <a:spLocks xmlns:a="http://schemas.openxmlformats.org/drawingml/2006/main" noGrp="1"/>
+          </p:cNvSpPr>
+          <p:nvPr/>
+        </p:nvSpPr>
+        <p:spPr>
+          <a:xfrm xmlns:a="http://schemas.openxmlformats.org/drawingml/2006/main">
+            <a:off x="723900" y="3105150"/>
+            <a:ext cx="8191500" cy="590550"/>
+          </a:xfrm>
+          <a:prstGeom xmlns:a="http://schemas.openxmlformats.org/drawingml/2006/main" prst="rect">
+            <a:avLst/>
+          </a:prstGeom>
+          <a:noFill xmlns:a="http://schemas.openxmlformats.org/drawingml/2006/main"/>
+          <a:ln xmlns:a="http://schemas.openxmlformats.org/drawingml/2006/main" w="0">
+            <a:noFill/>
+          </a:ln>
+        </p:spPr>
+        <p:txBody>
+          <a:bodyPr xmlns:a="http://schemas.openxmlformats.org/drawingml/2006/main" lIns="0" tIns="0" rIns="0" bIns="0" anchor="ctr">
+            <a:normAutofit fontScale="100000"/>
+          </a:bodyPr>
+          <a:lstStyle xmlns:a="http://schemas.openxmlformats.org/drawingml/2006/main"/>
+          <a:p xmlns:a="http://schemas.openxmlformats.org/drawingml/2006/main">
+            <a:pPr algn="l">
+              <a:defRPr sz="1725" b="0">
+                <a:solidFill>
+                  <a:srgbClr val="B8C7D0"/>
+                </a:solidFill>
+                <a:latin typeface="Avenir Next"/>
+                <a:ea typeface="Avenir Next"/>
+                <a:cs typeface="Avenir Next"/>
+              </a:defRPr>
+            </a:pPr>
+            <a:r>
+              <a:rPr sz="1725" b="0">
+                <a:solidFill>
+                  <a:srgbClr val="B8C7D0"/>
+                </a:solidFill>
+                <a:latin typeface="Avenir Next"/>
+                <a:ea typeface="Avenir Next"/>
+                <a:cs typeface="Avenir Next"/>
+              </a:rPr>
+              <a:t>[Optional section context]</a:t>
+            </a:r>
+          </a:p>
+        </p:txBody>
+      </p:sp>
+      <p:sp>
+        <p:nvSpPr>
+          <p:cNvPr id="5" name="section-support-09">
+            <a:extLst xmlns:a="http://schemas.openxmlformats.org/drawingml/2006/main">
+              <a:ext uri="{FF2B5EF4-FFF2-40B4-BE49-F238E27FC236}">
+                <a16:creationId xmlns:a16="http://schemas.microsoft.com/office/drawing/2014/main" id="{DB5BCAEB-6700-4249-B5A4-6514026CDE03}"/>
+              </a:ext>
+            </a:extLst>
+          </p:cNvPr>
+          <p:cNvSpPr>
+            <a:spLocks xmlns:a="http://schemas.openxmlformats.org/drawingml/2006/main" noGrp="1"/>
+          </p:cNvSpPr>
+          <p:nvPr/>
+        </p:nvSpPr>
+        <p:spPr>
+          <a:xfrm xmlns:a="http://schemas.openxmlformats.org/drawingml/2006/main">
+            <a:off x="723900" y="4933950"/>
+            <a:ext cx="5905500" cy="781050"/>
+          </a:xfrm>
+          <a:prstGeom xmlns:a="http://schemas.openxmlformats.org/drawingml/2006/main" prst="rect">
+            <a:avLst/>
+          </a:prstGeom>
+          <a:solidFill xmlns:a="http://schemas.openxmlformats.org/drawingml/2006/main">
+            <a:srgbClr val="17374A"/>
+          </a:solidFill>
+          <a:ln xmlns:a="http://schemas.openxmlformats.org/drawingml/2006/main" w="11906">
+            <a:solidFill>
+              <a:srgbClr val="345265"/>
+            </a:solidFill>
+            <a:prstDash val="solid"/>
+          </a:ln>
+        </p:spPr>
+        <p:txBody>
+          <a:bodyPr xmlns:a="http://schemas.openxmlformats.org/drawingml/2006/main" lIns="114300" tIns="114300" rIns="114300" bIns="114300" anchor="ctr">
+            <a:normAutofit fontScale="100000"/>
+          </a:bodyPr>
+          <a:lstStyle xmlns:a="http://schemas.openxmlformats.org/drawingml/2006/main"/>
+          <a:p xmlns:a="http://schemas.openxmlformats.org/drawingml/2006/main">
+            <a:pPr algn="ctr">
+              <a:defRPr sz="975" b="1">
+                <a:solidFill>
+                  <a:srgbClr val="B8C7D0"/>
+                </a:solidFill>
+                <a:latin typeface="Avenir Next"/>
+                <a:ea typeface="Avenir Next"/>
+                <a:cs typeface="Avenir Next"/>
+              </a:defRPr>
+            </a:pPr>
+            <a:r>
+              <a:rPr sz="975" b="1">
+                <a:solidFill>
+                  <a:srgbClr val="B8C7D0"/>
+                </a:solidFill>
+                <a:latin typeface="Avenir Next"/>
+                <a:ea typeface="Avenir Next"/>
+                <a:cs typeface="Avenir Next"/>
+              </a:rPr>
+              <a:t>[OPTIONAL SUPPORTING OBJECT]</a:t>
+            </a:r>
+          </a:p>
+        </p:txBody>
+      </p:sp>
+      <p:sp>
+        <p:nvSpPr>
+          <p:cNvPr id="6" name="footer-rule-9">
+            <a:extLst xmlns:a="http://schemas.openxmlformats.org/drawingml/2006/main">
+              <a:ext uri="{FF2B5EF4-FFF2-40B4-BE49-F238E27FC236}">
+                <a16:creationId xmlns:a16="http://schemas.microsoft.com/office/drawing/2014/main" id="{50D4515A-B093-43B1-830E-D967E1AEA778}"/>
+              </a:ext>
+            </a:extLst>
+          </p:cNvPr>
+          <p:cNvSpPr>
+            <a:spLocks xmlns:a="http://schemas.openxmlformats.org/drawingml/2006/main" noGrp="1"/>
+          </p:cNvSpPr>
+          <p:nvPr/>
+        </p:nvSpPr>
+        <p:spPr>
+          <a:xfrm xmlns:a="http://schemas.openxmlformats.org/drawingml/2006/main">
+            <a:off x="609600" y="6457950"/>
+            <a:ext cx="10972800" cy="9525"/>
+          </a:xfrm>
+          <a:prstGeom xmlns:a="http://schemas.openxmlformats.org/drawingml/2006/main" prst="rect">
+            <a:avLst/>
+          </a:prstGeom>
+          <a:solidFill xmlns:a="http://schemas.openxmlformats.org/drawingml/2006/main">
+            <a:srgbClr val="345265"/>
+          </a:solidFill>
+          <a:ln xmlns:a="http://schemas.openxmlformats.org/drawingml/2006/main" w="0">
+            <a:noFill/>
+          </a:ln>
+        </p:spPr>
+      </p:sp>
+      <p:sp>
+        <p:nvSpPr>
+          <p:cNvPr id="7" name="page-9">
+            <a:extLst xmlns:a="http://schemas.openxmlformats.org/drawingml/2006/main">
+              <a:ext uri="{FF2B5EF4-FFF2-40B4-BE49-F238E27FC236}">
+                <a16:creationId xmlns:a16="http://schemas.microsoft.com/office/drawing/2014/main" id="{80C59651-4501-4FC6-B9CE-4B028C0E35BD}"/>
+              </a:ext>
+            </a:extLst>
+          </p:cNvPr>
+          <p:cNvSpPr>
+            <a:spLocks xmlns:a="http://schemas.openxmlformats.org/drawingml/2006/main" noGrp="1"/>
+          </p:cNvSpPr>
+          <p:nvPr/>
+        </p:nvSpPr>
+        <p:spPr>
+          <a:xfrm xmlns:a="http://schemas.openxmlformats.org/drawingml/2006/main">
+            <a:off x="11144250" y="6515100"/>
+            <a:ext cx="438150" cy="171450"/>
+          </a:xfrm>
+          <a:prstGeom xmlns:a="http://schemas.openxmlformats.org/drawingml/2006/main" prst="rect">
+            <a:avLst/>
+          </a:prstGeom>
+          <a:noFill xmlns:a="http://schemas.openxmlformats.org/drawingml/2006/main"/>
+          <a:ln xmlns:a="http://schemas.openxmlformats.org/drawingml/2006/main" w="0">
+            <a:noFill/>
+          </a:ln>
+        </p:spPr>
+        <p:txBody>
+          <a:bodyPr xmlns:a="http://schemas.openxmlformats.org/drawingml/2006/main" lIns="0" tIns="0" rIns="0" bIns="0" anchor="ctr">
+            <a:normAutofit fontScale="100000"/>
+          </a:bodyPr>
+          <a:lstStyle xmlns:a="http://schemas.openxmlformats.org/drawingml/2006/main"/>
+          <a:p xmlns:a="http://schemas.openxmlformats.org/drawingml/2006/main">
+            <a:pPr algn="r">
+              <a:defRPr sz="825" b="1">
+                <a:solidFill>
+                  <a:srgbClr val="B8C7D0"/>
+                </a:solidFill>
+                <a:latin typeface="Avenir Next"/>
+                <a:ea typeface="Avenir Next"/>
+                <a:cs typeface="Avenir Next"/>
+              </a:defRPr>
+            </a:pPr>
+            <a:r>
+              <a:rPr sz="825" b="1">
+                <a:solidFill>
+                  <a:srgbClr val="B8C7D0"/>
+                </a:solidFill>
+                <a:latin typeface="Avenir Next"/>
+                <a:ea typeface="Avenir Next"/>
+                <a:cs typeface="Avenir Next"/>
+              </a:rPr>
+              <a:t>09</a:t>
+            </a:r>
+          </a:p>
+        </p:txBody>
+      </p:sp>
+    </p:spTree>
+    <p:extLst>
+      <p:ext uri="{BB962C8B-B14F-4D97-AF65-F5344CB8AC3E}">
+        <p14:creationId xmlns:p14="http://schemas.microsoft.com/office/powerpoint/2010/main" val="1385667799"/>
+      </p:ext>
+    </p:extLst>
+  </p:cSld>
+</p:sld>
+</file>
+
 <file path=ppt/theme/theme1.xml><?xml version="1.0" encoding="utf-8"?>
 <a:theme xmlns:a="http://schemas.openxmlformats.org/drawingml/2006/main" name="ChatGPT">
   <a:themeElements>
